--- a/Clase_1/PPT/Clase01_Variable_Aleatoria.pptx
+++ b/Clase_1/PPT/Clase01_Variable_Aleatoria.pptx
@@ -4,6 +4,9 @@
   <p:sldMasterIdLst>
     <p:sldMasterId id="2147483648" r:id="rId1"/>
   </p:sldMasterIdLst>
+  <p:notesMasterIdLst>
+    <p:notesMasterId r:id="rId28"/>
+  </p:notesMasterIdLst>
   <p:sldIdLst>
     <p:sldId id="256" r:id="rId2"/>
     <p:sldId id="257" r:id="rId3"/>
@@ -32,9 +35,6 @@
     <p:sldId id="280" r:id="rId26"/>
     <p:sldId id="281" r:id="rId27"/>
   </p:sldIdLst>
-  <p:notesMasterIdLst>
-    <p:notesMasterId r:id="rId28"/>
-  </p:notesMasterIdLst>
   <p:sldSz cx="12192000" cy="6858000"/>
   <p:notesSz cx="6858000" cy="12192000"/>
   <p:defaultTextStyle>
@@ -129,13 +129,20 @@
       </a:defRPr>
     </a:lvl9pPr>
   </p:defaultTextStyle>
+  <p:extLst>
+    <p:ext uri="{EFAFB233-063F-42B5-8137-9DF3F51BA10A}">
+      <p15:sldGuideLst xmlns:p15="http://schemas.microsoft.com/office/powerpoint/2012/main"/>
+    </p:ext>
+  </p:extLst>
 </p:presentation>
 </file>
 
 <file path=ppt/charts/chart1.xml><?xml version="1.0" encoding="utf-8"?>
-<c:chartSpace xmlns:c="http://schemas.openxmlformats.org/drawingml/2006/chart" xmlns:a="http://schemas.openxmlformats.org/drawingml/2006/main" xmlns:r="http://schemas.openxmlformats.org/officeDocument/2006/relationships">
+<c:chartSpace xmlns:c="http://schemas.openxmlformats.org/drawingml/2006/chart" xmlns:a="http://schemas.openxmlformats.org/drawingml/2006/main" xmlns:r="http://schemas.openxmlformats.org/officeDocument/2006/relationships" xmlns:c16r2="http://schemas.microsoft.com/office/drawing/2015/06/chart">
   <c:date1904 val="0"/>
+  <c:lang val="en-US"/>
   <c:roundedCorners val="1"/>
+  <c:style val="2"/>
   <c:chart>
     <c:title>
       <c:tx>
@@ -152,7 +159,7 @@
               </a:defRPr>
             </a:pPr>
             <a:r>
-              <a:rPr sz="1150" b="0" i="0" u="none" strike="noStrike">
+              <a:rPr lang="en-US" sz="1150" b="0" i="0" u="none" strike="noStrike">
                 <a:solidFill>
                   <a:srgbClr val="0A2559"/>
                 </a:solidFill>
@@ -163,7 +170,6 @@
           </a:p>
         </c:rich>
       </c:tx>
-      <c:layout/>
       <c:overlay val="0"/>
     </c:title>
     <c:autoTitleDeleted val="0"/>
@@ -194,69 +200,43 @@
             <a:effectLst/>
           </c:spPr>
           <c:invertIfNegative val="0"/>
-          <c:dLbls>
-            <c:numFmt formatCode="#,##0" sourceLinked="0"/>
-            <c:txPr>
-              <a:bodyPr/>
-              <a:lstStyle/>
-              <a:p>
-                <a:pPr>
-                  <a:defRPr b="0" i="0" strike="noStrike" sz="1200" u="none">
-                    <a:solidFill>
-                      <a:srgbClr val="000000"/>
-                    </a:solidFill>
-                    <a:latin typeface="Arial"/>
-                  </a:defRPr>
-                </a:pPr>
-              </a:p>
-            </c:txPr>
-            <c:showLegendKey val="0"/>
-            <c:showVal val="0"/>
-            <c:showCatName val="0"/>
-            <c:showSerName val="0"/>
-            <c:showPercent val="0"/>
-            <c:showBubbleSize val="0"/>
-            <c:showLeaderLines val="0"/>
-          </c:dLbls>
           <c:cat>
-            <c:multiLvlStrRef>
+            <c:strRef>
               <c:f>Sheet1!$A$2:$A$11</c:f>
-              <c:multiLvlStrCache>
+              <c:strCache>
                 <c:ptCount val="10"/>
-                <c:lvl>
-                  <c:pt idx="0">
-                    <c:v>1.5k</c:v>
-                  </c:pt>
-                  <c:pt idx="1">
-                    <c:v>2k</c:v>
-                  </c:pt>
-                  <c:pt idx="2">
-                    <c:v>2.5k</c:v>
-                  </c:pt>
-                  <c:pt idx="3">
-                    <c:v>3k</c:v>
-                  </c:pt>
-                  <c:pt idx="4">
-                    <c:v>3.5k</c:v>
-                  </c:pt>
-                  <c:pt idx="5">
-                    <c:v>4k</c:v>
-                  </c:pt>
-                  <c:pt idx="6">
-                    <c:v>5k</c:v>
-                  </c:pt>
-                  <c:pt idx="7">
-                    <c:v>7k</c:v>
-                  </c:pt>
-                  <c:pt idx="8">
-                    <c:v>10k</c:v>
-                  </c:pt>
-                  <c:pt idx="9">
-                    <c:v>18k</c:v>
-                  </c:pt>
-                </c:lvl>
-              </c:multiLvlStrCache>
-            </c:multiLvlStrRef>
+                <c:pt idx="0">
+                  <c:v>1.5k</c:v>
+                </c:pt>
+                <c:pt idx="1">
+                  <c:v>2k</c:v>
+                </c:pt>
+                <c:pt idx="2">
+                  <c:v>2.5k</c:v>
+                </c:pt>
+                <c:pt idx="3">
+                  <c:v>3k</c:v>
+                </c:pt>
+                <c:pt idx="4">
+                  <c:v>3.5k</c:v>
+                </c:pt>
+                <c:pt idx="5">
+                  <c:v>4k</c:v>
+                </c:pt>
+                <c:pt idx="6">
+                  <c:v>5k</c:v>
+                </c:pt>
+                <c:pt idx="7">
+                  <c:v>7k</c:v>
+                </c:pt>
+                <c:pt idx="8">
+                  <c:v>10k</c:v>
+                </c:pt>
+                <c:pt idx="9">
+                  <c:v>18k</c:v>
+                </c:pt>
+              </c:strCache>
+            </c:strRef>
           </c:cat>
           <c:val>
             <c:numRef>
@@ -297,36 +277,23 @@
               </c:numCache>
             </c:numRef>
           </c:val>
+          <c:extLst>
+            <c:ext xmlns:c16="http://schemas.microsoft.com/office/drawing/2014/chart" uri="{C3380CC4-5D6E-409C-BE32-E72D297353CC}">
+              <c16:uniqueId val="{00000000-8CE0-3246-9D44-98B2AFC51D2F}"/>
+            </c:ext>
+          </c:extLst>
         </c:ser>
         <c:dLbls>
-          <c:numFmt formatCode="#,##0" sourceLinked="0"/>
-          <c:txPr>
-            <a:bodyPr/>
-            <a:lstStyle/>
-            <a:p>
-              <a:pPr>
-                <a:defRPr b="0" i="0" strike="noStrike" sz="1200" u="none">
-                  <a:solidFill>
-                    <a:srgbClr val="000000"/>
-                  </a:solidFill>
-                  <a:latin typeface="Arial"/>
-                </a:defRPr>
-              </a:pPr>
-            </a:p>
-          </c:txPr>
           <c:showLegendKey val="0"/>
           <c:showVal val="0"/>
           <c:showCatName val="0"/>
           <c:showSerName val="0"/>
           <c:showPercent val="0"/>
           <c:showBubbleSize val="0"/>
-          <c:showLeaderLines val="0"/>
         </c:dLbls>
         <c:gapWidth val="30"/>
-        <c:overlap val="0"/>
         <c:axId val="2094734554"/>
         <c:axId val="2094734552"/>
-        <c:axId val="2094734556"/>
       </c:barChart>
       <c:catAx>
         <c:axId val="2094734554"/>
@@ -367,6 +334,7 @@
         <c:crosses val="autoZero"/>
         <c:auto val="1"/>
         <c:lblAlgn val="ctr"/>
+        <c:lblOffset val="100"/>
         <c:noMultiLvlLbl val="1"/>
       </c:catAx>
       <c:valAx>
@@ -431,6 +399,7 @@
     </c:plotArea>
     <c:plotVisOnly val="1"/>
     <c:dispBlanksAs val="span"/>
+    <c:showDLblsOverMax val="1"/>
   </c:chart>
   <c:spPr>
     <a:noFill/>
@@ -446,9 +415,11 @@
 </file>
 
 <file path=ppt/charts/chart2.xml><?xml version="1.0" encoding="utf-8"?>
-<c:chartSpace xmlns:c="http://schemas.openxmlformats.org/drawingml/2006/chart" xmlns:a="http://schemas.openxmlformats.org/drawingml/2006/main" xmlns:r="http://schemas.openxmlformats.org/officeDocument/2006/relationships">
+<c:chartSpace xmlns:c="http://schemas.openxmlformats.org/drawingml/2006/chart" xmlns:a="http://schemas.openxmlformats.org/drawingml/2006/main" xmlns:r="http://schemas.openxmlformats.org/officeDocument/2006/relationships" xmlns:c16r2="http://schemas.microsoft.com/office/drawing/2015/06/chart">
   <c:date1904 val="0"/>
+  <c:lang val="en-US"/>
   <c:roundedCorners val="1"/>
+  <c:style val="2"/>
   <c:chart>
     <c:title>
       <c:tx>
@@ -465,7 +436,7 @@
               </a:defRPr>
             </a:pPr>
             <a:r>
-              <a:rPr sz="1150" b="0" i="0" u="none" strike="noStrike">
+              <a:rPr lang="en-US" sz="1150" b="0" i="0" u="none" strike="noStrike">
                 <a:solidFill>
                   <a:srgbClr val="0A2559"/>
                 </a:solidFill>
@@ -476,7 +447,6 @@
           </a:p>
         </c:rich>
       </c:tx>
-      <c:layout/>
       <c:overlay val="0"/>
     </c:title>
     <c:autoTitleDeleted val="0"/>
@@ -507,102 +477,76 @@
             <a:effectLst/>
           </c:spPr>
           <c:invertIfNegative val="0"/>
-          <c:dLbls>
-            <c:numFmt formatCode="#,##0" sourceLinked="0"/>
-            <c:txPr>
-              <a:bodyPr/>
-              <a:lstStyle/>
-              <a:p>
-                <a:pPr>
-                  <a:defRPr b="0" i="0" strike="noStrike" sz="1200" u="none">
-                    <a:solidFill>
-                      <a:srgbClr val="000000"/>
-                    </a:solidFill>
-                    <a:latin typeface="Arial"/>
-                  </a:defRPr>
-                </a:pPr>
-              </a:p>
-            </c:txPr>
-            <c:showLegendKey val="0"/>
-            <c:showVal val="0"/>
-            <c:showCatName val="0"/>
-            <c:showSerName val="0"/>
-            <c:showPercent val="0"/>
-            <c:showBubbleSize val="0"/>
-            <c:showLeaderLines val="0"/>
-          </c:dLbls>
           <c:cat>
-            <c:multiLvlStrRef>
+            <c:strRef>
               <c:f>Sheet1!$A$2:$A$22</c:f>
-              <c:multiLvlStrCache>
+              <c:strCache>
                 <c:ptCount val="21"/>
-                <c:lvl>
-                  <c:pt idx="0">
-                    <c:v>0</c:v>
-                  </c:pt>
-                  <c:pt idx="1">
-                    <c:v>1</c:v>
-                  </c:pt>
-                  <c:pt idx="2">
-                    <c:v>2</c:v>
-                  </c:pt>
-                  <c:pt idx="3">
-                    <c:v>3</c:v>
-                  </c:pt>
-                  <c:pt idx="4">
-                    <c:v>4</c:v>
-                  </c:pt>
-                  <c:pt idx="5">
-                    <c:v>5</c:v>
-                  </c:pt>
-                  <c:pt idx="6">
-                    <c:v>6</c:v>
-                  </c:pt>
-                  <c:pt idx="7">
-                    <c:v>7</c:v>
-                  </c:pt>
-                  <c:pt idx="8">
-                    <c:v>8</c:v>
-                  </c:pt>
-                  <c:pt idx="9">
-                    <c:v>9</c:v>
-                  </c:pt>
-                  <c:pt idx="10">
-                    <c:v>10</c:v>
-                  </c:pt>
-                  <c:pt idx="11">
-                    <c:v>11</c:v>
-                  </c:pt>
-                  <c:pt idx="12">
-                    <c:v>12</c:v>
-                  </c:pt>
-                  <c:pt idx="13">
-                    <c:v>13</c:v>
-                  </c:pt>
-                  <c:pt idx="14">
-                    <c:v>14</c:v>
-                  </c:pt>
-                  <c:pt idx="15">
-                    <c:v>15</c:v>
-                  </c:pt>
-                  <c:pt idx="16">
-                    <c:v>16</c:v>
-                  </c:pt>
-                  <c:pt idx="17">
-                    <c:v>17</c:v>
-                  </c:pt>
-                  <c:pt idx="18">
-                    <c:v>18</c:v>
-                  </c:pt>
-                  <c:pt idx="19">
-                    <c:v>19</c:v>
-                  </c:pt>
-                  <c:pt idx="20">
-                    <c:v>20</c:v>
-                  </c:pt>
-                </c:lvl>
-              </c:multiLvlStrCache>
-            </c:multiLvlStrRef>
+                <c:pt idx="0">
+                  <c:v>0</c:v>
+                </c:pt>
+                <c:pt idx="1">
+                  <c:v>1</c:v>
+                </c:pt>
+                <c:pt idx="2">
+                  <c:v>2</c:v>
+                </c:pt>
+                <c:pt idx="3">
+                  <c:v>3</c:v>
+                </c:pt>
+                <c:pt idx="4">
+                  <c:v>4</c:v>
+                </c:pt>
+                <c:pt idx="5">
+                  <c:v>5</c:v>
+                </c:pt>
+                <c:pt idx="6">
+                  <c:v>6</c:v>
+                </c:pt>
+                <c:pt idx="7">
+                  <c:v>7</c:v>
+                </c:pt>
+                <c:pt idx="8">
+                  <c:v>8</c:v>
+                </c:pt>
+                <c:pt idx="9">
+                  <c:v>9</c:v>
+                </c:pt>
+                <c:pt idx="10">
+                  <c:v>10</c:v>
+                </c:pt>
+                <c:pt idx="11">
+                  <c:v>11</c:v>
+                </c:pt>
+                <c:pt idx="12">
+                  <c:v>12</c:v>
+                </c:pt>
+                <c:pt idx="13">
+                  <c:v>13</c:v>
+                </c:pt>
+                <c:pt idx="14">
+                  <c:v>14</c:v>
+                </c:pt>
+                <c:pt idx="15">
+                  <c:v>15</c:v>
+                </c:pt>
+                <c:pt idx="16">
+                  <c:v>16</c:v>
+                </c:pt>
+                <c:pt idx="17">
+                  <c:v>17</c:v>
+                </c:pt>
+                <c:pt idx="18">
+                  <c:v>18</c:v>
+                </c:pt>
+                <c:pt idx="19">
+                  <c:v>19</c:v>
+                </c:pt>
+                <c:pt idx="20">
+                  <c:v>20</c:v>
+                </c:pt>
+              </c:strCache>
+            </c:strRef>
           </c:cat>
           <c:val>
             <c:numRef>
@@ -611,25 +555,25 @@
                 <c:formatCode>General</c:formatCode>
                 <c:ptCount val="21"/>
                 <c:pt idx="0">
-                  <c:v>0.0008</c:v>
+                  <c:v>8.0000000000000004E-4</c:v>
                 </c:pt>
                 <c:pt idx="1">
-                  <c:v>0.0068</c:v>
+                  <c:v>6.7999999999999996E-3</c:v>
                 </c:pt>
                 <c:pt idx="2">
-                  <c:v>0.0278</c:v>
+                  <c:v>2.7799999999999998E-2</c:v>
                 </c:pt>
                 <c:pt idx="3">
-                  <c:v>0.0716</c:v>
+                  <c:v>7.1599999999999997E-2</c:v>
                 </c:pt>
                 <c:pt idx="4">
-                  <c:v>0.1304</c:v>
+                  <c:v>0.13039999999999999</c:v>
                 </c:pt>
                 <c:pt idx="5">
                   <c:v>0.1789</c:v>
                 </c:pt>
                 <c:pt idx="6">
-                  <c:v>0.1916</c:v>
+                  <c:v>0.19159999999999999</c:v>
                 </c:pt>
                 <c:pt idx="7">
                   <c:v>0.1643</c:v>
@@ -638,22 +582,22 @@
                   <c:v>0.1144</c:v>
                 </c:pt>
                 <c:pt idx="9">
-                  <c:v>0.0654</c:v>
+                  <c:v>6.54E-2</c:v>
                 </c:pt>
                 <c:pt idx="10">
-                  <c:v>0.0308</c:v>
+                  <c:v>3.0800000000000001E-2</c:v>
                 </c:pt>
                 <c:pt idx="11">
-                  <c:v>0.012</c:v>
+                  <c:v>1.2E-2</c:v>
                 </c:pt>
                 <c:pt idx="12">
-                  <c:v>0.0039</c:v>
+                  <c:v>3.8999999999999998E-3</c:v>
                 </c:pt>
                 <c:pt idx="13">
-                  <c:v>0.001</c:v>
+                  <c:v>1E-3</c:v>
                 </c:pt>
                 <c:pt idx="14">
-                  <c:v>0.0002</c:v>
+                  <c:v>2.0000000000000001E-4</c:v>
                 </c:pt>
                 <c:pt idx="15">
                   <c:v>0</c:v>
@@ -676,36 +620,23 @@
               </c:numCache>
             </c:numRef>
           </c:val>
+          <c:extLst>
+            <c:ext xmlns:c16="http://schemas.microsoft.com/office/drawing/2014/chart" uri="{C3380CC4-5D6E-409C-BE32-E72D297353CC}">
+              <c16:uniqueId val="{00000000-5D31-624C-BA54-E974BC9571EA}"/>
+            </c:ext>
+          </c:extLst>
         </c:ser>
         <c:dLbls>
-          <c:numFmt formatCode="#,##0" sourceLinked="0"/>
-          <c:txPr>
-            <a:bodyPr/>
-            <a:lstStyle/>
-            <a:p>
-              <a:pPr>
-                <a:defRPr b="0" i="0" strike="noStrike" sz="1200" u="none">
-                  <a:solidFill>
-                    <a:srgbClr val="000000"/>
-                  </a:solidFill>
-                  <a:latin typeface="Arial"/>
-                </a:defRPr>
-              </a:pPr>
-            </a:p>
-          </c:txPr>
           <c:showLegendKey val="0"/>
           <c:showVal val="0"/>
           <c:showCatName val="0"/>
           <c:showSerName val="0"/>
           <c:showPercent val="0"/>
           <c:showBubbleSize val="0"/>
-          <c:showLeaderLines val="0"/>
         </c:dLbls>
         <c:gapWidth val="25"/>
-        <c:overlap val="0"/>
         <c:axId val="2094734554"/>
         <c:axId val="2094734552"/>
-        <c:axId val="2094734556"/>
       </c:barChart>
       <c:catAx>
         <c:axId val="2094734554"/>
@@ -746,6 +677,7 @@
         <c:crosses val="autoZero"/>
         <c:auto val="1"/>
         <c:lblAlgn val="ctr"/>
+        <c:lblOffset val="100"/>
         <c:noMultiLvlLbl val="1"/>
       </c:catAx>
       <c:valAx>
@@ -810,6 +742,7 @@
     </c:plotArea>
     <c:plotVisOnly val="1"/>
     <c:dispBlanksAs val="span"/>
+    <c:showDLblsOverMax val="1"/>
   </c:chart>
   <c:spPr>
     <a:noFill/>
@@ -825,9 +758,11 @@
 </file>
 
 <file path=ppt/charts/chart3.xml><?xml version="1.0" encoding="utf-8"?>
-<c:chartSpace xmlns:c="http://schemas.openxmlformats.org/drawingml/2006/chart" xmlns:a="http://schemas.openxmlformats.org/drawingml/2006/main" xmlns:r="http://schemas.openxmlformats.org/officeDocument/2006/relationships">
+<c:chartSpace xmlns:c="http://schemas.openxmlformats.org/drawingml/2006/chart" xmlns:a="http://schemas.openxmlformats.org/drawingml/2006/main" xmlns:r="http://schemas.openxmlformats.org/officeDocument/2006/relationships" xmlns:c16r2="http://schemas.microsoft.com/office/drawing/2015/06/chart">
   <c:date1904 val="0"/>
+  <c:lang val="en-US"/>
   <c:roundedCorners val="1"/>
+  <c:style val="2"/>
   <c:chart>
     <c:title>
       <c:tx>
@@ -844,7 +779,7 @@
               </a:defRPr>
             </a:pPr>
             <a:r>
-              <a:rPr sz="1150" b="0" i="0" u="none" strike="noStrike">
+              <a:rPr lang="en-US" sz="1150" b="0" i="0" u="none" strike="noStrike">
                 <a:solidFill>
                   <a:srgbClr val="0A2559"/>
                 </a:solidFill>
@@ -855,13 +790,13 @@
           </a:p>
         </c:rich>
       </c:tx>
-      <c:layout/>
       <c:overlay val="0"/>
     </c:title>
     <c:autoTitleDeleted val="0"/>
     <c:plotArea>
       <c:layout/>
       <c:lineChart>
+        <c:grouping val="standard"/>
         <c:varyColors val="0"/>
         <c:ser>
           <c:idx val="0"/>
@@ -878,9 +813,6 @@
             </c:strRef>
           </c:tx>
           <c:spPr>
-            <a:solidFill>
-              <a:srgbClr val="E6115E"/>
-            </a:solidFill>
             <a:ln w="38100" cap="flat">
               <a:solidFill>
                 <a:srgbClr val="E6115E"/>
@@ -890,31 +822,6 @@
             </a:ln>
             <a:effectLst/>
           </c:spPr>
-          <c:invertIfNegative val="0"/>
-          <c:dLbls>
-            <c:numFmt formatCode="#,##0" sourceLinked="0"/>
-            <c:txPr>
-              <a:bodyPr/>
-              <a:lstStyle/>
-              <a:p>
-                <a:pPr>
-                  <a:defRPr b="0" i="0" strike="noStrike" sz="1200" u="none">
-                    <a:solidFill>
-                      <a:srgbClr val="000000"/>
-                    </a:solidFill>
-                    <a:latin typeface="Arial"/>
-                  </a:defRPr>
-                </a:pPr>
-              </a:p>
-            </c:txPr>
-            <c:showLegendKey val="0"/>
-            <c:showVal val="0"/>
-            <c:showCatName val="0"/>
-            <c:showSerName val="0"/>
-            <c:showPercent val="0"/>
-            <c:showBubbleSize val="0"/>
-            <c:showLeaderLines val="0"/>
-          </c:dLbls>
           <c:marker>
             <c:symbol val="circle"/>
             <c:size val="6"/>
@@ -933,77 +840,75 @@
             </c:spPr>
           </c:marker>
           <c:cat>
-            <c:multiLvlStrRef>
+            <c:strRef>
               <c:f>Sheet1!$A$2:$A$22</c:f>
-              <c:multiLvlStrCache>
+              <c:strCache>
                 <c:ptCount val="21"/>
-                <c:lvl>
-                  <c:pt idx="0">
-                    <c:v>0</c:v>
-                  </c:pt>
-                  <c:pt idx="1">
-                    <c:v>1</c:v>
-                  </c:pt>
-                  <c:pt idx="2">
-                    <c:v>2</c:v>
-                  </c:pt>
-                  <c:pt idx="3">
-                    <c:v>3</c:v>
-                  </c:pt>
-                  <c:pt idx="4">
-                    <c:v>4</c:v>
-                  </c:pt>
-                  <c:pt idx="5">
-                    <c:v>5</c:v>
-                  </c:pt>
-                  <c:pt idx="6">
-                    <c:v>6</c:v>
-                  </c:pt>
-                  <c:pt idx="7">
-                    <c:v>7</c:v>
-                  </c:pt>
-                  <c:pt idx="8">
-                    <c:v>8</c:v>
-                  </c:pt>
-                  <c:pt idx="9">
-                    <c:v>9</c:v>
-                  </c:pt>
-                  <c:pt idx="10">
-                    <c:v>10</c:v>
-                  </c:pt>
-                  <c:pt idx="11">
-                    <c:v>11</c:v>
-                  </c:pt>
-                  <c:pt idx="12">
-                    <c:v>12</c:v>
-                  </c:pt>
-                  <c:pt idx="13">
-                    <c:v>13</c:v>
-                  </c:pt>
-                  <c:pt idx="14">
-                    <c:v>14</c:v>
-                  </c:pt>
-                  <c:pt idx="15">
-                    <c:v>15</c:v>
-                  </c:pt>
-                  <c:pt idx="16">
-                    <c:v>16</c:v>
-                  </c:pt>
-                  <c:pt idx="17">
-                    <c:v>17</c:v>
-                  </c:pt>
-                  <c:pt idx="18">
-                    <c:v>18</c:v>
-                  </c:pt>
-                  <c:pt idx="19">
-                    <c:v>19</c:v>
-                  </c:pt>
-                  <c:pt idx="20">
-                    <c:v>20</c:v>
-                  </c:pt>
-                </c:lvl>
-              </c:multiLvlStrCache>
-            </c:multiLvlStrRef>
+                <c:pt idx="0">
+                  <c:v>0</c:v>
+                </c:pt>
+                <c:pt idx="1">
+                  <c:v>1</c:v>
+                </c:pt>
+                <c:pt idx="2">
+                  <c:v>2</c:v>
+                </c:pt>
+                <c:pt idx="3">
+                  <c:v>3</c:v>
+                </c:pt>
+                <c:pt idx="4">
+                  <c:v>4</c:v>
+                </c:pt>
+                <c:pt idx="5">
+                  <c:v>5</c:v>
+                </c:pt>
+                <c:pt idx="6">
+                  <c:v>6</c:v>
+                </c:pt>
+                <c:pt idx="7">
+                  <c:v>7</c:v>
+                </c:pt>
+                <c:pt idx="8">
+                  <c:v>8</c:v>
+                </c:pt>
+                <c:pt idx="9">
+                  <c:v>9</c:v>
+                </c:pt>
+                <c:pt idx="10">
+                  <c:v>10</c:v>
+                </c:pt>
+                <c:pt idx="11">
+                  <c:v>11</c:v>
+                </c:pt>
+                <c:pt idx="12">
+                  <c:v>12</c:v>
+                </c:pt>
+                <c:pt idx="13">
+                  <c:v>13</c:v>
+                </c:pt>
+                <c:pt idx="14">
+                  <c:v>14</c:v>
+                </c:pt>
+                <c:pt idx="15">
+                  <c:v>15</c:v>
+                </c:pt>
+                <c:pt idx="16">
+                  <c:v>16</c:v>
+                </c:pt>
+                <c:pt idx="17">
+                  <c:v>17</c:v>
+                </c:pt>
+                <c:pt idx="18">
+                  <c:v>18</c:v>
+                </c:pt>
+                <c:pt idx="19">
+                  <c:v>19</c:v>
+                </c:pt>
+                <c:pt idx="20">
+                  <c:v>20</c:v>
+                </c:pt>
+              </c:strCache>
+            </c:strRef>
           </c:cat>
           <c:val>
             <c:numRef>
@@ -1012,46 +917,46 @@
                 <c:formatCode>General</c:formatCode>
                 <c:ptCount val="21"/>
                 <c:pt idx="0">
-                  <c:v>0.0008</c:v>
+                  <c:v>8.0000000000000004E-4</c:v>
                 </c:pt>
                 <c:pt idx="1">
-                  <c:v>0.0076</c:v>
+                  <c:v>7.6E-3</c:v>
                 </c:pt>
                 <c:pt idx="2">
-                  <c:v>0.0355</c:v>
+                  <c:v>3.5499999999999997E-2</c:v>
                 </c:pt>
                 <c:pt idx="3">
                   <c:v>0.1071</c:v>
                 </c:pt>
                 <c:pt idx="4">
-                  <c:v>0.2375</c:v>
+                  <c:v>0.23749999999999999</c:v>
                 </c:pt>
                 <c:pt idx="5">
-                  <c:v>0.4164</c:v>
+                  <c:v>0.41639999999999999</c:v>
                 </c:pt>
                 <c:pt idx="6">
-                  <c:v>0.608</c:v>
+                  <c:v>0.60799999999999998</c:v>
                 </c:pt>
                 <c:pt idx="7">
-                  <c:v>0.7723</c:v>
+                  <c:v>0.77229999999999999</c:v>
                 </c:pt>
                 <c:pt idx="8">
-                  <c:v>0.8867</c:v>
+                  <c:v>0.88670000000000004</c:v>
                 </c:pt>
                 <c:pt idx="9">
-                  <c:v>0.952</c:v>
+                  <c:v>0.95199999999999996</c:v>
                 </c:pt>
                 <c:pt idx="10">
                   <c:v>0.9829</c:v>
                 </c:pt>
                 <c:pt idx="11">
-                  <c:v>0.9949</c:v>
+                  <c:v>0.99490000000000001</c:v>
                 </c:pt>
                 <c:pt idx="12">
-                  <c:v>0.9987</c:v>
+                  <c:v>0.99870000000000003</c:v>
                 </c:pt>
                 <c:pt idx="13">
-                  <c:v>0.9997</c:v>
+                  <c:v>0.99970000000000003</c:v>
                 </c:pt>
                 <c:pt idx="14">
                   <c:v>1</c:v>
@@ -1078,35 +983,24 @@
             </c:numRef>
           </c:val>
           <c:smooth val="0"/>
+          <c:extLst>
+            <c:ext xmlns:c16="http://schemas.microsoft.com/office/drawing/2014/chart" uri="{C3380CC4-5D6E-409C-BE32-E72D297353CC}">
+              <c16:uniqueId val="{00000000-A70A-0649-96C4-83DD0CDADA5A}"/>
+            </c:ext>
+          </c:extLst>
         </c:ser>
         <c:dLbls>
-          <c:numFmt formatCode="#,##0" sourceLinked="0"/>
-          <c:txPr>
-            <a:bodyPr/>
-            <a:lstStyle/>
-            <a:p>
-              <a:pPr>
-                <a:defRPr b="0" i="0" strike="noStrike" sz="1200" u="none">
-                  <a:solidFill>
-                    <a:srgbClr val="000000"/>
-                  </a:solidFill>
-                  <a:latin typeface="Arial"/>
-                </a:defRPr>
-              </a:pPr>
-            </a:p>
-          </c:txPr>
           <c:showLegendKey val="0"/>
           <c:showVal val="0"/>
           <c:showCatName val="0"/>
           <c:showSerName val="0"/>
           <c:showPercent val="0"/>
           <c:showBubbleSize val="0"/>
-          <c:showLeaderLines val="0"/>
         </c:dLbls>
         <c:marker val="1"/>
+        <c:smooth val="0"/>
         <c:axId val="2094734554"/>
         <c:axId val="2094734552"/>
-        <c:axId val="2094734556"/>
       </c:lineChart>
       <c:catAx>
         <c:axId val="2094734554"/>
@@ -1147,6 +1041,7 @@
         <c:crosses val="autoZero"/>
         <c:auto val="1"/>
         <c:lblAlgn val="ctr"/>
+        <c:lblOffset val="100"/>
         <c:noMultiLvlLbl val="1"/>
       </c:catAx>
       <c:valAx>
@@ -1211,6 +1106,7 @@
     </c:plotArea>
     <c:plotVisOnly val="1"/>
     <c:dispBlanksAs val="span"/>
+    <c:showDLblsOverMax val="1"/>
   </c:chart>
   <c:spPr>
     <a:noFill/>
@@ -1226,9 +1122,11 @@
 </file>
 
 <file path=ppt/charts/chart4.xml><?xml version="1.0" encoding="utf-8"?>
-<c:chartSpace xmlns:c="http://schemas.openxmlformats.org/drawingml/2006/chart" xmlns:a="http://schemas.openxmlformats.org/drawingml/2006/main" xmlns:r="http://schemas.openxmlformats.org/officeDocument/2006/relationships">
+<c:chartSpace xmlns:c="http://schemas.openxmlformats.org/drawingml/2006/chart" xmlns:a="http://schemas.openxmlformats.org/drawingml/2006/main" xmlns:r="http://schemas.openxmlformats.org/officeDocument/2006/relationships" xmlns:c16r2="http://schemas.microsoft.com/office/drawing/2015/06/chart">
   <c:date1904 val="0"/>
+  <c:lang val="en-US"/>
   <c:roundedCorners val="1"/>
+  <c:style val="2"/>
   <c:chart>
     <c:title>
       <c:tx>
@@ -1245,7 +1143,7 @@
               </a:defRPr>
             </a:pPr>
             <a:r>
-              <a:rPr sz="1150" b="0" i="0" u="none" strike="noStrike">
+              <a:rPr lang="en-US" sz="1150" b="0" i="0" u="none" strike="noStrike">
                 <a:solidFill>
                   <a:srgbClr val="0A2559"/>
                 </a:solidFill>
@@ -1256,7 +1154,6 @@
           </a:p>
         </c:rich>
       </c:tx>
-      <c:layout/>
       <c:overlay val="0"/>
     </c:title>
     <c:autoTitleDeleted val="0"/>
@@ -1289,18 +1186,26 @@
           <c:invertIfNegative val="0"/>
           <c:dLbls>
             <c:numFmt formatCode="#,##0" sourceLinked="0"/>
+            <c:spPr>
+              <a:noFill/>
+              <a:ln>
+                <a:noFill/>
+              </a:ln>
+              <a:effectLst/>
+            </c:spPr>
             <c:txPr>
               <a:bodyPr/>
               <a:lstStyle/>
               <a:p>
                 <a:pPr>
-                  <a:defRPr b="0" i="0" strike="noStrike" sz="1100" u="none">
+                  <a:defRPr sz="1100" b="0" i="0" u="none" strike="noStrike">
                     <a:solidFill>
                       <a:srgbClr val="0A2559"/>
                     </a:solidFill>
                     <a:latin typeface="Calibri"/>
                   </a:defRPr>
                 </a:pPr>
+                <a:endParaRPr lang="en-PE"/>
               </a:p>
             </c:txPr>
             <c:showLegendKey val="0"/>
@@ -1310,22 +1215,25 @@
             <c:showPercent val="0"/>
             <c:showBubbleSize val="0"/>
             <c:showLeaderLines val="0"/>
+            <c:extLst>
+              <c:ext xmlns:c15="http://schemas.microsoft.com/office/drawing/2012/chart" uri="{CE6537A1-D6FC-4f65-9D91-7224C49458BB}">
+                <c15:showLeaderLines val="0"/>
+              </c:ext>
+            </c:extLst>
           </c:dLbls>
           <c:cat>
-            <c:multiLvlStrRef>
+            <c:strRef>
               <c:f>Sheet1!$A$2:$A$3</c:f>
-              <c:multiLvlStrCache>
+              <c:strCache>
                 <c:ptCount val="2"/>
-                <c:lvl>
-                  <c:pt idx="0">
-                    <c:v>0 (no)</c:v>
-                  </c:pt>
-                  <c:pt idx="1">
-                    <c:v>1 (sí)</c:v>
-                  </c:pt>
-                </c:lvl>
-              </c:multiLvlStrCache>
-            </c:multiLvlStrRef>
+                <c:pt idx="0">
+                  <c:v>0 (no)</c:v>
+                </c:pt>
+                <c:pt idx="1">
+                  <c:v>1 (sí)</c:v>
+                </c:pt>
+              </c:strCache>
+            </c:strRef>
           </c:cat>
           <c:val>
             <c:numRef>
@@ -1342,36 +1250,23 @@
               </c:numCache>
             </c:numRef>
           </c:val>
+          <c:extLst>
+            <c:ext xmlns:c16="http://schemas.microsoft.com/office/drawing/2014/chart" uri="{C3380CC4-5D6E-409C-BE32-E72D297353CC}">
+              <c16:uniqueId val="{00000000-5A35-B245-8F5D-2F0BE0D467E7}"/>
+            </c:ext>
+          </c:extLst>
         </c:ser>
         <c:dLbls>
-          <c:numFmt formatCode="#,##0" sourceLinked="0"/>
-          <c:txPr>
-            <a:bodyPr/>
-            <a:lstStyle/>
-            <a:p>
-              <a:pPr>
-                <a:defRPr b="0" i="0" strike="noStrike" sz="1100" u="none">
-                  <a:solidFill>
-                    <a:srgbClr val="0A2559"/>
-                  </a:solidFill>
-                  <a:latin typeface="Calibri"/>
-                </a:defRPr>
-              </a:pPr>
-            </a:p>
-          </c:txPr>
           <c:showLegendKey val="0"/>
           <c:showVal val="1"/>
           <c:showCatName val="0"/>
           <c:showSerName val="0"/>
           <c:showPercent val="0"/>
           <c:showBubbleSize val="0"/>
-          <c:showLeaderLines val="0"/>
         </c:dLbls>
         <c:gapWidth val="120"/>
-        <c:overlap val="0"/>
         <c:axId val="2094734554"/>
         <c:axId val="2094734552"/>
-        <c:axId val="2094734556"/>
       </c:barChart>
       <c:catAx>
         <c:axId val="2094734554"/>
@@ -1412,6 +1307,7 @@
         <c:crosses val="autoZero"/>
         <c:auto val="1"/>
         <c:lblAlgn val="ctr"/>
+        <c:lblOffset val="100"/>
         <c:noMultiLvlLbl val="1"/>
       </c:catAx>
       <c:valAx>
@@ -1476,6 +1372,7 @@
     </c:plotArea>
     <c:plotVisOnly val="1"/>
     <c:dispBlanksAs val="span"/>
+    <c:showDLblsOverMax val="1"/>
   </c:chart>
   <c:spPr>
     <a:noFill/>
@@ -1491,9 +1388,11 @@
 </file>
 
 <file path=ppt/charts/chart5.xml><?xml version="1.0" encoding="utf-8"?>
-<c:chartSpace xmlns:c="http://schemas.openxmlformats.org/drawingml/2006/chart" xmlns:a="http://schemas.openxmlformats.org/drawingml/2006/main" xmlns:r="http://schemas.openxmlformats.org/officeDocument/2006/relationships">
+<c:chartSpace xmlns:c="http://schemas.openxmlformats.org/drawingml/2006/chart" xmlns:a="http://schemas.openxmlformats.org/drawingml/2006/main" xmlns:r="http://schemas.openxmlformats.org/officeDocument/2006/relationships" xmlns:c16r2="http://schemas.microsoft.com/office/drawing/2015/06/chart">
   <c:date1904 val="0"/>
+  <c:lang val="en-US"/>
   <c:roundedCorners val="1"/>
+  <c:style val="2"/>
   <c:chart>
     <c:title>
       <c:tx>
@@ -1510,7 +1409,7 @@
               </a:defRPr>
             </a:pPr>
             <a:r>
-              <a:rPr sz="1150" b="0" i="0" u="none" strike="noStrike">
+              <a:rPr lang="en-US" sz="1150" b="0" i="0" u="none" strike="noStrike">
                 <a:solidFill>
                   <a:srgbClr val="0A2559"/>
                 </a:solidFill>
@@ -1521,7 +1420,6 @@
           </a:p>
         </c:rich>
       </c:tx>
-      <c:layout/>
       <c:overlay val="0"/>
     </c:title>
     <c:autoTitleDeleted val="0"/>
@@ -1552,132 +1450,106 @@
             <a:effectLst/>
           </c:spPr>
           <c:invertIfNegative val="0"/>
-          <c:dLbls>
-            <c:numFmt formatCode="#,##0" sourceLinked="0"/>
-            <c:txPr>
-              <a:bodyPr/>
-              <a:lstStyle/>
-              <a:p>
-                <a:pPr>
-                  <a:defRPr b="0" i="0" strike="noStrike" sz="1200" u="none">
-                    <a:solidFill>
-                      <a:srgbClr val="000000"/>
-                    </a:solidFill>
-                    <a:latin typeface="Arial"/>
-                  </a:defRPr>
-                </a:pPr>
-              </a:p>
-            </c:txPr>
-            <c:showLegendKey val="0"/>
-            <c:showVal val="0"/>
-            <c:showCatName val="0"/>
-            <c:showSerName val="0"/>
-            <c:showPercent val="0"/>
-            <c:showBubbleSize val="0"/>
-            <c:showLeaderLines val="0"/>
-          </c:dLbls>
           <c:cat>
-            <c:multiLvlStrRef>
+            <c:strRef>
               <c:f>Sheet1!$A$2:$A$32</c:f>
-              <c:multiLvlStrCache>
+              <c:strCache>
                 <c:ptCount val="31"/>
-                <c:lvl>
-                  <c:pt idx="0">
-                    <c:v>0</c:v>
-                  </c:pt>
-                  <c:pt idx="1">
-                    <c:v>1</c:v>
-                  </c:pt>
-                  <c:pt idx="2">
-                    <c:v>2</c:v>
-                  </c:pt>
-                  <c:pt idx="3">
-                    <c:v>3</c:v>
-                  </c:pt>
-                  <c:pt idx="4">
-                    <c:v>4</c:v>
-                  </c:pt>
-                  <c:pt idx="5">
-                    <c:v>5</c:v>
-                  </c:pt>
-                  <c:pt idx="6">
-                    <c:v>6</c:v>
-                  </c:pt>
-                  <c:pt idx="7">
-                    <c:v>7</c:v>
-                  </c:pt>
-                  <c:pt idx="8">
-                    <c:v>8</c:v>
-                  </c:pt>
-                  <c:pt idx="9">
-                    <c:v>9</c:v>
-                  </c:pt>
-                  <c:pt idx="10">
-                    <c:v>10</c:v>
-                  </c:pt>
-                  <c:pt idx="11">
-                    <c:v>11</c:v>
-                  </c:pt>
-                  <c:pt idx="12">
-                    <c:v>12</c:v>
-                  </c:pt>
-                  <c:pt idx="13">
-                    <c:v>13</c:v>
-                  </c:pt>
-                  <c:pt idx="14">
-                    <c:v>14</c:v>
-                  </c:pt>
-                  <c:pt idx="15">
-                    <c:v>15</c:v>
-                  </c:pt>
-                  <c:pt idx="16">
-                    <c:v>16</c:v>
-                  </c:pt>
-                  <c:pt idx="17">
-                    <c:v>17</c:v>
-                  </c:pt>
-                  <c:pt idx="18">
-                    <c:v>18</c:v>
-                  </c:pt>
-                  <c:pt idx="19">
-                    <c:v>19</c:v>
-                  </c:pt>
-                  <c:pt idx="20">
-                    <c:v>20</c:v>
-                  </c:pt>
-                  <c:pt idx="21">
-                    <c:v>21</c:v>
-                  </c:pt>
-                  <c:pt idx="22">
-                    <c:v>22</c:v>
-                  </c:pt>
-                  <c:pt idx="23">
-                    <c:v>23</c:v>
-                  </c:pt>
-                  <c:pt idx="24">
-                    <c:v>24</c:v>
-                  </c:pt>
-                  <c:pt idx="25">
-                    <c:v>25</c:v>
-                  </c:pt>
-                  <c:pt idx="26">
-                    <c:v>26</c:v>
-                  </c:pt>
-                  <c:pt idx="27">
-                    <c:v>27</c:v>
-                  </c:pt>
-                  <c:pt idx="28">
-                    <c:v>28</c:v>
-                  </c:pt>
-                  <c:pt idx="29">
-                    <c:v>29</c:v>
-                  </c:pt>
-                  <c:pt idx="30">
-                    <c:v>30</c:v>
-                  </c:pt>
-                </c:lvl>
-              </c:multiLvlStrCache>
-            </c:multiLvlStrRef>
+                <c:pt idx="0">
+                  <c:v>0</c:v>
+                </c:pt>
+                <c:pt idx="1">
+                  <c:v>1</c:v>
+                </c:pt>
+                <c:pt idx="2">
+                  <c:v>2</c:v>
+                </c:pt>
+                <c:pt idx="3">
+                  <c:v>3</c:v>
+                </c:pt>
+                <c:pt idx="4">
+                  <c:v>4</c:v>
+                </c:pt>
+                <c:pt idx="5">
+                  <c:v>5</c:v>
+                </c:pt>
+                <c:pt idx="6">
+                  <c:v>6</c:v>
+                </c:pt>
+                <c:pt idx="7">
+                  <c:v>7</c:v>
+                </c:pt>
+                <c:pt idx="8">
+                  <c:v>8</c:v>
+                </c:pt>
+                <c:pt idx="9">
+                  <c:v>9</c:v>
+                </c:pt>
+                <c:pt idx="10">
+                  <c:v>10</c:v>
+                </c:pt>
+                <c:pt idx="11">
+                  <c:v>11</c:v>
+                </c:pt>
+                <c:pt idx="12">
+                  <c:v>12</c:v>
+                </c:pt>
+                <c:pt idx="13">
+                  <c:v>13</c:v>
+                </c:pt>
+                <c:pt idx="14">
+                  <c:v>14</c:v>
+                </c:pt>
+                <c:pt idx="15">
+                  <c:v>15</c:v>
+                </c:pt>
+                <c:pt idx="16">
+                  <c:v>16</c:v>
+                </c:pt>
+                <c:pt idx="17">
+                  <c:v>17</c:v>
+                </c:pt>
+                <c:pt idx="18">
+                  <c:v>18</c:v>
+                </c:pt>
+                <c:pt idx="19">
+                  <c:v>19</c:v>
+                </c:pt>
+                <c:pt idx="20">
+                  <c:v>20</c:v>
+                </c:pt>
+                <c:pt idx="21">
+                  <c:v>21</c:v>
+                </c:pt>
+                <c:pt idx="22">
+                  <c:v>22</c:v>
+                </c:pt>
+                <c:pt idx="23">
+                  <c:v>23</c:v>
+                </c:pt>
+                <c:pt idx="24">
+                  <c:v>24</c:v>
+                </c:pt>
+                <c:pt idx="25">
+                  <c:v>25</c:v>
+                </c:pt>
+                <c:pt idx="26">
+                  <c:v>26</c:v>
+                </c:pt>
+                <c:pt idx="27">
+                  <c:v>27</c:v>
+                </c:pt>
+                <c:pt idx="28">
+                  <c:v>28</c:v>
+                </c:pt>
+                <c:pt idx="29">
+                  <c:v>29</c:v>
+                </c:pt>
+                <c:pt idx="30">
+                  <c:v>30</c:v>
+                </c:pt>
+              </c:strCache>
+            </c:strRef>
           </c:cat>
           <c:val>
             <c:numRef>
@@ -1689,28 +1561,28 @@
                   <c:v>0</c:v>
                 </c:pt>
                 <c:pt idx="1">
-                  <c:v>0.0003</c:v>
+                  <c:v>2.9999999999999997E-4</c:v>
                 </c:pt>
                 <c:pt idx="2">
-                  <c:v>0.0018</c:v>
+                  <c:v>1.8E-3</c:v>
                 </c:pt>
                 <c:pt idx="3">
-                  <c:v>0.0072</c:v>
+                  <c:v>7.1999999999999998E-3</c:v>
                 </c:pt>
                 <c:pt idx="4">
-                  <c:v>0.0208</c:v>
+                  <c:v>2.0799999999999999E-2</c:v>
                 </c:pt>
                 <c:pt idx="5">
-                  <c:v>0.0464</c:v>
+                  <c:v>4.6399999999999997E-2</c:v>
                 </c:pt>
                 <c:pt idx="6">
-                  <c:v>0.0829</c:v>
+                  <c:v>8.2900000000000001E-2</c:v>
                 </c:pt>
                 <c:pt idx="7">
-                  <c:v>0.1219</c:v>
+                  <c:v>0.12189999999999999</c:v>
                 </c:pt>
                 <c:pt idx="8">
-                  <c:v>0.1501</c:v>
+                  <c:v>0.15010000000000001</c:v>
                 </c:pt>
                 <c:pt idx="9">
                   <c:v>0.1573</c:v>
@@ -1722,28 +1594,28 @@
                   <c:v>0.1103</c:v>
                 </c:pt>
                 <c:pt idx="12">
-                  <c:v>0.0749</c:v>
+                  <c:v>7.4899999999999994E-2</c:v>
                 </c:pt>
                 <c:pt idx="13">
-                  <c:v>0.0444</c:v>
+                  <c:v>4.4400000000000002E-2</c:v>
                 </c:pt>
                 <c:pt idx="14">
-                  <c:v>0.0231</c:v>
+                  <c:v>2.3099999999999999E-2</c:v>
                 </c:pt>
                 <c:pt idx="15">
-                  <c:v>0.0106</c:v>
+                  <c:v>1.06E-2</c:v>
                 </c:pt>
                 <c:pt idx="16">
-                  <c:v>0.0042</c:v>
+                  <c:v>4.1999999999999997E-3</c:v>
                 </c:pt>
                 <c:pt idx="17">
-                  <c:v>0.0015</c:v>
+                  <c:v>1.5E-3</c:v>
                 </c:pt>
                 <c:pt idx="18">
-                  <c:v>0.0005</c:v>
+                  <c:v>5.0000000000000001E-4</c:v>
                 </c:pt>
                 <c:pt idx="19">
-                  <c:v>0.0001</c:v>
+                  <c:v>1E-4</c:v>
                 </c:pt>
                 <c:pt idx="20">
                   <c:v>0</c:v>
@@ -1781,36 +1653,23 @@
               </c:numCache>
             </c:numRef>
           </c:val>
+          <c:extLst>
+            <c:ext xmlns:c16="http://schemas.microsoft.com/office/drawing/2014/chart" uri="{C3380CC4-5D6E-409C-BE32-E72D297353CC}">
+              <c16:uniqueId val="{00000000-CCFB-FD4E-9A27-27633FB2048E}"/>
+            </c:ext>
+          </c:extLst>
         </c:ser>
         <c:dLbls>
-          <c:numFmt formatCode="#,##0" sourceLinked="0"/>
-          <c:txPr>
-            <a:bodyPr/>
-            <a:lstStyle/>
-            <a:p>
-              <a:pPr>
-                <a:defRPr b="0" i="0" strike="noStrike" sz="1200" u="none">
-                  <a:solidFill>
-                    <a:srgbClr val="000000"/>
-                  </a:solidFill>
-                  <a:latin typeface="Arial"/>
-                </a:defRPr>
-              </a:pPr>
-            </a:p>
-          </c:txPr>
           <c:showLegendKey val="0"/>
           <c:showVal val="0"/>
           <c:showCatName val="0"/>
           <c:showSerName val="0"/>
           <c:showPercent val="0"/>
           <c:showBubbleSize val="0"/>
-          <c:showLeaderLines val="0"/>
         </c:dLbls>
         <c:gapWidth val="25"/>
-        <c:overlap val="0"/>
         <c:axId val="2094734554"/>
         <c:axId val="2094734552"/>
-        <c:axId val="2094734556"/>
       </c:barChart>
       <c:catAx>
         <c:axId val="2094734554"/>
@@ -1851,6 +1710,7 @@
         <c:crosses val="autoZero"/>
         <c:auto val="1"/>
         <c:lblAlgn val="ctr"/>
+        <c:lblOffset val="100"/>
         <c:noMultiLvlLbl val="1"/>
       </c:catAx>
       <c:valAx>
@@ -1915,6 +1775,7 @@
     </c:plotArea>
     <c:plotVisOnly val="1"/>
     <c:dispBlanksAs val="span"/>
+    <c:showDLblsOverMax val="1"/>
   </c:chart>
   <c:spPr>
     <a:noFill/>
@@ -1930,9 +1791,11 @@
 </file>
 
 <file path=ppt/charts/chart6.xml><?xml version="1.0" encoding="utf-8"?>
-<c:chartSpace xmlns:c="http://schemas.openxmlformats.org/drawingml/2006/chart" xmlns:a="http://schemas.openxmlformats.org/drawingml/2006/main" xmlns:r="http://schemas.openxmlformats.org/officeDocument/2006/relationships">
+<c:chartSpace xmlns:c="http://schemas.openxmlformats.org/drawingml/2006/chart" xmlns:a="http://schemas.openxmlformats.org/drawingml/2006/main" xmlns:r="http://schemas.openxmlformats.org/officeDocument/2006/relationships" xmlns:c16r2="http://schemas.microsoft.com/office/drawing/2015/06/chart">
   <c:date1904 val="0"/>
+  <c:lang val="en-US"/>
   <c:roundedCorners val="1"/>
+  <c:style val="2"/>
   <c:chart>
     <c:title>
       <c:tx>
@@ -1949,18 +1812,26 @@
               </a:defRPr>
             </a:pPr>
             <a:r>
-              <a:rPr sz="1150" b="0" i="0" u="none" strike="noStrike">
+              <a:rPr lang="en-US" sz="1150" b="0" i="0" u="none" strike="noStrike">
                 <a:solidFill>
                   <a:srgbClr val="0A2559"/>
                 </a:solidFill>
                 <a:latin typeface="Calibri"/>
               </a:rPr>
-              <a:t>Muertes por cuerpo-año: observado vs. Poisson(λ = 0.61)</a:t>
+              <a:t>Muertes por cuerpo-año: observado vs. Poisson(</a:t>
+            </a:r>
+            <a:r>
+              <a:rPr lang="el-GR" sz="1150" b="0" i="0" u="none" strike="noStrike">
+                <a:solidFill>
+                  <a:srgbClr val="0A2559"/>
+                </a:solidFill>
+                <a:latin typeface="Calibri"/>
+              </a:rPr>
+              <a:t>λ = 0.61)</a:t>
             </a:r>
           </a:p>
         </c:rich>
       </c:tx>
-      <c:layout/>
       <c:overlay val="0"/>
     </c:title>
     <c:autoTitleDeleted val="0"/>
@@ -1991,54 +1862,28 @@
             <a:effectLst/>
           </c:spPr>
           <c:invertIfNegative val="0"/>
-          <c:dLbls>
-            <c:numFmt formatCode="#,##0" sourceLinked="0"/>
-            <c:txPr>
-              <a:bodyPr/>
-              <a:lstStyle/>
-              <a:p>
-                <a:pPr>
-                  <a:defRPr b="0" i="0" strike="noStrike" sz="1200" u="none">
-                    <a:solidFill>
-                      <a:srgbClr val="000000"/>
-                    </a:solidFill>
-                    <a:latin typeface="Arial"/>
-                  </a:defRPr>
-                </a:pPr>
-              </a:p>
-            </c:txPr>
-            <c:showLegendKey val="0"/>
-            <c:showVal val="0"/>
-            <c:showCatName val="0"/>
-            <c:showSerName val="0"/>
-            <c:showPercent val="0"/>
-            <c:showBubbleSize val="0"/>
-            <c:showLeaderLines val="0"/>
-          </c:dLbls>
           <c:cat>
-            <c:multiLvlStrRef>
+            <c:strRef>
               <c:f>Sheet1!$A$2:$A$6</c:f>
-              <c:multiLvlStrCache>
+              <c:strCache>
                 <c:ptCount val="5"/>
-                <c:lvl>
-                  <c:pt idx="0">
-                    <c:v>0</c:v>
-                  </c:pt>
-                  <c:pt idx="1">
-                    <c:v>1</c:v>
-                  </c:pt>
-                  <c:pt idx="2">
-                    <c:v>2</c:v>
-                  </c:pt>
-                  <c:pt idx="3">
-                    <c:v>3</c:v>
-                  </c:pt>
-                  <c:pt idx="4">
-                    <c:v>4</c:v>
-                  </c:pt>
-                </c:lvl>
-              </c:multiLvlStrCache>
-            </c:multiLvlStrRef>
+                <c:pt idx="0">
+                  <c:v>0</c:v>
+                </c:pt>
+                <c:pt idx="1">
+                  <c:v>1</c:v>
+                </c:pt>
+                <c:pt idx="2">
+                  <c:v>2</c:v>
+                </c:pt>
+                <c:pt idx="3">
+                  <c:v>3</c:v>
+                </c:pt>
+                <c:pt idx="4">
+                  <c:v>4</c:v>
+                </c:pt>
+              </c:strCache>
+            </c:strRef>
           </c:cat>
           <c:val>
             <c:numRef>
@@ -2064,6 +1909,11 @@
               </c:numCache>
             </c:numRef>
           </c:val>
+          <c:extLst>
+            <c:ext xmlns:c16="http://schemas.microsoft.com/office/drawing/2014/chart" uri="{C3380CC4-5D6E-409C-BE32-E72D297353CC}">
+              <c16:uniqueId val="{00000000-E5FF-8F45-8877-C04E774CBFC3}"/>
+            </c:ext>
+          </c:extLst>
         </c:ser>
         <c:ser>
           <c:idx val="1"/>
@@ -2086,54 +1936,28 @@
             <a:effectLst/>
           </c:spPr>
           <c:invertIfNegative val="0"/>
-          <c:dLbls>
-            <c:numFmt formatCode="#,##0" sourceLinked="0"/>
-            <c:txPr>
-              <a:bodyPr/>
-              <a:lstStyle/>
-              <a:p>
-                <a:pPr>
-                  <a:defRPr b="0" i="0" strike="noStrike" sz="1200" u="none">
-                    <a:solidFill>
-                      <a:srgbClr val="000000"/>
-                    </a:solidFill>
-                    <a:latin typeface="Arial"/>
-                  </a:defRPr>
-                </a:pPr>
-              </a:p>
-            </c:txPr>
-            <c:showLegendKey val="0"/>
-            <c:showVal val="0"/>
-            <c:showCatName val="0"/>
-            <c:showSerName val="0"/>
-            <c:showPercent val="0"/>
-            <c:showBubbleSize val="0"/>
-            <c:showLeaderLines val="0"/>
-          </c:dLbls>
           <c:cat>
-            <c:multiLvlStrRef>
+            <c:strRef>
               <c:f>Sheet1!$A$2:$A$6</c:f>
-              <c:multiLvlStrCache>
+              <c:strCache>
                 <c:ptCount val="5"/>
-                <c:lvl>
-                  <c:pt idx="0">
-                    <c:v>0</c:v>
-                  </c:pt>
-                  <c:pt idx="1">
-                    <c:v>1</c:v>
-                  </c:pt>
-                  <c:pt idx="2">
-                    <c:v>2</c:v>
-                  </c:pt>
-                  <c:pt idx="3">
-                    <c:v>3</c:v>
-                  </c:pt>
-                  <c:pt idx="4">
-                    <c:v>4</c:v>
-                  </c:pt>
-                </c:lvl>
-              </c:multiLvlStrCache>
-            </c:multiLvlStrRef>
+                <c:pt idx="0">
+                  <c:v>0</c:v>
+                </c:pt>
+                <c:pt idx="1">
+                  <c:v>1</c:v>
+                </c:pt>
+                <c:pt idx="2">
+                  <c:v>2</c:v>
+                </c:pt>
+                <c:pt idx="3">
+                  <c:v>3</c:v>
+                </c:pt>
+                <c:pt idx="4">
+                  <c:v>4</c:v>
+                </c:pt>
+              </c:strCache>
+            </c:strRef>
           </c:cat>
           <c:val>
             <c:numRef>
@@ -2151,7 +1975,7 @@
                   <c:v>20.2</c:v>
                 </c:pt>
                 <c:pt idx="3">
-                  <c:v>4.1</c:v>
+                  <c:v>4.0999999999999996</c:v>
                 </c:pt>
                 <c:pt idx="4">
                   <c:v>0.6</c:v>
@@ -2159,36 +1983,23 @@
               </c:numCache>
             </c:numRef>
           </c:val>
+          <c:extLst>
+            <c:ext xmlns:c16="http://schemas.microsoft.com/office/drawing/2014/chart" uri="{C3380CC4-5D6E-409C-BE32-E72D297353CC}">
+              <c16:uniqueId val="{00000001-E5FF-8F45-8877-C04E774CBFC3}"/>
+            </c:ext>
+          </c:extLst>
         </c:ser>
         <c:dLbls>
-          <c:numFmt formatCode="#,##0" sourceLinked="0"/>
-          <c:txPr>
-            <a:bodyPr/>
-            <a:lstStyle/>
-            <a:p>
-              <a:pPr>
-                <a:defRPr b="0" i="0" strike="noStrike" sz="1200" u="none">
-                  <a:solidFill>
-                    <a:srgbClr val="000000"/>
-                  </a:solidFill>
-                  <a:latin typeface="Arial"/>
-                </a:defRPr>
-              </a:pPr>
-            </a:p>
-          </c:txPr>
           <c:showLegendKey val="0"/>
           <c:showVal val="0"/>
           <c:showCatName val="0"/>
           <c:showSerName val="0"/>
           <c:showPercent val="0"/>
           <c:showBubbleSize val="0"/>
-          <c:showLeaderLines val="0"/>
         </c:dLbls>
         <c:gapWidth val="40"/>
-        <c:overlap val="0"/>
         <c:axId val="2094734554"/>
         <c:axId val="2094734552"/>
-        <c:axId val="2094734556"/>
       </c:barChart>
       <c:catAx>
         <c:axId val="2094734554"/>
@@ -2229,6 +2040,7 @@
         <c:crosses val="autoZero"/>
         <c:auto val="1"/>
         <c:lblAlgn val="ctr"/>
+        <c:lblOffset val="100"/>
         <c:noMultiLvlLbl val="1"/>
       </c:catAx>
       <c:valAx>
@@ -2310,6 +2122,7 @@
     </c:legend>
     <c:plotVisOnly val="1"/>
     <c:dispBlanksAs val="span"/>
+    <c:showDLblsOverMax val="1"/>
   </c:chart>
   <c:spPr>
     <a:noFill/>
@@ -2325,9 +2138,11 @@
 </file>
 
 <file path=ppt/charts/chart7.xml><?xml version="1.0" encoding="utf-8"?>
-<c:chartSpace xmlns:c="http://schemas.openxmlformats.org/drawingml/2006/chart" xmlns:a="http://schemas.openxmlformats.org/drawingml/2006/main" xmlns:r="http://schemas.openxmlformats.org/officeDocument/2006/relationships">
+<c:chartSpace xmlns:c="http://schemas.openxmlformats.org/drawingml/2006/chart" xmlns:a="http://schemas.openxmlformats.org/drawingml/2006/main" xmlns:r="http://schemas.openxmlformats.org/officeDocument/2006/relationships" xmlns:c16r2="http://schemas.microsoft.com/office/drawing/2015/06/chart">
   <c:date1904 val="0"/>
+  <c:lang val="en-US"/>
   <c:roundedCorners val="1"/>
+  <c:style val="2"/>
   <c:chart>
     <c:title>
       <c:tx>
@@ -2344,18 +2159,35 @@
               </a:defRPr>
             </a:pPr>
             <a:r>
-              <a:rPr sz="1150" b="0" i="0" u="none" strike="noStrike">
+              <a:rPr lang="en-US" sz="1150" b="0" i="0" u="none" strike="noStrike">
                 <a:solidFill>
                   <a:srgbClr val="0A2559"/>
                 </a:solidFill>
                 <a:latin typeface="Calibri"/>
               </a:rPr>
-              <a:t>Poisson(λ = 3.5) · reclamos por hora</a:t>
+              <a:t>Poisson(</a:t>
+            </a:r>
+            <a:r>
+              <a:rPr lang="el-GR" sz="1150" b="0" i="0" u="none" strike="noStrike">
+                <a:solidFill>
+                  <a:srgbClr val="0A2559"/>
+                </a:solidFill>
+                <a:latin typeface="Calibri"/>
+              </a:rPr>
+              <a:t>λ = 3.5) · </a:t>
+            </a:r>
+            <a:r>
+              <a:rPr lang="en-US" sz="1150" b="0" i="0" u="none" strike="noStrike">
+                <a:solidFill>
+                  <a:srgbClr val="0A2559"/>
+                </a:solidFill>
+                <a:latin typeface="Calibri"/>
+              </a:rPr>
+              <a:t>reclamos por hora</a:t>
             </a:r>
           </a:p>
         </c:rich>
       </c:tx>
-      <c:layout/>
       <c:overlay val="0"/>
     </c:title>
     <c:autoTitleDeleted val="0"/>
@@ -2386,84 +2218,58 @@
             <a:effectLst/>
           </c:spPr>
           <c:invertIfNegative val="0"/>
-          <c:dLbls>
-            <c:numFmt formatCode="#,##0" sourceLinked="0"/>
-            <c:txPr>
-              <a:bodyPr/>
-              <a:lstStyle/>
-              <a:p>
-                <a:pPr>
-                  <a:defRPr b="0" i="0" strike="noStrike" sz="1200" u="none">
-                    <a:solidFill>
-                      <a:srgbClr val="000000"/>
-                    </a:solidFill>
-                    <a:latin typeface="Arial"/>
-                  </a:defRPr>
-                </a:pPr>
-              </a:p>
-            </c:txPr>
-            <c:showLegendKey val="0"/>
-            <c:showVal val="0"/>
-            <c:showCatName val="0"/>
-            <c:showSerName val="0"/>
-            <c:showPercent val="0"/>
-            <c:showBubbleSize val="0"/>
-            <c:showLeaderLines val="0"/>
-          </c:dLbls>
           <c:cat>
-            <c:multiLvlStrRef>
+            <c:strRef>
               <c:f>Sheet1!$A$2:$A$16</c:f>
-              <c:multiLvlStrCache>
+              <c:strCache>
                 <c:ptCount val="15"/>
-                <c:lvl>
-                  <c:pt idx="0">
-                    <c:v>0</c:v>
-                  </c:pt>
-                  <c:pt idx="1">
-                    <c:v>1</c:v>
-                  </c:pt>
-                  <c:pt idx="2">
-                    <c:v>2</c:v>
-                  </c:pt>
-                  <c:pt idx="3">
-                    <c:v>3</c:v>
-                  </c:pt>
-                  <c:pt idx="4">
-                    <c:v>4</c:v>
-                  </c:pt>
-                  <c:pt idx="5">
-                    <c:v>5</c:v>
-                  </c:pt>
-                  <c:pt idx="6">
-                    <c:v>6</c:v>
-                  </c:pt>
-                  <c:pt idx="7">
-                    <c:v>7</c:v>
-                  </c:pt>
-                  <c:pt idx="8">
-                    <c:v>8</c:v>
-                  </c:pt>
-                  <c:pt idx="9">
-                    <c:v>9</c:v>
-                  </c:pt>
-                  <c:pt idx="10">
-                    <c:v>10</c:v>
-                  </c:pt>
-                  <c:pt idx="11">
-                    <c:v>11</c:v>
-                  </c:pt>
-                  <c:pt idx="12">
-                    <c:v>12</c:v>
-                  </c:pt>
-                  <c:pt idx="13">
-                    <c:v>13</c:v>
-                  </c:pt>
-                  <c:pt idx="14">
-                    <c:v>14</c:v>
-                  </c:pt>
-                </c:lvl>
-              </c:multiLvlStrCache>
-            </c:multiLvlStrRef>
+                <c:pt idx="0">
+                  <c:v>0</c:v>
+                </c:pt>
+                <c:pt idx="1">
+                  <c:v>1</c:v>
+                </c:pt>
+                <c:pt idx="2">
+                  <c:v>2</c:v>
+                </c:pt>
+                <c:pt idx="3">
+                  <c:v>3</c:v>
+                </c:pt>
+                <c:pt idx="4">
+                  <c:v>4</c:v>
+                </c:pt>
+                <c:pt idx="5">
+                  <c:v>5</c:v>
+                </c:pt>
+                <c:pt idx="6">
+                  <c:v>6</c:v>
+                </c:pt>
+                <c:pt idx="7">
+                  <c:v>7</c:v>
+                </c:pt>
+                <c:pt idx="8">
+                  <c:v>8</c:v>
+                </c:pt>
+                <c:pt idx="9">
+                  <c:v>9</c:v>
+                </c:pt>
+                <c:pt idx="10">
+                  <c:v>10</c:v>
+                </c:pt>
+                <c:pt idx="11">
+                  <c:v>11</c:v>
+                </c:pt>
+                <c:pt idx="12">
+                  <c:v>12</c:v>
+                </c:pt>
+                <c:pt idx="13">
+                  <c:v>13</c:v>
+                </c:pt>
+                <c:pt idx="14">
+                  <c:v>14</c:v>
+                </c:pt>
+              </c:strCache>
+            </c:strRef>
           </c:cat>
           <c:val>
             <c:numRef>
@@ -2472,7 +2278,7 @@
                 <c:formatCode>General</c:formatCode>
                 <c:ptCount val="15"/>
                 <c:pt idx="0">
-                  <c:v>0.0302</c:v>
+                  <c:v>3.0200000000000001E-2</c:v>
                 </c:pt>
                 <c:pt idx="1">
                   <c:v>0.1057</c:v>
@@ -2481,37 +2287,37 @@
                   <c:v>0.185</c:v>
                 </c:pt>
                 <c:pt idx="3">
-                  <c:v>0.2158</c:v>
+                  <c:v>0.21579999999999999</c:v>
                 </c:pt>
                 <c:pt idx="4">
                   <c:v>0.1888</c:v>
                 </c:pt>
                 <c:pt idx="5">
-                  <c:v>0.1322</c:v>
+                  <c:v>0.13220000000000001</c:v>
                 </c:pt>
                 <c:pt idx="6">
-                  <c:v>0.0771</c:v>
+                  <c:v>7.7100000000000002E-2</c:v>
                 </c:pt>
                 <c:pt idx="7">
-                  <c:v>0.0385</c:v>
+                  <c:v>3.85E-2</c:v>
                 </c:pt>
                 <c:pt idx="8">
-                  <c:v>0.0169</c:v>
+                  <c:v>1.6899999999999998E-2</c:v>
                 </c:pt>
                 <c:pt idx="9">
-                  <c:v>0.0066</c:v>
+                  <c:v>6.6E-3</c:v>
                 </c:pt>
                 <c:pt idx="10">
-                  <c:v>0.0023</c:v>
+                  <c:v>2.3E-3</c:v>
                 </c:pt>
                 <c:pt idx="11">
-                  <c:v>0.0007</c:v>
+                  <c:v>6.9999999999999999E-4</c:v>
                 </c:pt>
                 <c:pt idx="12">
-                  <c:v>0.0002</c:v>
+                  <c:v>2.0000000000000001E-4</c:v>
                 </c:pt>
                 <c:pt idx="13">
-                  <c:v>0.0001</c:v>
+                  <c:v>1E-4</c:v>
                 </c:pt>
                 <c:pt idx="14">
                   <c:v>0</c:v>
@@ -2519,36 +2325,23 @@
               </c:numCache>
             </c:numRef>
           </c:val>
+          <c:extLst>
+            <c:ext xmlns:c16="http://schemas.microsoft.com/office/drawing/2014/chart" uri="{C3380CC4-5D6E-409C-BE32-E72D297353CC}">
+              <c16:uniqueId val="{00000000-1F41-4F47-940B-23305260EBB0}"/>
+            </c:ext>
+          </c:extLst>
         </c:ser>
         <c:dLbls>
-          <c:numFmt formatCode="#,##0" sourceLinked="0"/>
-          <c:txPr>
-            <a:bodyPr/>
-            <a:lstStyle/>
-            <a:p>
-              <a:pPr>
-                <a:defRPr b="0" i="0" strike="noStrike" sz="1200" u="none">
-                  <a:solidFill>
-                    <a:srgbClr val="000000"/>
-                  </a:solidFill>
-                  <a:latin typeface="Arial"/>
-                </a:defRPr>
-              </a:pPr>
-            </a:p>
-          </c:txPr>
           <c:showLegendKey val="0"/>
           <c:showVal val="0"/>
           <c:showCatName val="0"/>
           <c:showSerName val="0"/>
           <c:showPercent val="0"/>
           <c:showBubbleSize val="0"/>
-          <c:showLeaderLines val="0"/>
         </c:dLbls>
         <c:gapWidth val="30"/>
-        <c:overlap val="0"/>
         <c:axId val="2094734554"/>
         <c:axId val="2094734552"/>
-        <c:axId val="2094734556"/>
       </c:barChart>
       <c:catAx>
         <c:axId val="2094734554"/>
@@ -2589,6 +2382,7 @@
         <c:crosses val="autoZero"/>
         <c:auto val="1"/>
         <c:lblAlgn val="ctr"/>
+        <c:lblOffset val="100"/>
         <c:noMultiLvlLbl val="1"/>
       </c:catAx>
       <c:valAx>
@@ -2653,6 +2447,7 @@
     </c:plotArea>
     <c:plotVisOnly val="1"/>
     <c:dispBlanksAs val="span"/>
+    <c:showDLblsOverMax val="1"/>
   </c:chart>
   <c:spPr>
     <a:noFill/>
@@ -2668,9 +2463,11 @@
 </file>
 
 <file path=ppt/charts/chart8.xml><?xml version="1.0" encoding="utf-8"?>
-<c:chartSpace xmlns:c="http://schemas.openxmlformats.org/drawingml/2006/chart" xmlns:a="http://schemas.openxmlformats.org/drawingml/2006/main" xmlns:r="http://schemas.openxmlformats.org/officeDocument/2006/relationships">
+<c:chartSpace xmlns:c="http://schemas.openxmlformats.org/drawingml/2006/chart" xmlns:a="http://schemas.openxmlformats.org/drawingml/2006/main" xmlns:r="http://schemas.openxmlformats.org/officeDocument/2006/relationships" xmlns:c16r2="http://schemas.microsoft.com/office/drawing/2015/06/chart">
   <c:date1904 val="0"/>
+  <c:lang val="en-US"/>
   <c:roundedCorners val="1"/>
+  <c:style val="2"/>
   <c:chart>
     <c:title>
       <c:tx>
@@ -2687,18 +2484,26 @@
               </a:defRPr>
             </a:pPr>
             <a:r>
-              <a:rPr sz="1150" b="0" i="0" u="none" strike="noStrike">
+              <a:rPr lang="en-US" sz="1150" b="0" i="0" u="none" strike="noStrike">
                 <a:solidFill>
                   <a:srgbClr val="0A2559"/>
                 </a:solidFill>
                 <a:latin typeface="Calibri"/>
               </a:rPr>
-              <a:t>Impactos por cuadrícula: observado vs. Poisson(λ = 0.93)</a:t>
+              <a:t>Impactos por cuadrícula: observado vs. Poisson(</a:t>
+            </a:r>
+            <a:r>
+              <a:rPr lang="el-GR" sz="1150" b="0" i="0" u="none" strike="noStrike">
+                <a:solidFill>
+                  <a:srgbClr val="0A2559"/>
+                </a:solidFill>
+                <a:latin typeface="Calibri"/>
+              </a:rPr>
+              <a:t>λ = 0.93)</a:t>
             </a:r>
           </a:p>
         </c:rich>
       </c:tx>
-      <c:layout/>
       <c:overlay val="0"/>
     </c:title>
     <c:autoTitleDeleted val="0"/>
@@ -2729,57 +2534,31 @@
             <a:effectLst/>
           </c:spPr>
           <c:invertIfNegative val="0"/>
-          <c:dLbls>
-            <c:numFmt formatCode="#,##0" sourceLinked="0"/>
-            <c:txPr>
-              <a:bodyPr/>
-              <a:lstStyle/>
-              <a:p>
-                <a:pPr>
-                  <a:defRPr b="0" i="0" strike="noStrike" sz="1200" u="none">
-                    <a:solidFill>
-                      <a:srgbClr val="000000"/>
-                    </a:solidFill>
-                    <a:latin typeface="Arial"/>
-                  </a:defRPr>
-                </a:pPr>
-              </a:p>
-            </c:txPr>
-            <c:showLegendKey val="0"/>
-            <c:showVal val="0"/>
-            <c:showCatName val="0"/>
-            <c:showSerName val="0"/>
-            <c:showPercent val="0"/>
-            <c:showBubbleSize val="0"/>
-            <c:showLeaderLines val="0"/>
-          </c:dLbls>
           <c:cat>
-            <c:multiLvlStrRef>
+            <c:strRef>
               <c:f>Sheet1!$A$2:$A$7</c:f>
-              <c:multiLvlStrCache>
+              <c:strCache>
                 <c:ptCount val="6"/>
-                <c:lvl>
-                  <c:pt idx="0">
-                    <c:v>0</c:v>
-                  </c:pt>
-                  <c:pt idx="1">
-                    <c:v>1</c:v>
-                  </c:pt>
-                  <c:pt idx="2">
-                    <c:v>2</c:v>
-                  </c:pt>
-                  <c:pt idx="3">
-                    <c:v>3</c:v>
-                  </c:pt>
-                  <c:pt idx="4">
-                    <c:v>4</c:v>
-                  </c:pt>
-                  <c:pt idx="5">
-                    <c:v>5+</c:v>
-                  </c:pt>
-                </c:lvl>
-              </c:multiLvlStrCache>
-            </c:multiLvlStrRef>
+                <c:pt idx="0">
+                  <c:v>0</c:v>
+                </c:pt>
+                <c:pt idx="1">
+                  <c:v>1</c:v>
+                </c:pt>
+                <c:pt idx="2">
+                  <c:v>2</c:v>
+                </c:pt>
+                <c:pt idx="3">
+                  <c:v>3</c:v>
+                </c:pt>
+                <c:pt idx="4">
+                  <c:v>4</c:v>
+                </c:pt>
+                <c:pt idx="5">
+                  <c:v>5+</c:v>
+                </c:pt>
+              </c:strCache>
+            </c:strRef>
           </c:cat>
           <c:val>
             <c:numRef>
@@ -2808,6 +2587,11 @@
               </c:numCache>
             </c:numRef>
           </c:val>
+          <c:extLst>
+            <c:ext xmlns:c16="http://schemas.microsoft.com/office/drawing/2014/chart" uri="{C3380CC4-5D6E-409C-BE32-E72D297353CC}">
+              <c16:uniqueId val="{00000000-9844-E340-9F27-E776AE44C708}"/>
+            </c:ext>
+          </c:extLst>
         </c:ser>
         <c:ser>
           <c:idx val="1"/>
@@ -2830,57 +2614,31 @@
             <a:effectLst/>
           </c:spPr>
           <c:invertIfNegative val="0"/>
-          <c:dLbls>
-            <c:numFmt formatCode="#,##0" sourceLinked="0"/>
-            <c:txPr>
-              <a:bodyPr/>
-              <a:lstStyle/>
-              <a:p>
-                <a:pPr>
-                  <a:defRPr b="0" i="0" strike="noStrike" sz="1200" u="none">
-                    <a:solidFill>
-                      <a:srgbClr val="000000"/>
-                    </a:solidFill>
-                    <a:latin typeface="Arial"/>
-                  </a:defRPr>
-                </a:pPr>
-              </a:p>
-            </c:txPr>
-            <c:showLegendKey val="0"/>
-            <c:showVal val="0"/>
-            <c:showCatName val="0"/>
-            <c:showSerName val="0"/>
-            <c:showPercent val="0"/>
-            <c:showBubbleSize val="0"/>
-            <c:showLeaderLines val="0"/>
-          </c:dLbls>
           <c:cat>
-            <c:multiLvlStrRef>
+            <c:strRef>
               <c:f>Sheet1!$A$2:$A$7</c:f>
-              <c:multiLvlStrCache>
+              <c:strCache>
                 <c:ptCount val="6"/>
-                <c:lvl>
-                  <c:pt idx="0">
-                    <c:v>0</c:v>
-                  </c:pt>
-                  <c:pt idx="1">
-                    <c:v>1</c:v>
-                  </c:pt>
-                  <c:pt idx="2">
-                    <c:v>2</c:v>
-                  </c:pt>
-                  <c:pt idx="3">
-                    <c:v>3</c:v>
-                  </c:pt>
-                  <c:pt idx="4">
-                    <c:v>4</c:v>
-                  </c:pt>
-                  <c:pt idx="5">
-                    <c:v>5+</c:v>
-                  </c:pt>
-                </c:lvl>
-              </c:multiLvlStrCache>
-            </c:multiLvlStrRef>
+                <c:pt idx="0">
+                  <c:v>0</c:v>
+                </c:pt>
+                <c:pt idx="1">
+                  <c:v>1</c:v>
+                </c:pt>
+                <c:pt idx="2">
+                  <c:v>2</c:v>
+                </c:pt>
+                <c:pt idx="3">
+                  <c:v>3</c:v>
+                </c:pt>
+                <c:pt idx="4">
+                  <c:v>4</c:v>
+                </c:pt>
+                <c:pt idx="5">
+                  <c:v>5+</c:v>
+                </c:pt>
+              </c:strCache>
+            </c:strRef>
           </c:cat>
           <c:val>
             <c:numRef>
@@ -2909,36 +2667,23 @@
               </c:numCache>
             </c:numRef>
           </c:val>
+          <c:extLst>
+            <c:ext xmlns:c16="http://schemas.microsoft.com/office/drawing/2014/chart" uri="{C3380CC4-5D6E-409C-BE32-E72D297353CC}">
+              <c16:uniqueId val="{00000001-9844-E340-9F27-E776AE44C708}"/>
+            </c:ext>
+          </c:extLst>
         </c:ser>
         <c:dLbls>
-          <c:numFmt formatCode="#,##0" sourceLinked="0"/>
-          <c:txPr>
-            <a:bodyPr/>
-            <a:lstStyle/>
-            <a:p>
-              <a:pPr>
-                <a:defRPr b="0" i="0" strike="noStrike" sz="1200" u="none">
-                  <a:solidFill>
-                    <a:srgbClr val="000000"/>
-                  </a:solidFill>
-                  <a:latin typeface="Arial"/>
-                </a:defRPr>
-              </a:pPr>
-            </a:p>
-          </c:txPr>
           <c:showLegendKey val="0"/>
           <c:showVal val="0"/>
           <c:showCatName val="0"/>
           <c:showSerName val="0"/>
           <c:showPercent val="0"/>
           <c:showBubbleSize val="0"/>
-          <c:showLeaderLines val="0"/>
         </c:dLbls>
         <c:gapWidth val="40"/>
-        <c:overlap val="0"/>
         <c:axId val="2094734554"/>
         <c:axId val="2094734552"/>
-        <c:axId val="2094734556"/>
       </c:barChart>
       <c:catAx>
         <c:axId val="2094734554"/>
@@ -2979,6 +2724,7 @@
         <c:crosses val="autoZero"/>
         <c:auto val="1"/>
         <c:lblAlgn val="ctr"/>
+        <c:lblOffset val="100"/>
         <c:noMultiLvlLbl val="1"/>
       </c:catAx>
       <c:valAx>
@@ -3060,6 +2806,7 @@
     </c:legend>
     <c:plotVisOnly val="1"/>
     <c:dispBlanksAs val="span"/>
+    <c:showDLblsOverMax val="1"/>
   </c:chart>
   <c:spPr>
     <a:noFill/>
@@ -3075,9 +2822,11 @@
 </file>
 
 <file path=ppt/charts/chart9.xml><?xml version="1.0" encoding="utf-8"?>
-<c:chartSpace xmlns:c="http://schemas.openxmlformats.org/drawingml/2006/chart" xmlns:a="http://schemas.openxmlformats.org/drawingml/2006/main" xmlns:r="http://schemas.openxmlformats.org/officeDocument/2006/relationships">
+<c:chartSpace xmlns:c="http://schemas.openxmlformats.org/drawingml/2006/chart" xmlns:a="http://schemas.openxmlformats.org/drawingml/2006/main" xmlns:r="http://schemas.openxmlformats.org/officeDocument/2006/relationships" xmlns:c16r2="http://schemas.microsoft.com/office/drawing/2015/06/chart">
   <c:date1904 val="0"/>
+  <c:lang val="en-US"/>
   <c:roundedCorners val="1"/>
+  <c:style val="2"/>
   <c:chart>
     <c:title>
       <c:tx>
@@ -3094,7 +2843,7 @@
               </a:defRPr>
             </a:pPr>
             <a:r>
-              <a:rPr sz="1150" b="0" i="0" u="none" strike="noStrike">
+              <a:rPr lang="en-US" sz="1150" b="0" i="0" u="none" strike="noStrike">
                 <a:solidFill>
                   <a:srgbClr val="0A2559"/>
                 </a:solidFill>
@@ -3105,7 +2854,6 @@
           </a:p>
         </c:rich>
       </c:tx>
-      <c:layout/>
       <c:overlay val="0"/>
     </c:title>
     <c:autoTitleDeleted val="0"/>
@@ -3136,99 +2884,73 @@
             <a:effectLst/>
           </c:spPr>
           <c:invertIfNegative val="0"/>
-          <c:dLbls>
-            <c:numFmt formatCode="#,##0" sourceLinked="0"/>
-            <c:txPr>
-              <a:bodyPr/>
-              <a:lstStyle/>
-              <a:p>
-                <a:pPr>
-                  <a:defRPr b="0" i="0" strike="noStrike" sz="1200" u="none">
-                    <a:solidFill>
-                      <a:srgbClr val="000000"/>
-                    </a:solidFill>
-                    <a:latin typeface="Arial"/>
-                  </a:defRPr>
-                </a:pPr>
-              </a:p>
-            </c:txPr>
-            <c:showLegendKey val="0"/>
-            <c:showVal val="0"/>
-            <c:showCatName val="0"/>
-            <c:showSerName val="0"/>
-            <c:showPercent val="0"/>
-            <c:showBubbleSize val="0"/>
-            <c:showLeaderLines val="0"/>
-          </c:dLbls>
           <c:cat>
-            <c:multiLvlStrRef>
+            <c:strRef>
               <c:f>Sheet1!$A$2:$A$21</c:f>
-              <c:multiLvlStrCache>
+              <c:strCache>
                 <c:ptCount val="20"/>
-                <c:lvl>
-                  <c:pt idx="0">
-                    <c:v>1</c:v>
-                  </c:pt>
-                  <c:pt idx="1">
-                    <c:v>2</c:v>
-                  </c:pt>
-                  <c:pt idx="2">
-                    <c:v>3</c:v>
-                  </c:pt>
-                  <c:pt idx="3">
-                    <c:v>4</c:v>
-                  </c:pt>
-                  <c:pt idx="4">
-                    <c:v>5</c:v>
-                  </c:pt>
-                  <c:pt idx="5">
-                    <c:v>6</c:v>
-                  </c:pt>
-                  <c:pt idx="6">
-                    <c:v>7</c:v>
-                  </c:pt>
-                  <c:pt idx="7">
-                    <c:v>8</c:v>
-                  </c:pt>
-                  <c:pt idx="8">
-                    <c:v>9</c:v>
-                  </c:pt>
-                  <c:pt idx="9">
-                    <c:v>10</c:v>
-                  </c:pt>
-                  <c:pt idx="10">
-                    <c:v>11</c:v>
-                  </c:pt>
-                  <c:pt idx="11">
-                    <c:v>12</c:v>
-                  </c:pt>
-                  <c:pt idx="12">
-                    <c:v>13</c:v>
-                  </c:pt>
-                  <c:pt idx="13">
-                    <c:v>14</c:v>
-                  </c:pt>
-                  <c:pt idx="14">
-                    <c:v>15</c:v>
-                  </c:pt>
-                  <c:pt idx="15">
-                    <c:v>16</c:v>
-                  </c:pt>
-                  <c:pt idx="16">
-                    <c:v>17</c:v>
-                  </c:pt>
-                  <c:pt idx="17">
-                    <c:v>18</c:v>
-                  </c:pt>
-                  <c:pt idx="18">
-                    <c:v>19</c:v>
-                  </c:pt>
-                  <c:pt idx="19">
-                    <c:v>20</c:v>
-                  </c:pt>
-                </c:lvl>
-              </c:multiLvlStrCache>
-            </c:multiLvlStrRef>
+                <c:pt idx="0">
+                  <c:v>1</c:v>
+                </c:pt>
+                <c:pt idx="1">
+                  <c:v>2</c:v>
+                </c:pt>
+                <c:pt idx="2">
+                  <c:v>3</c:v>
+                </c:pt>
+                <c:pt idx="3">
+                  <c:v>4</c:v>
+                </c:pt>
+                <c:pt idx="4">
+                  <c:v>5</c:v>
+                </c:pt>
+                <c:pt idx="5">
+                  <c:v>6</c:v>
+                </c:pt>
+                <c:pt idx="6">
+                  <c:v>7</c:v>
+                </c:pt>
+                <c:pt idx="7">
+                  <c:v>8</c:v>
+                </c:pt>
+                <c:pt idx="8">
+                  <c:v>9</c:v>
+                </c:pt>
+                <c:pt idx="9">
+                  <c:v>10</c:v>
+                </c:pt>
+                <c:pt idx="10">
+                  <c:v>11</c:v>
+                </c:pt>
+                <c:pt idx="11">
+                  <c:v>12</c:v>
+                </c:pt>
+                <c:pt idx="12">
+                  <c:v>13</c:v>
+                </c:pt>
+                <c:pt idx="13">
+                  <c:v>14</c:v>
+                </c:pt>
+                <c:pt idx="14">
+                  <c:v>15</c:v>
+                </c:pt>
+                <c:pt idx="15">
+                  <c:v>16</c:v>
+                </c:pt>
+                <c:pt idx="16">
+                  <c:v>17</c:v>
+                </c:pt>
+                <c:pt idx="17">
+                  <c:v>18</c:v>
+                </c:pt>
+                <c:pt idx="18">
+                  <c:v>19</c:v>
+                </c:pt>
+                <c:pt idx="19">
+                  <c:v>20</c:v>
+                </c:pt>
+              </c:strCache>
+            </c:strRef>
           </c:cat>
           <c:val>
             <c:numRef>
@@ -3249,86 +2971,73 @@
                   <c:v>0.1024</c:v>
                 </c:pt>
                 <c:pt idx="4">
-                  <c:v>0.0819</c:v>
+                  <c:v>8.1900000000000001E-2</c:v>
                 </c:pt>
                 <c:pt idx="5">
-                  <c:v>0.0655</c:v>
+                  <c:v>6.5500000000000003E-2</c:v>
                 </c:pt>
                 <c:pt idx="6">
-                  <c:v>0.0524</c:v>
+                  <c:v>5.2400000000000002E-2</c:v>
                 </c:pt>
                 <c:pt idx="7">
-                  <c:v>0.0419</c:v>
+                  <c:v>4.19E-2</c:v>
                 </c:pt>
                 <c:pt idx="8">
-                  <c:v>0.0336</c:v>
+                  <c:v>3.3599999999999998E-2</c:v>
                 </c:pt>
                 <c:pt idx="9">
-                  <c:v>0.0268</c:v>
+                  <c:v>2.6800000000000001E-2</c:v>
                 </c:pt>
                 <c:pt idx="10">
-                  <c:v>0.0215</c:v>
+                  <c:v>2.1499999999999998E-2</c:v>
                 </c:pt>
                 <c:pt idx="11">
-                  <c:v>0.0172</c:v>
+                  <c:v>1.72E-2</c:v>
                 </c:pt>
                 <c:pt idx="12">
-                  <c:v>0.0137</c:v>
+                  <c:v>1.37E-2</c:v>
                 </c:pt>
                 <c:pt idx="13">
-                  <c:v>0.011</c:v>
+                  <c:v>1.0999999999999999E-2</c:v>
                 </c:pt>
                 <c:pt idx="14">
-                  <c:v>0.0088</c:v>
+                  <c:v>8.8000000000000005E-3</c:v>
                 </c:pt>
                 <c:pt idx="15">
-                  <c:v>0.007</c:v>
+                  <c:v>7.0000000000000001E-3</c:v>
                 </c:pt>
                 <c:pt idx="16">
-                  <c:v>0.0056</c:v>
+                  <c:v>5.5999999999999999E-3</c:v>
                 </c:pt>
                 <c:pt idx="17">
-                  <c:v>0.0045</c:v>
+                  <c:v>4.4999999999999997E-3</c:v>
                 </c:pt>
                 <c:pt idx="18">
-                  <c:v>0.0036</c:v>
+                  <c:v>3.5999999999999999E-3</c:v>
                 </c:pt>
                 <c:pt idx="19">
-                  <c:v>0.0029</c:v>
+                  <c:v>2.8999999999999998E-3</c:v>
                 </c:pt>
               </c:numCache>
             </c:numRef>
           </c:val>
+          <c:extLst>
+            <c:ext xmlns:c16="http://schemas.microsoft.com/office/drawing/2014/chart" uri="{C3380CC4-5D6E-409C-BE32-E72D297353CC}">
+              <c16:uniqueId val="{00000000-90C1-2041-AB97-0B5A2F5D8625}"/>
+            </c:ext>
+          </c:extLst>
         </c:ser>
         <c:dLbls>
-          <c:numFmt formatCode="#,##0" sourceLinked="0"/>
-          <c:txPr>
-            <a:bodyPr/>
-            <a:lstStyle/>
-            <a:p>
-              <a:pPr>
-                <a:defRPr b="0" i="0" strike="noStrike" sz="1200" u="none">
-                  <a:solidFill>
-                    <a:srgbClr val="000000"/>
-                  </a:solidFill>
-                  <a:latin typeface="Arial"/>
-                </a:defRPr>
-              </a:pPr>
-            </a:p>
-          </c:txPr>
           <c:showLegendKey val="0"/>
           <c:showVal val="0"/>
           <c:showCatName val="0"/>
           <c:showSerName val="0"/>
           <c:showPercent val="0"/>
           <c:showBubbleSize val="0"/>
-          <c:showLeaderLines val="0"/>
         </c:dLbls>
         <c:gapWidth val="30"/>
-        <c:overlap val="0"/>
         <c:axId val="2094734554"/>
         <c:axId val="2094734552"/>
-        <c:axId val="2094734556"/>
       </c:barChart>
       <c:catAx>
         <c:axId val="2094734554"/>
@@ -3369,6 +3078,7 @@
         <c:crosses val="autoZero"/>
         <c:auto val="1"/>
         <c:lblAlgn val="ctr"/>
+        <c:lblOffset val="100"/>
         <c:noMultiLvlLbl val="1"/>
       </c:catAx>
       <c:valAx>
@@ -3433,6 +3143,7 @@
     </c:plotArea>
     <c:plotVisOnly val="1"/>
     <c:dispBlanksAs val="span"/>
+    <c:showDLblsOverMax val="1"/>
   </c:chart>
   <c:spPr>
     <a:noFill/>
@@ -3469,234 +3180,10 @@
           <a:chExt cx="0" cy="0"/>
         </a:xfrm>
       </p:grpSpPr>
-      <p:sp>
-        <p:nvSpPr>
-          <p:cNvPr id="2" name="Header Placeholder 1"/>
-          <p:cNvSpPr>
-            <a:spLocks noGrp="1"/>
-          </p:cNvSpPr>
-          <p:nvPr>
-            <p:ph type="hdr" sz="quarter"/>
-          </p:nvPr>
-        </p:nvSpPr>
-        <p:spPr>
-          <a:xfrm>
-            <a:off x="0" y="0"/>
-            <a:ext cx="2971800" cy="458788"/>
-          </a:xfrm>
-          <a:prstGeom prst="rect">
-            <a:avLst/>
-          </a:prstGeom>
-        </p:spPr>
-        <p:txBody>
-          <a:bodyPr vert="horz" lIns="91440" tIns="45720" rIns="91440" bIns="45720" rtlCol="0"/>
-          <a:lstStyle>
-            <a:lvl1pPr algn="l">
-              <a:defRPr sz="1200"/>
-            </a:lvl1pPr>
-          </a:lstStyle>
-          <a:p>
-            <a:endParaRPr lang="en-US"/>
-          </a:p>
-        </p:txBody>
-      </p:sp>
-      <p:sp>
-        <p:nvSpPr>
-          <p:cNvPr id="3" name="Date Placeholder 2"/>
-          <p:cNvSpPr>
-            <a:spLocks noGrp="1"/>
-          </p:cNvSpPr>
-          <p:nvPr>
-            <p:ph type="dt" idx="1"/>
-          </p:nvPr>
-        </p:nvSpPr>
-        <p:spPr>
-          <a:xfrm>
-            <a:off x="3884613" y="0"/>
-            <a:ext cx="2971800" cy="458788"/>
-          </a:xfrm>
-          <a:prstGeom prst="rect">
-            <a:avLst/>
-          </a:prstGeom>
-        </p:spPr>
-        <p:txBody>
-          <a:bodyPr vert="horz" lIns="91440" tIns="45720" rIns="91440" bIns="45720" rtlCol="0"/>
-          <a:lstStyle>
-            <a:lvl1pPr algn="r">
-              <a:defRPr sz="1200"/>
-            </a:lvl1pPr>
-          </a:lstStyle>
-          <a:p>
-            <a:fld id="{5282F153-3F37-0F45-9E97-73ACFA13230C}" type="datetimeFigureOut">
-              <a:rPr lang="en-US"/>
-              <a:t>7/23/19</a:t>
-            </a:fld>
-            <a:endParaRPr lang="en-US"/>
-          </a:p>
-        </p:txBody>
-      </p:sp>
-      <p:sp>
-        <p:nvSpPr>
-          <p:cNvPr id="4" name="Slide Image Placeholder 3"/>
-          <p:cNvSpPr>
-            <a:spLocks noGrp="1" noRot="1" noChangeAspect="1"/>
-          </p:cNvSpPr>
-          <p:nvPr>
-            <p:ph type="sldImg" idx="2"/>
-          </p:nvPr>
-        </p:nvSpPr>
-        <p:spPr>
-          <a:xfrm>
-            <a:off x="685800" y="1143000"/>
-            <a:ext cx="5486400" cy="3086100"/>
-          </a:xfrm>
-          <a:prstGeom prst="rect">
-            <a:avLst/>
-          </a:prstGeom>
-          <a:noFill/>
-          <a:ln w="12700">
-            <a:solidFill>
-              <a:prstClr val="black"/>
-            </a:solidFill>
-          </a:ln>
-        </p:spPr>
-        <p:txBody>
-          <a:bodyPr vert="horz" lIns="91440" tIns="45720" rIns="91440" bIns="45720" rtlCol="0" anchor="ctr"/>
-          <a:lstStyle/>
-          <a:p>
-            <a:endParaRPr lang="en-US"/>
-          </a:p>
-        </p:txBody>
-      </p:sp>
-      <p:sp>
-        <p:nvSpPr>
-          <p:cNvPr id="5" name="Notes Placeholder 4"/>
-          <p:cNvSpPr>
-            <a:spLocks noGrp="1"/>
-          </p:cNvSpPr>
-          <p:nvPr>
-            <p:ph type="body" sz="quarter" idx="3"/>
-          </p:nvPr>
-        </p:nvSpPr>
-        <p:spPr>
-          <a:xfrm>
-            <a:off x="685800" y="4400550"/>
-            <a:ext cx="5486400" cy="3600450"/>
-          </a:xfrm>
-          <a:prstGeom prst="rect">
-            <a:avLst/>
-          </a:prstGeom>
-        </p:spPr>
-        <p:txBody>
-          <a:bodyPr vert="horz" lIns="91440" tIns="45720" rIns="91440" bIns="45720" rtlCol="0"/>
-          <a:lstStyle/>
-          <a:p>
-            <a:pPr lvl="0"/>
-            <a:r>
-              <a:rPr lang="en-US"/>
-              <a:t>Click to edit Master text styles</a:t>
-            </a:r>
-          </a:p>
-          <a:p>
-            <a:pPr lvl="1"/>
-            <a:r>
-              <a:rPr lang="en-US"/>
-              <a:t>Second level</a:t>
-            </a:r>
-          </a:p>
-          <a:p>
-            <a:pPr lvl="2"/>
-            <a:r>
-              <a:rPr lang="en-US"/>
-              <a:t>Third level</a:t>
-            </a:r>
-          </a:p>
-          <a:p>
-            <a:pPr lvl="3"/>
-            <a:r>
-              <a:rPr lang="en-US"/>
-              <a:t>Fourth level</a:t>
-            </a:r>
-          </a:p>
-          <a:p>
-            <a:pPr lvl="4"/>
-            <a:r>
-              <a:rPr lang="en-US"/>
-              <a:t>Fifth level</a:t>
-            </a:r>
-          </a:p>
-        </p:txBody>
-      </p:sp>
-      <p:sp>
-        <p:nvSpPr>
-          <p:cNvPr id="6" name="Footer Placeholder 5"/>
-          <p:cNvSpPr>
-            <a:spLocks noGrp="1"/>
-          </p:cNvSpPr>
-          <p:nvPr>
-            <p:ph type="ftr" sz="quarter" idx="4"/>
-          </p:nvPr>
-        </p:nvSpPr>
-        <p:spPr>
-          <a:xfrm>
-            <a:off x="0" y="8685213"/>
-            <a:ext cx="2971800" cy="458787"/>
-          </a:xfrm>
-          <a:prstGeom prst="rect">
-            <a:avLst/>
-          </a:prstGeom>
-        </p:spPr>
-        <p:txBody>
-          <a:bodyPr vert="horz" lIns="91440" tIns="45720" rIns="91440" bIns="45720" rtlCol="0" anchor="b"/>
-          <a:lstStyle>
-            <a:lvl1pPr algn="l">
-              <a:defRPr sz="1200"/>
-            </a:lvl1pPr>
-          </a:lstStyle>
-          <a:p>
-            <a:endParaRPr lang="en-US"/>
-          </a:p>
-        </p:txBody>
-      </p:sp>
-      <p:sp>
-        <p:nvSpPr>
-          <p:cNvPr id="7" name="Slide Number Placeholder 6"/>
-          <p:cNvSpPr>
-            <a:spLocks noGrp="1"/>
-          </p:cNvSpPr>
-          <p:nvPr>
-            <p:ph type="sldNum" sz="quarter" idx="5"/>
-          </p:nvPr>
-        </p:nvSpPr>
-        <p:spPr>
-          <a:xfrm>
-            <a:off x="3884613" y="8685213"/>
-            <a:ext cx="2971800" cy="458787"/>
-          </a:xfrm>
-          <a:prstGeom prst="rect">
-            <a:avLst/>
-          </a:prstGeom>
-        </p:spPr>
-        <p:txBody>
-          <a:bodyPr vert="horz" lIns="91440" tIns="45720" rIns="91440" bIns="45720" rtlCol="0" anchor="b"/>
-          <a:lstStyle>
-            <a:lvl1pPr algn="r">
-              <a:defRPr sz="1200"/>
-            </a:lvl1pPr>
-          </a:lstStyle>
-          <a:p>
-            <a:fld id="{CE5E9CC1-C706-0F49-92D6-E571CC5EEA8F}" type="slidenum">
-              <a:rPr lang="en-US"/>
-              <a:t>‹#›</a:t>
-            </a:fld>
-            <a:endParaRPr lang="en-US"/>
-          </a:p>
-        </p:txBody>
-      </p:sp>
     </p:spTree>
     <p:extLst>
       <p:ext uri="{BB962C8B-B14F-4D97-AF65-F5344CB8AC3E}">
-        <p14:creationId xmlns:p14="http://schemas.microsoft.com/office/powerpoint/2010/main" val="1024086991"/>
+        <p14:creationId xmlns:p14="http://schemas.microsoft.com/office/powerpoint/2010/main" val="3336565385"/>
       </p:ext>
     </p:extLst>
   </p:cSld>
@@ -3844,7 +3331,6 @@
               <a:rPr lang="en-US" dirty="0"/>
               <a:t>Bienvenida (3 min). Presentarse: 8+ años en ML aplicado a riesgo de crédito, fraude y AML. Prometer algo concreto: hoy verán cuatro casos reales donde alguien tomó (o evitó) una decisión de millones por entender o no entender lo que veremos. Pedir que abran Colab ANTES de empezar.</a:t>
             </a:r>
-            <a:endParaRPr lang="en-US" dirty="0"/>
           </a:p>
         </p:txBody>
       </p:sp>
@@ -3932,7 +3418,6 @@
               <a:rPr lang="en-US" dirty="0"/>
               <a:t>4 min. Caso propio de scoring: reportar el ingreso medio de la cartera sobreestima la capacidad de pago del cliente mediano y subestima el riesgo. Preguntar qué usarían para fijar un límite de crédito. En el notebook van a inyectar un outlier y medir cuánto se mueve cada estadístico. Lectura: Bruce &amp; Gedeck cap. 1 (estimaciones robustas de localización).</a:t>
             </a:r>
-            <a:endParaRPr lang="en-US" dirty="0"/>
           </a:p>
         </p:txBody>
       </p:sp>
@@ -4020,7 +3505,6 @@
               <a:rPr lang="en-US" dirty="0"/>
               <a:t>3 min. Repetir: la varianza no se reporta, se opera — es aditiva en variables independientes, y eso lo explotamos en el TLC (clase 4). El CV es el que más usan en negocio sin saber su nombre.</a:t>
             </a:r>
-            <a:endParaRPr lang="en-US" dirty="0"/>
           </a:p>
         </p:txBody>
       </p:sp>
@@ -4108,7 +3592,6 @@
               <a:rPr lang="en-US" dirty="0"/>
               <a:t>6 min. Concepto más abstracto de la clase; ir despacio. Pedirles definir X para '¿cuántos días tarda un cliente en pagar?'. Aclarar una vez el abuso de notación P(X=2) = P({ω : X(ω)=2}) y seguir. El último bullet es el puente con ML. Lectura: Blitzstein &amp; Hwang cap. 3; Wasserman cap. 2.</a:t>
             </a:r>
-            <a:endParaRPr lang="en-US" dirty="0"/>
           </a:p>
         </p:txBody>
       </p:sp>
@@ -4196,7 +3679,6 @@
               <a:rPr lang="en-US" dirty="0"/>
               <a:t>4 min. Trampa clásica: 'el monto en soles es discreto porque hay céntimos'. Técnicamente sí, se modela como continua. Criterio práctico: si el número de valores posibles es enorme respecto a n, modela continua. Hoy solo discretas; continuas es la clase 2.</a:t>
             </a:r>
-            <a:endParaRPr lang="en-US" dirty="0"/>
           </a:p>
         </p:txBody>
       </p:sp>
@@ -4284,7 +3766,6 @@
               <a:rPr lang="en-US" dirty="0"/>
               <a:t>5 min. Pregunta guiada: con la PMF de la izquierda, ¿cómo calculo P(X ≥ 8)? Respuesta: 1 − CDF(7), NO 1 − CDF(8). El error de ±1 en discretas es la fuente de bugs número uno; lo van a chocar en el notebook. sf() en scipy es exactamente 1 − cdf().</a:t>
             </a:r>
-            <a:endParaRPr lang="en-US" dirty="0"/>
           </a:p>
         </p:txBody>
       </p:sp>
@@ -4372,7 +3853,6 @@
               <a:rPr lang="en-US" dirty="0"/>
               <a:t>4 min. Punto fuerte: la varianza p(1−p) es máxima en p=0.5 y colapsa en los extremos. Consecuencia práctica: estimar una conversión del 1% exige muchísima más muestra que estimar una del 50%. Lo demuestran numéricamente en el notebook y lo formalizamos en la clase 12. Lectura: Blitzstein cap. 3; Casella &amp; Berger cap. 3.</a:t>
             </a:r>
-            <a:endParaRPr lang="en-US" dirty="0"/>
           </a:p>
         </p:txBody>
       </p:sp>
@@ -4460,7 +3940,6 @@
               <a:rPr lang="en-US" dirty="0"/>
               <a:t>4 min. Los tres supuestos que se rompen en la vida real: (1) n fijo, (2) p constante, (3) independencia. Preguntar dónde se rompen: p cambia por día de la semana y por campaña; las visitas no son independientes si un mismo usuario entra cinco veces. Cerrar conectando con el caso USAF: allí también el problema fue multiplicar probabilidades independientes.</a:t>
             </a:r>
-            <a:endParaRPr lang="en-US" dirty="0"/>
           </a:p>
         </p:txBody>
       </p:sp>
@@ -4548,7 +4027,6 @@
               <a:rPr lang="en-US" dirty="0"/>
               <a:t>4 min. Cuidado con un matiz que casi nadie menciona: los cuerpos de caballería NO eran homogéneos entre sí (distinto tamaño y organización), y aun así el ajuste Poisson funciona. Eso es lo notable. Bortkiewicz llamó a esto 'la ley de los números pequeños'. Estos son los datos reales que ajustan en el notebook.</a:t>
             </a:r>
-            <a:endParaRPr lang="en-US" dirty="0"/>
           </a:p>
         </p:txBody>
       </p:sp>
@@ -4636,7 +4114,6 @@
               <a:rPr lang="en-US" dirty="0"/>
               <a:t>4 min. La firma de Poisson es E[X] = Var(X) = λ. Si en los datos reales la varianza supera con holgura a la media hay SOBREDISPERSIÓN y Poisson es el modelo equivocado (se usa Binomial Negativa). Lo verifican en el notebook con dos operaciones de call center de media casi idéntica. Lectura: Bruce &amp; Gedeck cap. 2 (Poisson y distribuciones relacionadas).</a:t>
             </a:r>
-            <a:endParaRPr lang="en-US" dirty="0"/>
           </a:p>
         </p:txBody>
       </p:sp>
@@ -4724,7 +4201,6 @@
               <a:rPr lang="en-US" dirty="0"/>
               <a:t>4 min. El caso más potente para tomadores de decisión. Antes de mostrar el gráfico, preguntar: '¿ustedes qué esperarían ver si las bombas cayeran al azar — un patrón uniforme o racimos?'. Casi todos dicen uniforme. El azar produce racimos, y eso es contraintuitivo. Aplicación directa: antes de explicar un pico en un dashboard, pregúntate si el azar solo ya lo produciría.</a:t>
             </a:r>
-            <a:endParaRPr lang="en-US" dirty="0"/>
           </a:p>
         </p:txBody>
       </p:sp>
@@ -4812,7 +4288,6 @@
               <a:rPr lang="en-US" dirty="0"/>
               <a:t>2 min. Marcar la progresión. Insistir en que la clase 1 (distribuciones) reaparece en la clase 12 (tamaño de muestra) — no es contenido desechable.</a:t>
             </a:r>
-            <a:endParaRPr lang="en-US" dirty="0"/>
           </a:p>
         </p:txBody>
       </p:sp>
@@ -4900,7 +4375,6 @@
               <a:rPr lang="en-US" dirty="0"/>
               <a:t>3 min. La falta de memoria es contraintuitiva y vale detenerse: si llevas 10 correos sin respuesta, la probabilidad de que el 11º funcione sigue siendo p. Preguntar si eso es realista en marketing — normalmente no lo es (el destinatario ya te clasificó como spam), y ahí se ve el límite del modelo. Cuidado con la convención: scipy usa geom con soporte desde 1; hay libros que la definen desde 0.</a:t>
             </a:r>
-            <a:endParaRPr lang="en-US" dirty="0"/>
           </a:p>
         </p:txBody>
       </p:sp>
@@ -4988,7 +4462,6 @@
               <a:rPr lang="en-US" dirty="0"/>
               <a:t>3 min. Slide de consolidación: pedirles tapar E[X] y Var(X) y reconstruirlas. Es la slide que deben fotografiar. Truco de examen: si te dan la analogía, deduces la distribución.</a:t>
             </a:r>
-            <a:endParaRPr lang="en-US" dirty="0"/>
           </a:p>
         </p:txBody>
       </p:sp>
@@ -5076,7 +4549,6 @@
               <a:rPr lang="en-US" dirty="0"/>
               <a:t>3 min. Ejercicio rápido en voz alta con tres casos: (a) número de clics de un banner en un día, (b) si un cliente abandona el carrito, (c) cuántas llamadas hasta agendar una demo. Que respondan ellos, no tú.</a:t>
             </a:r>
-            <a:endParaRPr lang="en-US" dirty="0"/>
           </a:p>
         </p:txBody>
       </p:sp>
@@ -5164,7 +4636,6 @@
               <a:rPr lang="en-US" dirty="0"/>
               <a:t>3 min. Cierre motivacional del bloque teórico. Conectar hacia adelante: en la clase 12 van a calcular exactamente cuánto tráfico habría necesitado Bing para detectar ese 12%, y les va a sorprender lo poco que es cuando el efecto es grande — y lo brutal que se vuelve cuando el efecto es del 0.5%.</a:t>
             </a:r>
-            <a:endParaRPr lang="en-US" dirty="0"/>
           </a:p>
         </p:txBody>
       </p:sp>
@@ -5252,7 +4723,6 @@
               <a:rPr lang="en-US" dirty="0"/>
               <a:t>1 min. Compartir el enlace del Colab por el chat. Verificar que TODOS ejecutaron la celda 01 antes de avanzar. El bloque 06 con datos históricos reales es el que más engancha: son los mismos números de 1898 y 1946 de las slides.</a:t>
             </a:r>
-            <a:endParaRPr lang="en-US" dirty="0"/>
           </a:p>
         </p:txBody>
       </p:sp>
@@ -5340,7 +4810,6 @@
               <a:rPr lang="en-US" dirty="0"/>
               <a:t>2 min. Insistir: leer el capítulo correcto, no el libro. Y mencionar que los cuatro casos reales de hoy son citables — están en las notas de cada slide con su referencia completa, para quien quiera ir a la fuente.</a:t>
             </a:r>
-            <a:endParaRPr lang="en-US" dirty="0"/>
           </a:p>
         </p:txBody>
       </p:sp>
@@ -5428,7 +4897,6 @@
               <a:rPr lang="en-US" dirty="0"/>
               <a:t>3 min. No cerrar sin que alguien diga en voz alta las tres ideas. Truco: pedirles la ANALOGÍA en lugar de la definición — si recuerdan el río, el marcador y las bombas, la teoría la reconstruyen. El reto es corto a propósito: se corrige en 2 minutos al inicio de la clase 2 y sirve de diagnóstico.</a:t>
             </a:r>
-            <a:endParaRPr lang="en-US" dirty="0"/>
           </a:p>
         </p:txBody>
       </p:sp>
@@ -5516,7 +4984,6 @@
               <a:rPr lang="en-US" dirty="0"/>
               <a:t>2 min. Aquí se fija el contrato de la clase. Pedir explícitamente que interrumpan durante la teoría.</a:t>
             </a:r>
-            <a:endParaRPr lang="en-US" dirty="0"/>
           </a:p>
         </p:txBody>
       </p:sp>
@@ -5604,7 +5071,6 @@
               <a:rPr lang="en-US" dirty="0"/>
               <a:t>2 min. Decir en voz alta: si solo van a comprar uno, que sea Bruce/Gedeck (práctico, con código). Si quieren entender de verdad las distribuciones, Blitzstein, y su curso Stat 110 está gratis en YouTube y edX. Wasserman es la referencia de escritorio, no de lectura lineal.</a:t>
             </a:r>
-            <a:endParaRPr lang="en-US" dirty="0"/>
           </a:p>
         </p:txBody>
       </p:sp>
@@ -5692,7 +5158,6 @@
               <a:rPr lang="en-US" dirty="0"/>
               <a:t>1 min. Leer rápido. Los cuatro casos reales son el ancla de memoria: si al final recuerdan los casos, van a poder reconstruir la teoría.</a:t>
             </a:r>
-            <a:endParaRPr lang="en-US" dirty="0"/>
           </a:p>
         </p:txBody>
       </p:sp>
@@ -5780,7 +5245,6 @@
               <a:rPr lang="en-US" dirty="0"/>
               <a:t>5 min. Gancho de todo el curso. Preguntar: '¿cómo responderían HOY si el jefe de producto pregunta si el rediseño funcionó?' Recoger 2-3 respuestas. Nadie podrá cuantificar el azar todavía — eso es lo que van a aprender. Volver a esta slide en la clase 7.</a:t>
             </a:r>
-            <a:endParaRPr lang="en-US" dirty="0"/>
           </a:p>
         </p:txBody>
       </p:sp>
@@ -5868,7 +5332,6 @@
               <a:rPr lang="en-US" dirty="0"/>
               <a:t>4 min. Insistir: el parámetro es fijo y desconocido; lo aleatorio es la muestra. Esa variabilidad del estadístico es la 'distribución muestral' — la vemos en la clase 4 con el TLC. Con la analogía, preguntar: ¿cuál sería el 'dedo lastimado' en una encuesta de satisfacción? Respuesta típica: encuestar solo a quienes ya respondieron el mail (sesgo de autoselección). Lectura: Wasserman cap. 6; Bruce &amp; Gedeck cap. 2.</a:t>
             </a:r>
-            <a:endParaRPr lang="en-US" dirty="0"/>
           </a:p>
         </p:txBody>
       </p:sp>
@@ -5956,7 +5419,6 @@
               <a:rPr lang="en-US" dirty="0"/>
               <a:t>3 min. Slide de referencia. Mencionar que en el notebook los nombres de variables siguen esta tabla a propósito (p_hat, x_bar).</a:t>
             </a:r>
-            <a:endParaRPr lang="en-US" dirty="0"/>
           </a:p>
         </p:txBody>
       </p:sp>
@@ -6044,7 +5506,6 @@
               <a:rPr lang="en-US" dirty="0"/>
               <a:t>4 min. El caso favorito de la clase: úsenlo cuando alguien pida 'el perfil del cliente promedio'. Pregunta a la sala antes de mostrar el 0: '¿cuántos de 4,063 creen que entraron en el promedio de las 10 dimensiones?'. Siempre dicen 'pocos', nunca 'ninguno'. La razón profunda es que la probabilidad de estar en la banda central de 10 dimensiones simultáneamente es el producto de 10 probabilidades — y ese producto colapsa. Eso es independencia, y volvemos a ello con la Binomial.</a:t>
             </a:r>
-            <a:endParaRPr lang="en-US" dirty="0"/>
           </a:p>
         </p:txBody>
       </p:sp>
@@ -6117,6 +5578,11 @@
 <file path=ppt/slideMasters/slideMaster1.xml><?xml version="1.0" encoding="utf-8"?>
 <p:sldMaster xmlns:a="http://schemas.openxmlformats.org/drawingml/2006/main" xmlns:r="http://schemas.openxmlformats.org/officeDocument/2006/relationships" xmlns:p="http://schemas.openxmlformats.org/presentationml/2006/main">
   <p:cSld>
+    <p:bg>
+      <p:bgRef idx="1001">
+        <a:schemeClr val="bg1"/>
+      </p:bgRef>
+    </p:bg>
     <p:spTree>
       <p:nvGrpSpPr>
         <p:cNvPr id="1" name=""/>
@@ -6399,6 +5865,7 @@
         <a:solidFill>
           <a:srgbClr val="0A2559"/>
         </a:solidFill>
+        <a:effectLst/>
       </p:bgPr>
     </p:bg>
     <p:spTree>
@@ -6521,11 +5988,11 @@
           <a:bodyPr wrap="square" lIns="0" tIns="0" rIns="0" bIns="0" rtlCol="0" anchor="ctr"/>
           <a:lstStyle/>
           <a:p>
-            <a:pPr algn="ctr" indent="0" marL="0">
-              <a:buNone/>
-            </a:pPr>
-            <a:r>
-              <a:rPr lang="en-US" sz="1150" b="1" spc="120" kern="0" dirty="0">
+            <a:pPr marL="0" indent="0" algn="ctr">
+              <a:buNone/>
+            </a:pPr>
+            <a:r>
+              <a:rPr lang="en-US" sz="1150" b="1" kern="0" spc="120" dirty="0">
                 <a:solidFill>
                   <a:srgbClr val="FFFFFF"/>
                 </a:solidFill>
@@ -6560,7 +6027,7 @@
           <a:bodyPr wrap="square" lIns="0" tIns="0" rIns="0" bIns="0" rtlCol="0" anchor="ctr"/>
           <a:lstStyle/>
           <a:p>
-            <a:pPr indent="0" marL="0">
+            <a:pPr marL="0" indent="0">
               <a:lnSpc>
                 <a:spcPts val="5000"/>
               </a:lnSpc>
@@ -6580,7 +6047,7 @@
             <a:endParaRPr lang="en-US" sz="4600" dirty="0"/>
           </a:p>
           <a:p>
-            <a:pPr indent="0" marL="0">
+            <a:pPr marL="0" indent="0">
               <a:lnSpc>
                 <a:spcPts val="5000"/>
               </a:lnSpc>
@@ -6622,7 +6089,7 @@
           <a:bodyPr wrap="square" lIns="0" tIns="0" rIns="0" bIns="0" rtlCol="0" anchor="ctr"/>
           <a:lstStyle/>
           <a:p>
-            <a:pPr indent="0" marL="0">
+            <a:pPr marL="0" indent="0">
               <a:buNone/>
             </a:pPr>
             <a:r>
@@ -6684,7 +6151,7 @@
           <a:bodyPr wrap="square" lIns="0" tIns="0" rIns="0" bIns="0" rtlCol="0" anchor="ctr"/>
           <a:lstStyle/>
           <a:p>
-            <a:pPr indent="0" marL="0">
+            <a:pPr marL="0" indent="0">
               <a:buNone/>
             </a:pPr>
             <a:r>
@@ -6723,7 +6190,7 @@
           <a:bodyPr wrap="square" lIns="0" tIns="0" rIns="0" bIns="0" rtlCol="0" anchor="ctr"/>
           <a:lstStyle/>
           <a:p>
-            <a:pPr indent="0" marL="0">
+            <a:pPr marL="0" indent="0">
               <a:buNone/>
             </a:pPr>
             <a:r>
@@ -6757,6 +6224,7 @@
         <a:solidFill>
           <a:srgbClr val="F5F7FB"/>
         </a:solidFill>
+        <a:effectLst/>
       </p:bgPr>
     </p:bg>
     <p:spTree>
@@ -6794,7 +6262,7 @@
           <a:bodyPr wrap="square" lIns="0" tIns="0" rIns="0" bIns="0" rtlCol="0" anchor="ctr"/>
           <a:lstStyle/>
           <a:p>
-            <a:pPr indent="0" marL="0">
+            <a:pPr marL="0" indent="0">
               <a:buNone/>
             </a:pPr>
             <a:r>
@@ -6833,7 +6301,7 @@
           <a:bodyPr wrap="square" lIns="0" tIns="0" rIns="0" bIns="0" rtlCol="0" anchor="ctr"/>
           <a:lstStyle/>
           <a:p>
-            <a:pPr indent="0" marL="0">
+            <a:pPr marL="0" indent="0">
               <a:buNone/>
             </a:pPr>
             <a:r>
@@ -6853,7 +6321,7 @@
       </p:sp>
       <p:graphicFrame>
         <p:nvGraphicFramePr>
-          <p:cNvPr id="4" name="Chart 0" descr=""/>
+          <p:cNvPr id="4" name="Chart 0"/>
           <p:cNvGraphicFramePr/>
           <p:nvPr/>
         </p:nvGraphicFramePr>
@@ -6861,9 +6329,9 @@
           <a:off x="548640" y="1920240"/>
           <a:ext cx="6035040" cy="3017520"/>
         </p:xfrm>
-        <a:graphic xmlns:a="http://schemas.openxmlformats.org/drawingml/2006/main">
+        <a:graphic>
           <a:graphicData uri="http://schemas.openxmlformats.org/drawingml/2006/chart">
-            <c:chart xmlns:c="http://schemas.openxmlformats.org/drawingml/2006/chart" r:id="rId1"/>
+            <c:chart xmlns:c="http://schemas.openxmlformats.org/drawingml/2006/chart" xmlns:r="http://schemas.openxmlformats.org/officeDocument/2006/relationships" r:id="rId3"/>
           </a:graphicData>
         </a:graphic>
       </p:graphicFrame>
@@ -6915,11 +6383,11 @@
           <a:bodyPr wrap="square" lIns="0" tIns="0" rIns="0" bIns="0" rtlCol="0" anchor="ctr"/>
           <a:lstStyle/>
           <a:p>
-            <a:pPr indent="0" marL="0">
-              <a:buNone/>
-            </a:pPr>
-            <a:r>
-              <a:rPr lang="en-US" sz="1000" b="1" spc="120" kern="0" dirty="0">
+            <a:pPr marL="0" indent="0">
+              <a:buNone/>
+            </a:pPr>
+            <a:r>
+              <a:rPr lang="en-US" sz="1000" b="1" kern="0" spc="120" dirty="0">
                 <a:solidFill>
                   <a:srgbClr val="5B6B87"/>
                 </a:solidFill>
@@ -6954,7 +6422,7 @@
           <a:bodyPr wrap="square" lIns="0" tIns="0" rIns="0" bIns="0" rtlCol="0" anchor="ctr"/>
           <a:lstStyle/>
           <a:p>
-            <a:pPr indent="0" marL="0">
+            <a:pPr marL="0" indent="0">
               <a:buNone/>
             </a:pPr>
             <a:r>
@@ -6993,7 +6461,7 @@
           <a:bodyPr wrap="square" lIns="0" tIns="0" rIns="0" bIns="0" rtlCol="0" anchor="ctr"/>
           <a:lstStyle/>
           <a:p>
-            <a:pPr indent="0" marL="0">
+            <a:pPr marL="0" indent="0">
               <a:buNone/>
             </a:pPr>
             <a:r>
@@ -7059,11 +6527,11 @@
           <a:bodyPr wrap="square" lIns="0" tIns="0" rIns="0" bIns="0" rtlCol="0" anchor="ctr"/>
           <a:lstStyle/>
           <a:p>
-            <a:pPr indent="0" marL="0">
-              <a:buNone/>
-            </a:pPr>
-            <a:r>
-              <a:rPr lang="en-US" sz="1000" b="1" spc="120" kern="0" dirty="0">
+            <a:pPr marL="0" indent="0">
+              <a:buNone/>
+            </a:pPr>
+            <a:r>
+              <a:rPr lang="en-US" sz="1000" b="1" kern="0" spc="120" dirty="0">
                 <a:solidFill>
                   <a:srgbClr val="5B6B87"/>
                 </a:solidFill>
@@ -7098,7 +6566,7 @@
           <a:bodyPr wrap="square" lIns="0" tIns="0" rIns="0" bIns="0" rtlCol="0" anchor="ctr"/>
           <a:lstStyle/>
           <a:p>
-            <a:pPr indent="0" marL="0">
+            <a:pPr marL="0" indent="0">
               <a:buNone/>
             </a:pPr>
             <a:r>
@@ -7137,7 +6605,7 @@
           <a:bodyPr wrap="square" lIns="0" tIns="0" rIns="0" bIns="0" rtlCol="0" anchor="ctr"/>
           <a:lstStyle/>
           <a:p>
-            <a:pPr indent="0" marL="0">
+            <a:pPr marL="0" indent="0">
               <a:buNone/>
             </a:pPr>
             <a:r>
@@ -7203,11 +6671,11 @@
           <a:bodyPr wrap="square" lIns="0" tIns="0" rIns="0" bIns="0" rtlCol="0" anchor="ctr"/>
           <a:lstStyle/>
           <a:p>
-            <a:pPr indent="0" marL="0">
-              <a:buNone/>
-            </a:pPr>
-            <a:r>
-              <a:rPr lang="en-US" sz="1000" b="1" spc="120" kern="0" dirty="0">
+            <a:pPr marL="0" indent="0">
+              <a:buNone/>
+            </a:pPr>
+            <a:r>
+              <a:rPr lang="en-US" sz="1000" b="1" kern="0" spc="120" dirty="0">
                 <a:solidFill>
                   <a:srgbClr val="5B6B87"/>
                 </a:solidFill>
@@ -7242,7 +6710,7 @@
           <a:bodyPr wrap="square" lIns="0" tIns="0" rIns="0" bIns="0" rtlCol="0" anchor="ctr"/>
           <a:lstStyle/>
           <a:p>
-            <a:pPr indent="0" marL="0">
+            <a:pPr marL="0" indent="0">
               <a:buNone/>
             </a:pPr>
             <a:r>
@@ -7281,7 +6749,7 @@
           <a:bodyPr wrap="square" lIns="0" tIns="0" rIns="0" bIns="0" rtlCol="0" anchor="ctr"/>
           <a:lstStyle/>
           <a:p>
-            <a:pPr indent="0" marL="0">
+            <a:pPr marL="0" indent="0">
               <a:buNone/>
             </a:pPr>
             <a:r>
@@ -7374,14 +6842,14 @@
           <a:bodyPr wrap="square" lIns="0" tIns="0" rIns="0" bIns="0" rtlCol="0" anchor="ctr"/>
           <a:lstStyle/>
           <a:p>
-            <a:pPr indent="0" marL="0">
+            <a:pPr marL="0" indent="0">
               <a:lnSpc>
                 <a:spcPts val="1725"/>
               </a:lnSpc>
               <a:buNone/>
             </a:pPr>
             <a:r>
-              <a:rPr lang="en-US" sz="1000" b="1" spc="130" kern="0" dirty="0">
+              <a:rPr lang="en-US" sz="1000" b="1" kern="0" spc="130" dirty="0">
                 <a:solidFill>
                   <a:srgbClr val="E6115E"/>
                 </a:solidFill>
@@ -7391,12 +6859,6 @@
               </a:rPr>
               <a:t>ANALOGÍA   </a:t>
             </a:r>
-            <a:pPr indent="0" marL="0">
-              <a:lnSpc>
-                <a:spcPts val="1725"/>
-              </a:lnSpc>
-              <a:buNone/>
-            </a:pPr>
             <a:r>
               <a:rPr lang="en-US" sz="1250" dirty="0">
                 <a:solidFill>
@@ -7433,7 +6895,7 @@
           <a:bodyPr wrap="square" lIns="0" tIns="0" rIns="0" bIns="0" rtlCol="0" anchor="ctr"/>
           <a:lstStyle/>
           <a:p>
-            <a:pPr indent="0" marL="0">
+            <a:pPr marL="0" indent="0">
               <a:buNone/>
             </a:pPr>
             <a:r>
@@ -7472,7 +6934,7 @@
           <a:bodyPr wrap="square" lIns="0" tIns="0" rIns="0" bIns="0" rtlCol="0" anchor="ctr"/>
           <a:lstStyle/>
           <a:p>
-            <a:pPr algn="r" indent="0" marL="0">
+            <a:pPr marL="0" indent="0" algn="r">
               <a:buNone/>
             </a:pPr>
             <a:r>
@@ -7506,6 +6968,7 @@
         <a:solidFill>
           <a:srgbClr val="F5F7FB"/>
         </a:solidFill>
+        <a:effectLst/>
       </p:bgPr>
     </p:bg>
     <p:spTree>
@@ -7543,7 +7006,7 @@
           <a:bodyPr wrap="square" lIns="0" tIns="0" rIns="0" bIns="0" rtlCol="0" anchor="ctr"/>
           <a:lstStyle/>
           <a:p>
-            <a:pPr indent="0" marL="0">
+            <a:pPr marL="0" indent="0">
               <a:buNone/>
             </a:pPr>
             <a:r>
@@ -7582,7 +7045,7 @@
           <a:bodyPr wrap="square" lIns="0" tIns="0" rIns="0" bIns="0" rtlCol="0" anchor="ctr"/>
           <a:lstStyle/>
           <a:p>
-            <a:pPr indent="0" marL="0">
+            <a:pPr marL="0" indent="0">
               <a:buNone/>
             </a:pPr>
             <a:r>
@@ -7673,7 +7136,7 @@
           <a:bodyPr wrap="square" lIns="0" tIns="0" rIns="0" bIns="0" rtlCol="0" anchor="ctr"/>
           <a:lstStyle/>
           <a:p>
-            <a:pPr algn="ctr" indent="0" marL="0">
+            <a:pPr marL="0" indent="0" algn="ctr">
               <a:buNone/>
             </a:pPr>
             <a:r>
@@ -7712,7 +7175,7 @@
           <a:bodyPr wrap="square" lIns="0" tIns="0" rIns="0" bIns="0" rtlCol="0" anchor="ctr"/>
           <a:lstStyle/>
           <a:p>
-            <a:pPr indent="0" marL="0">
+            <a:pPr marL="0" indent="0">
               <a:buNone/>
             </a:pPr>
             <a:r>
@@ -7751,7 +7214,7 @@
           <a:bodyPr wrap="square" lIns="0" tIns="0" rIns="0" bIns="0" rtlCol="0" anchor="ctr"/>
           <a:lstStyle/>
           <a:p>
-            <a:pPr indent="0" marL="0">
+            <a:pPr marL="0" indent="0">
               <a:buNone/>
             </a:pPr>
             <a:r>
@@ -7790,7 +7253,7 @@
           <a:bodyPr wrap="square" lIns="0" tIns="0" rIns="0" bIns="0" rtlCol="0" anchor="ctr"/>
           <a:lstStyle/>
           <a:p>
-            <a:pPr indent="0" marL="0">
+            <a:pPr marL="0" indent="0">
               <a:lnSpc>
                 <a:spcPts val="1600"/>
               </a:lnSpc>
@@ -7884,7 +7347,7 @@
           <a:bodyPr wrap="square" lIns="0" tIns="0" rIns="0" bIns="0" rtlCol="0" anchor="ctr"/>
           <a:lstStyle/>
           <a:p>
-            <a:pPr algn="ctr" indent="0" marL="0">
+            <a:pPr marL="0" indent="0" algn="ctr">
               <a:buNone/>
             </a:pPr>
             <a:r>
@@ -7923,7 +7386,7 @@
           <a:bodyPr wrap="square" lIns="0" tIns="0" rIns="0" bIns="0" rtlCol="0" anchor="ctr"/>
           <a:lstStyle/>
           <a:p>
-            <a:pPr indent="0" marL="0">
+            <a:pPr marL="0" indent="0">
               <a:buNone/>
             </a:pPr>
             <a:r>
@@ -7962,7 +7425,7 @@
           <a:bodyPr wrap="square" lIns="0" tIns="0" rIns="0" bIns="0" rtlCol="0" anchor="ctr"/>
           <a:lstStyle/>
           <a:p>
-            <a:pPr indent="0" marL="0">
+            <a:pPr marL="0" indent="0">
               <a:buNone/>
             </a:pPr>
             <a:r>
@@ -8001,7 +7464,7 @@
           <a:bodyPr wrap="square" lIns="0" tIns="0" rIns="0" bIns="0" rtlCol="0" anchor="ctr"/>
           <a:lstStyle/>
           <a:p>
-            <a:pPr indent="0" marL="0">
+            <a:pPr marL="0" indent="0">
               <a:lnSpc>
                 <a:spcPts val="1600"/>
               </a:lnSpc>
@@ -8095,7 +7558,7 @@
           <a:bodyPr wrap="square" lIns="0" tIns="0" rIns="0" bIns="0" rtlCol="0" anchor="ctr"/>
           <a:lstStyle/>
           <a:p>
-            <a:pPr algn="ctr" indent="0" marL="0">
+            <a:pPr marL="0" indent="0" algn="ctr">
               <a:buNone/>
             </a:pPr>
             <a:r>
@@ -8134,7 +7597,7 @@
           <a:bodyPr wrap="square" lIns="0" tIns="0" rIns="0" bIns="0" rtlCol="0" anchor="ctr"/>
           <a:lstStyle/>
           <a:p>
-            <a:pPr indent="0" marL="0">
+            <a:pPr marL="0" indent="0">
               <a:buNone/>
             </a:pPr>
             <a:r>
@@ -8173,7 +7636,7 @@
           <a:bodyPr wrap="square" lIns="0" tIns="0" rIns="0" bIns="0" rtlCol="0" anchor="ctr"/>
           <a:lstStyle/>
           <a:p>
-            <a:pPr indent="0" marL="0">
+            <a:pPr marL="0" indent="0">
               <a:buNone/>
             </a:pPr>
             <a:r>
@@ -8212,7 +7675,7 @@
           <a:bodyPr wrap="square" lIns="0" tIns="0" rIns="0" bIns="0" rtlCol="0" anchor="ctr"/>
           <a:lstStyle/>
           <a:p>
-            <a:pPr indent="0" marL="0">
+            <a:pPr marL="0" indent="0">
               <a:lnSpc>
                 <a:spcPts val="1600"/>
               </a:lnSpc>
@@ -8306,7 +7769,7 @@
           <a:bodyPr wrap="square" lIns="0" tIns="0" rIns="0" bIns="0" rtlCol="0" anchor="ctr"/>
           <a:lstStyle/>
           <a:p>
-            <a:pPr algn="ctr" indent="0" marL="0">
+            <a:pPr marL="0" indent="0" algn="ctr">
               <a:buNone/>
             </a:pPr>
             <a:r>
@@ -8345,7 +7808,7 @@
           <a:bodyPr wrap="square" lIns="0" tIns="0" rIns="0" bIns="0" rtlCol="0" anchor="ctr"/>
           <a:lstStyle/>
           <a:p>
-            <a:pPr indent="0" marL="0">
+            <a:pPr marL="0" indent="0">
               <a:buNone/>
             </a:pPr>
             <a:r>
@@ -8384,7 +7847,7 @@
           <a:bodyPr wrap="square" lIns="0" tIns="0" rIns="0" bIns="0" rtlCol="0" anchor="ctr"/>
           <a:lstStyle/>
           <a:p>
-            <a:pPr indent="0" marL="0">
+            <a:pPr marL="0" indent="0">
               <a:buNone/>
             </a:pPr>
             <a:r>
@@ -8423,7 +7886,7 @@
           <a:bodyPr wrap="square" lIns="0" tIns="0" rIns="0" bIns="0" rtlCol="0" anchor="ctr"/>
           <a:lstStyle/>
           <a:p>
-            <a:pPr indent="0" marL="0">
+            <a:pPr marL="0" indent="0">
               <a:lnSpc>
                 <a:spcPts val="1600"/>
               </a:lnSpc>
@@ -8519,14 +7982,14 @@
           <a:bodyPr wrap="square" lIns="0" tIns="0" rIns="0" bIns="0" rtlCol="0" anchor="ctr"/>
           <a:lstStyle/>
           <a:p>
-            <a:pPr indent="0" marL="0">
+            <a:pPr marL="0" indent="0">
               <a:lnSpc>
                 <a:spcPts val="1725"/>
               </a:lnSpc>
               <a:buNone/>
             </a:pPr>
             <a:r>
-              <a:rPr lang="en-US" sz="1000" b="1" spc="130" kern="0" dirty="0">
+              <a:rPr lang="en-US" sz="1000" b="1" kern="0" spc="130" dirty="0">
                 <a:solidFill>
                   <a:srgbClr val="E6115E"/>
                 </a:solidFill>
@@ -8536,12 +7999,6 @@
               </a:rPr>
               <a:t>ANALOGÍA   </a:t>
             </a:r>
-            <a:pPr indent="0" marL="0">
-              <a:lnSpc>
-                <a:spcPts val="1725"/>
-              </a:lnSpc>
-              <a:buNone/>
-            </a:pPr>
             <a:r>
               <a:rPr lang="en-US" sz="1250" dirty="0">
                 <a:solidFill>
@@ -8578,7 +8035,7 @@
           <a:bodyPr wrap="square" lIns="0" tIns="0" rIns="0" bIns="0" rtlCol="0" anchor="ctr"/>
           <a:lstStyle/>
           <a:p>
-            <a:pPr indent="0" marL="0">
+            <a:pPr marL="0" indent="0">
               <a:buNone/>
             </a:pPr>
             <a:r>
@@ -8617,7 +8074,7 @@
           <a:bodyPr wrap="square" lIns="0" tIns="0" rIns="0" bIns="0" rtlCol="0" anchor="ctr"/>
           <a:lstStyle/>
           <a:p>
-            <a:pPr algn="r" indent="0" marL="0">
+            <a:pPr marL="0" indent="0" algn="r">
               <a:buNone/>
             </a:pPr>
             <a:r>
@@ -8651,6 +8108,7 @@
         <a:solidFill>
           <a:srgbClr val="F5F7FB"/>
         </a:solidFill>
+        <a:effectLst/>
       </p:bgPr>
     </p:bg>
     <p:spTree>
@@ -8688,7 +8146,7 @@
           <a:bodyPr wrap="square" lIns="0" tIns="0" rIns="0" bIns="0" rtlCol="0" anchor="ctr"/>
           <a:lstStyle/>
           <a:p>
-            <a:pPr indent="0" marL="0">
+            <a:pPr marL="0" indent="0">
               <a:buNone/>
             </a:pPr>
             <a:r>
@@ -8727,7 +8185,7 @@
           <a:bodyPr wrap="square" lIns="0" tIns="0" rIns="0" bIns="0" rtlCol="0" anchor="ctr"/>
           <a:lstStyle/>
           <a:p>
-            <a:pPr indent="0" marL="0">
+            <a:pPr marL="0" indent="0">
               <a:buNone/>
             </a:pPr>
             <a:r>
@@ -8793,7 +8251,7 @@
           <a:bodyPr wrap="square" lIns="0" tIns="0" rIns="0" bIns="0" rtlCol="0" anchor="ctr"/>
           <a:lstStyle/>
           <a:p>
-            <a:pPr indent="0" marL="0">
+            <a:pPr marL="0" indent="0">
               <a:buNone/>
             </a:pPr>
             <a:r>
@@ -8832,7 +8290,7 @@
           <a:bodyPr wrap="square" lIns="0" tIns="0" rIns="0" bIns="0" rtlCol="0" anchor="ctr"/>
           <a:lstStyle/>
           <a:p>
-            <a:pPr indent="0" marL="0">
+            <a:pPr marL="0" indent="0">
               <a:lnSpc>
                 <a:spcPts val="1700"/>
               </a:lnSpc>
@@ -8901,7 +8359,7 @@
           <a:bodyPr wrap="square" lIns="0" tIns="0" rIns="0" bIns="0" rtlCol="0" anchor="ctr"/>
           <a:lstStyle/>
           <a:p>
-            <a:pPr indent="0" marL="0">
+            <a:pPr marL="0" indent="0">
               <a:buNone/>
             </a:pPr>
             <a:r>
@@ -9088,7 +8546,7 @@
           <a:bodyPr wrap="square" lIns="0" tIns="0" rIns="0" bIns="0" rtlCol="0" anchor="ctr"/>
           <a:lstStyle/>
           <a:p>
-            <a:pPr indent="0" marL="0">
+            <a:pPr marL="0" indent="0">
               <a:buNone/>
             </a:pPr>
             <a:r>
@@ -9299,14 +8757,14 @@
           <a:bodyPr wrap="square" lIns="0" tIns="0" rIns="0" bIns="0" rtlCol="0" anchor="ctr"/>
           <a:lstStyle/>
           <a:p>
-            <a:pPr indent="0" marL="0">
+            <a:pPr marL="0" indent="0">
               <a:lnSpc>
                 <a:spcPts val="1725"/>
               </a:lnSpc>
               <a:buNone/>
             </a:pPr>
             <a:r>
-              <a:rPr lang="en-US" sz="1000" b="1" spc="130" kern="0" dirty="0">
+              <a:rPr lang="en-US" sz="1000" b="1" kern="0" spc="130" dirty="0">
                 <a:solidFill>
                   <a:srgbClr val="E6115E"/>
                 </a:solidFill>
@@ -9316,12 +8774,6 @@
               </a:rPr>
               <a:t>ANALOGÍA   </a:t>
             </a:r>
-            <a:pPr indent="0" marL="0">
-              <a:lnSpc>
-                <a:spcPts val="1725"/>
-              </a:lnSpc>
-              <a:buNone/>
-            </a:pPr>
             <a:r>
               <a:rPr lang="en-US" sz="1250" dirty="0">
                 <a:solidFill>
@@ -9358,7 +8810,7 @@
           <a:bodyPr wrap="square" lIns="0" tIns="0" rIns="0" bIns="0" rtlCol="0" anchor="ctr"/>
           <a:lstStyle/>
           <a:p>
-            <a:pPr indent="0" marL="0">
+            <a:pPr marL="0" indent="0">
               <a:buNone/>
             </a:pPr>
             <a:r>
@@ -9397,7 +8849,7 @@
           <a:bodyPr wrap="square" lIns="0" tIns="0" rIns="0" bIns="0" rtlCol="0" anchor="ctr"/>
           <a:lstStyle/>
           <a:p>
-            <a:pPr algn="r" indent="0" marL="0">
+            <a:pPr marL="0" indent="0" algn="r">
               <a:buNone/>
             </a:pPr>
             <a:r>
@@ -9431,6 +8883,7 @@
         <a:solidFill>
           <a:srgbClr val="F5F7FB"/>
         </a:solidFill>
+        <a:effectLst/>
       </p:bgPr>
     </p:bg>
     <p:spTree>
@@ -9468,7 +8921,7 @@
           <a:bodyPr wrap="square" lIns="0" tIns="0" rIns="0" bIns="0" rtlCol="0" anchor="ctr"/>
           <a:lstStyle/>
           <a:p>
-            <a:pPr indent="0" marL="0">
+            <a:pPr marL="0" indent="0">
               <a:buNone/>
             </a:pPr>
             <a:r>
@@ -9507,7 +8960,7 @@
           <a:bodyPr wrap="square" lIns="0" tIns="0" rIns="0" bIns="0" rtlCol="0" anchor="ctr"/>
           <a:lstStyle/>
           <a:p>
-            <a:pPr indent="0" marL="0">
+            <a:pPr marL="0" indent="0">
               <a:buNone/>
             </a:pPr>
             <a:r>
@@ -9600,11 +9053,11 @@
           <a:bodyPr wrap="square" lIns="0" tIns="0" rIns="0" bIns="0" rtlCol="0" anchor="ctr"/>
           <a:lstStyle/>
           <a:p>
-            <a:pPr algn="ctr" indent="0" marL="0">
-              <a:buNone/>
-            </a:pPr>
-            <a:r>
-              <a:rPr lang="en-US" sz="1150" b="1" spc="120" kern="0" dirty="0">
+            <a:pPr marL="0" indent="0" algn="ctr">
+              <a:buNone/>
+            </a:pPr>
+            <a:r>
+              <a:rPr lang="en-US" sz="1150" b="1" kern="0" spc="120" dirty="0">
                 <a:solidFill>
                   <a:srgbClr val="FFFFFF"/>
                 </a:solidFill>
@@ -9639,7 +9092,7 @@
           <a:bodyPr wrap="square" lIns="0" tIns="0" rIns="0" bIns="0" rtlCol="0" anchor="ctr"/>
           <a:lstStyle/>
           <a:p>
-            <a:pPr indent="0" marL="0">
+            <a:pPr marL="0" indent="0">
               <a:lnSpc>
                 <a:spcPts val="1600"/>
               </a:lnSpc>
@@ -9826,7 +9279,7 @@
           <a:bodyPr wrap="square" lIns="0" tIns="0" rIns="0" bIns="0" rtlCol="0" anchor="ctr"/>
           <a:lstStyle/>
           <a:p>
-            <a:pPr indent="0" marL="0">
+            <a:pPr marL="0" indent="0">
               <a:buNone/>
             </a:pPr>
             <a:r>
@@ -9919,11 +9372,11 @@
           <a:bodyPr wrap="square" lIns="0" tIns="0" rIns="0" bIns="0" rtlCol="0" anchor="ctr"/>
           <a:lstStyle/>
           <a:p>
-            <a:pPr algn="ctr" indent="0" marL="0">
-              <a:buNone/>
-            </a:pPr>
-            <a:r>
-              <a:rPr lang="en-US" sz="1150" b="1" spc="120" kern="0" dirty="0">
+            <a:pPr marL="0" indent="0" algn="ctr">
+              <a:buNone/>
+            </a:pPr>
+            <a:r>
+              <a:rPr lang="en-US" sz="1150" b="1" kern="0" spc="120" dirty="0">
                 <a:solidFill>
                   <a:srgbClr val="FFFFFF"/>
                 </a:solidFill>
@@ -9958,7 +9411,7 @@
           <a:bodyPr wrap="square" lIns="0" tIns="0" rIns="0" bIns="0" rtlCol="0" anchor="ctr"/>
           <a:lstStyle/>
           <a:p>
-            <a:pPr indent="0" marL="0">
+            <a:pPr marL="0" indent="0">
               <a:lnSpc>
                 <a:spcPts val="1600"/>
               </a:lnSpc>
@@ -10145,7 +9598,7 @@
           <a:bodyPr wrap="square" lIns="0" tIns="0" rIns="0" bIns="0" rtlCol="0" anchor="ctr"/>
           <a:lstStyle/>
           <a:p>
-            <a:pPr indent="0" marL="0">
+            <a:pPr marL="0" indent="0">
               <a:buNone/>
             </a:pPr>
             <a:r>
@@ -10238,14 +9691,14 @@
           <a:bodyPr wrap="square" lIns="0" tIns="0" rIns="0" bIns="0" rtlCol="0" anchor="ctr"/>
           <a:lstStyle/>
           <a:p>
-            <a:pPr indent="0" marL="0">
+            <a:pPr marL="0" indent="0">
               <a:lnSpc>
                 <a:spcPts val="1725"/>
               </a:lnSpc>
               <a:buNone/>
             </a:pPr>
             <a:r>
-              <a:rPr lang="en-US" sz="1000" b="1" spc="130" kern="0" dirty="0">
+              <a:rPr lang="en-US" sz="1000" b="1" kern="0" spc="130" dirty="0">
                 <a:solidFill>
                   <a:srgbClr val="E6115E"/>
                 </a:solidFill>
@@ -10255,12 +9708,6 @@
               </a:rPr>
               <a:t>ANALOGÍA   </a:t>
             </a:r>
-            <a:pPr indent="0" marL="0">
-              <a:lnSpc>
-                <a:spcPts val="1725"/>
-              </a:lnSpc>
-              <a:buNone/>
-            </a:pPr>
             <a:r>
               <a:rPr lang="en-US" sz="1250" dirty="0">
                 <a:solidFill>
@@ -10297,7 +9744,7 @@
           <a:bodyPr wrap="square" lIns="0" tIns="0" rIns="0" bIns="0" rtlCol="0" anchor="ctr"/>
           <a:lstStyle/>
           <a:p>
-            <a:pPr indent="0" marL="0">
+            <a:pPr marL="0" indent="0">
               <a:buNone/>
             </a:pPr>
             <a:r>
@@ -10336,7 +9783,7 @@
           <a:bodyPr wrap="square" lIns="0" tIns="0" rIns="0" bIns="0" rtlCol="0" anchor="ctr"/>
           <a:lstStyle/>
           <a:p>
-            <a:pPr algn="r" indent="0" marL="0">
+            <a:pPr marL="0" indent="0" algn="r">
               <a:buNone/>
             </a:pPr>
             <a:r>
@@ -10370,6 +9817,7 @@
         <a:solidFill>
           <a:srgbClr val="F5F7FB"/>
         </a:solidFill>
+        <a:effectLst/>
       </p:bgPr>
     </p:bg>
     <p:spTree>
@@ -10407,7 +9855,7 @@
           <a:bodyPr wrap="square" lIns="0" tIns="0" rIns="0" bIns="0" rtlCol="0" anchor="ctr"/>
           <a:lstStyle/>
           <a:p>
-            <a:pPr indent="0" marL="0">
+            <a:pPr marL="0" indent="0">
               <a:buNone/>
             </a:pPr>
             <a:r>
@@ -10446,7 +9894,7 @@
           <a:bodyPr wrap="square" lIns="0" tIns="0" rIns="0" bIns="0" rtlCol="0" anchor="ctr"/>
           <a:lstStyle/>
           <a:p>
-            <a:pPr indent="0" marL="0">
+            <a:pPr marL="0" indent="0">
               <a:buNone/>
             </a:pPr>
             <a:r>
@@ -10466,7 +9914,7 @@
       </p:sp>
       <p:graphicFrame>
         <p:nvGraphicFramePr>
-          <p:cNvPr id="4" name="Chart 0" descr=""/>
+          <p:cNvPr id="4" name="Chart 0"/>
           <p:cNvGraphicFramePr/>
           <p:nvPr/>
         </p:nvGraphicFramePr>
@@ -10474,15 +9922,15 @@
           <a:off x="548640" y="1920240"/>
           <a:ext cx="5486400" cy="2788920"/>
         </p:xfrm>
-        <a:graphic xmlns:a="http://schemas.openxmlformats.org/drawingml/2006/main">
+        <a:graphic>
           <a:graphicData uri="http://schemas.openxmlformats.org/drawingml/2006/chart">
-            <c:chart xmlns:c="http://schemas.openxmlformats.org/drawingml/2006/chart" r:id="rId1"/>
+            <c:chart xmlns:c="http://schemas.openxmlformats.org/drawingml/2006/chart" xmlns:r="http://schemas.openxmlformats.org/officeDocument/2006/relationships" r:id="rId3"/>
           </a:graphicData>
         </a:graphic>
       </p:graphicFrame>
       <p:graphicFrame>
         <p:nvGraphicFramePr>
-          <p:cNvPr id="5" name="Chart 1" descr=""/>
+          <p:cNvPr id="5" name="Chart 1"/>
           <p:cNvGraphicFramePr/>
           <p:nvPr/>
         </p:nvGraphicFramePr>
@@ -10490,9 +9938,9 @@
           <a:off x="6172200" y="1920240"/>
           <a:ext cx="5440680" cy="2788920"/>
         </p:xfrm>
-        <a:graphic xmlns:a="http://schemas.openxmlformats.org/drawingml/2006/main">
+        <a:graphic>
           <a:graphicData uri="http://schemas.openxmlformats.org/drawingml/2006/chart">
-            <c:chart xmlns:c="http://schemas.openxmlformats.org/drawingml/2006/chart" r:id="rId2"/>
+            <c:chart xmlns:c="http://schemas.openxmlformats.org/drawingml/2006/chart" xmlns:r="http://schemas.openxmlformats.org/officeDocument/2006/relationships" r:id="rId4"/>
           </a:graphicData>
         </a:graphic>
       </p:graphicFrame>
@@ -10544,7 +9992,7 @@
           <a:bodyPr wrap="square" lIns="0" tIns="0" rIns="0" bIns="0" rtlCol="0" anchor="ctr"/>
           <a:lstStyle/>
           <a:p>
-            <a:pPr indent="0" marL="0">
+            <a:pPr marL="0" indent="0">
               <a:buNone/>
             </a:pPr>
             <a:r>
@@ -10558,9 +10006,6 @@
               </a:rPr>
               <a:t>Suma de toda la PMF = 1. </a:t>
             </a:r>
-            <a:pPr indent="0" marL="0">
-              <a:buNone/>
-            </a:pPr>
             <a:r>
               <a:rPr lang="en-US" sz="1250" dirty="0">
                 <a:solidFill>
@@ -10572,9 +10017,6 @@
               </a:rPr>
               <a:t>La CDF es monótona no decreciente y va de 0 a 1. En código: </a:t>
             </a:r>
-            <a:pPr indent="0" marL="0">
-              <a:buNone/>
-            </a:pPr>
             <a:r>
               <a:rPr lang="en-US" sz="1200" b="1" dirty="0">
                 <a:solidFill>
@@ -10586,9 +10028,6 @@
               </a:rPr>
               <a:t>binom.pmf(k, n, p)</a:t>
             </a:r>
-            <a:pPr indent="0" marL="0">
-              <a:buNone/>
-            </a:pPr>
             <a:r>
               <a:rPr lang="en-US" sz="1250" dirty="0">
                 <a:solidFill>
@@ -10600,9 +10039,6 @@
               </a:rPr>
               <a:t> y </a:t>
             </a:r>
-            <a:pPr indent="0" marL="0">
-              <a:buNone/>
-            </a:pPr>
             <a:r>
               <a:rPr lang="en-US" sz="1200" b="1" dirty="0">
                 <a:solidFill>
@@ -10693,14 +10129,14 @@
           <a:bodyPr wrap="square" lIns="0" tIns="0" rIns="0" bIns="0" rtlCol="0" anchor="ctr"/>
           <a:lstStyle/>
           <a:p>
-            <a:pPr indent="0" marL="0">
+            <a:pPr marL="0" indent="0">
               <a:lnSpc>
                 <a:spcPts val="1725"/>
               </a:lnSpc>
               <a:buNone/>
             </a:pPr>
             <a:r>
-              <a:rPr lang="en-US" sz="1000" b="1" spc="130" kern="0" dirty="0">
+              <a:rPr lang="en-US" sz="1000" b="1" kern="0" spc="130" dirty="0">
                 <a:solidFill>
                   <a:srgbClr val="E6115E"/>
                 </a:solidFill>
@@ -10710,12 +10146,6 @@
               </a:rPr>
               <a:t>ANALOGÍA   </a:t>
             </a:r>
-            <a:pPr indent="0" marL="0">
-              <a:lnSpc>
-                <a:spcPts val="1725"/>
-              </a:lnSpc>
-              <a:buNone/>
-            </a:pPr>
             <a:r>
               <a:rPr lang="en-US" sz="1250" dirty="0">
                 <a:solidFill>
@@ -10752,7 +10182,7 @@
           <a:bodyPr wrap="square" lIns="0" tIns="0" rIns="0" bIns="0" rtlCol="0" anchor="ctr"/>
           <a:lstStyle/>
           <a:p>
-            <a:pPr indent="0" marL="0">
+            <a:pPr marL="0" indent="0">
               <a:buNone/>
             </a:pPr>
             <a:r>
@@ -10791,7 +10221,7 @@
           <a:bodyPr wrap="square" lIns="0" tIns="0" rIns="0" bIns="0" rtlCol="0" anchor="ctr"/>
           <a:lstStyle/>
           <a:p>
-            <a:pPr algn="r" indent="0" marL="0">
+            <a:pPr marL="0" indent="0" algn="r">
               <a:buNone/>
             </a:pPr>
             <a:r>
@@ -10825,6 +10255,7 @@
         <a:solidFill>
           <a:srgbClr val="F5F7FB"/>
         </a:solidFill>
+        <a:effectLst/>
       </p:bgPr>
     </p:bg>
     <p:spTree>
@@ -10862,7 +10293,7 @@
           <a:bodyPr wrap="square" lIns="0" tIns="0" rIns="0" bIns="0" rtlCol="0" anchor="ctr"/>
           <a:lstStyle/>
           <a:p>
-            <a:pPr indent="0" marL="0">
+            <a:pPr marL="0" indent="0">
               <a:buNone/>
             </a:pPr>
             <a:r>
@@ -10901,7 +10332,7 @@
           <a:bodyPr wrap="square" lIns="0" tIns="0" rIns="0" bIns="0" rtlCol="0" anchor="ctr"/>
           <a:lstStyle/>
           <a:p>
-            <a:pPr indent="0" marL="0">
+            <a:pPr marL="0" indent="0">
               <a:buNone/>
             </a:pPr>
             <a:r>
@@ -10927,7 +10358,7 @@
         </p:nvSpPr>
         <p:spPr>
           <a:xfrm>
-            <a:off x="548640" y="1920240"/>
+            <a:off x="612648" y="1892808"/>
             <a:ext cx="4937760" cy="3931920"/>
           </a:xfrm>
           <a:prstGeom prst="roundRect">
@@ -10994,7 +10425,7 @@
           <a:bodyPr wrap="square" lIns="0" tIns="0" rIns="0" bIns="0" rtlCol="0" anchor="ctr"/>
           <a:lstStyle/>
           <a:p>
-            <a:pPr indent="0" marL="0">
+            <a:pPr marL="0" indent="0">
               <a:buNone/>
             </a:pPr>
             <a:r>
@@ -11060,7 +10491,7 @@
           <a:bodyPr wrap="square" lIns="0" tIns="0" rIns="0" bIns="0" rtlCol="0" anchor="ctr"/>
           <a:lstStyle/>
           <a:p>
-            <a:pPr algn="ctr" indent="0" marL="0">
+            <a:pPr marL="0" indent="0" algn="ctr">
               <a:buNone/>
             </a:pPr>
             <a:r>
@@ -11099,7 +10530,7 @@
           <a:bodyPr wrap="square" lIns="0" tIns="0" rIns="0" bIns="0" rtlCol="0" anchor="ctr"/>
           <a:lstStyle/>
           <a:p>
-            <a:pPr indent="0" marL="0">
+            <a:pPr marL="0" indent="0">
               <a:buNone/>
             </a:pPr>
             <a:r>
@@ -11165,11 +10596,11 @@
           <a:bodyPr wrap="square" lIns="0" tIns="0" rIns="0" bIns="0" rtlCol="0" anchor="ctr"/>
           <a:lstStyle/>
           <a:p>
-            <a:pPr algn="ctr" indent="0" marL="0">
-              <a:buNone/>
-            </a:pPr>
-            <a:r>
-              <a:rPr lang="en-US" sz="1050" b="1" spc="100" kern="0" dirty="0">
+            <a:pPr marL="0" indent="0" algn="ctr">
+              <a:buNone/>
+            </a:pPr>
+            <a:r>
+              <a:rPr lang="en-US" sz="1050" b="1" kern="0" spc="100" dirty="0">
                 <a:solidFill>
                   <a:srgbClr val="5B6B87"/>
                 </a:solidFill>
@@ -11204,7 +10635,7 @@
           <a:bodyPr wrap="square" lIns="0" tIns="0" rIns="0" bIns="0" rtlCol="0" anchor="ctr"/>
           <a:lstStyle/>
           <a:p>
-            <a:pPr algn="ctr" indent="0" marL="0">
+            <a:pPr marL="0" indent="0" algn="ctr">
               <a:buNone/>
             </a:pPr>
             <a:r>
@@ -11270,11 +10701,11 @@
           <a:bodyPr wrap="square" lIns="0" tIns="0" rIns="0" bIns="0" rtlCol="0" anchor="ctr"/>
           <a:lstStyle/>
           <a:p>
-            <a:pPr algn="ctr" indent="0" marL="0">
-              <a:buNone/>
-            </a:pPr>
-            <a:r>
-              <a:rPr lang="en-US" sz="1050" b="1" spc="100" kern="0" dirty="0">
+            <a:pPr marL="0" indent="0" algn="ctr">
+              <a:buNone/>
+            </a:pPr>
+            <a:r>
+              <a:rPr lang="en-US" sz="1050" b="1" kern="0" spc="100" dirty="0">
                 <a:solidFill>
                   <a:srgbClr val="5B6B87"/>
                 </a:solidFill>
@@ -11309,7 +10740,7 @@
           <a:bodyPr wrap="square" lIns="0" tIns="0" rIns="0" bIns="0" rtlCol="0" anchor="ctr"/>
           <a:lstStyle/>
           <a:p>
-            <a:pPr algn="ctr" indent="0" marL="0">
+            <a:pPr marL="0" indent="0" algn="ctr">
               <a:buNone/>
             </a:pPr>
             <a:r>
@@ -11375,7 +10806,7 @@
           <a:bodyPr wrap="square" lIns="0" tIns="0" rIns="0" bIns="0" rtlCol="0" anchor="ctr"/>
           <a:lstStyle/>
           <a:p>
-            <a:pPr indent="0" marL="0">
+            <a:pPr marL="0" indent="0">
               <a:buNone/>
             </a:pPr>
             <a:r>
@@ -11414,7 +10845,7 @@
           <a:bodyPr wrap="square" lIns="0" tIns="0" rIns="0" bIns="0" rtlCol="0" anchor="ctr"/>
           <a:lstStyle/>
           <a:p>
-            <a:pPr indent="0" marL="0">
+            <a:pPr marL="0" indent="0">
               <a:lnSpc>
                 <a:spcPts val="1550"/>
               </a:lnSpc>
@@ -11437,7 +10868,7 @@
       </p:sp>
       <p:graphicFrame>
         <p:nvGraphicFramePr>
-          <p:cNvPr id="19" name="Chart 0" descr=""/>
+          <p:cNvPr id="19" name="Chart 0"/>
           <p:cNvGraphicFramePr/>
           <p:nvPr/>
         </p:nvGraphicFramePr>
@@ -11445,9 +10876,9 @@
           <a:off x="5806440" y="1920240"/>
           <a:ext cx="5806440" cy="2834640"/>
         </p:xfrm>
-        <a:graphic xmlns:a="http://schemas.openxmlformats.org/drawingml/2006/main">
+        <a:graphic>
           <a:graphicData uri="http://schemas.openxmlformats.org/drawingml/2006/chart">
-            <c:chart xmlns:c="http://schemas.openxmlformats.org/drawingml/2006/chart" r:id="rId1"/>
+            <c:chart xmlns:c="http://schemas.openxmlformats.org/drawingml/2006/chart" xmlns:r="http://schemas.openxmlformats.org/officeDocument/2006/relationships" r:id="rId3"/>
           </a:graphicData>
         </a:graphic>
       </p:graphicFrame>
@@ -11526,14 +10957,14 @@
           <a:bodyPr wrap="square" lIns="0" tIns="0" rIns="0" bIns="0" rtlCol="0" anchor="ctr"/>
           <a:lstStyle/>
           <a:p>
-            <a:pPr indent="0" marL="0">
+            <a:pPr marL="0" indent="0">
               <a:lnSpc>
                 <a:spcPts val="1656"/>
               </a:lnSpc>
               <a:buNone/>
             </a:pPr>
             <a:r>
-              <a:rPr lang="en-US" sz="1000" b="1" spc="130" kern="0" dirty="0">
+              <a:rPr lang="en-US" sz="1000" b="1" kern="0" spc="130" dirty="0">
                 <a:solidFill>
                   <a:srgbClr val="E6115E"/>
                 </a:solidFill>
@@ -11543,12 +10974,6 @@
               </a:rPr>
               <a:t>ANALOGÍA   </a:t>
             </a:r>
-            <a:pPr indent="0" marL="0">
-              <a:lnSpc>
-                <a:spcPts val="1656"/>
-              </a:lnSpc>
-              <a:buNone/>
-            </a:pPr>
             <a:r>
               <a:rPr lang="en-US" sz="1200" dirty="0">
                 <a:solidFill>
@@ -11585,7 +11010,7 @@
           <a:bodyPr wrap="square" lIns="0" tIns="0" rIns="0" bIns="0" rtlCol="0" anchor="ctr"/>
           <a:lstStyle/>
           <a:p>
-            <a:pPr indent="0" marL="0">
+            <a:pPr marL="0" indent="0">
               <a:buNone/>
             </a:pPr>
             <a:r>
@@ -11624,7 +11049,7 @@
           <a:bodyPr wrap="square" lIns="0" tIns="0" rIns="0" bIns="0" rtlCol="0" anchor="ctr"/>
           <a:lstStyle/>
           <a:p>
-            <a:pPr algn="r" indent="0" marL="0">
+            <a:pPr marL="0" indent="0" algn="r">
               <a:buNone/>
             </a:pPr>
             <a:r>
@@ -11658,6 +11083,7 @@
         <a:solidFill>
           <a:srgbClr val="F5F7FB"/>
         </a:solidFill>
+        <a:effectLst/>
       </p:bgPr>
     </p:bg>
     <p:spTree>
@@ -11695,7 +11121,7 @@
           <a:bodyPr wrap="square" lIns="0" tIns="0" rIns="0" bIns="0" rtlCol="0" anchor="ctr"/>
           <a:lstStyle/>
           <a:p>
-            <a:pPr indent="0" marL="0">
+            <a:pPr marL="0" indent="0">
               <a:buNone/>
             </a:pPr>
             <a:r>
@@ -11734,7 +11160,7 @@
           <a:bodyPr wrap="square" lIns="0" tIns="0" rIns="0" bIns="0" rtlCol="0" anchor="ctr"/>
           <a:lstStyle/>
           <a:p>
-            <a:pPr indent="0" marL="0">
+            <a:pPr marL="0" indent="0">
               <a:buNone/>
             </a:pPr>
             <a:r>
@@ -11827,7 +11253,7 @@
           <a:bodyPr wrap="square" lIns="0" tIns="0" rIns="0" bIns="0" rtlCol="0" anchor="ctr"/>
           <a:lstStyle/>
           <a:p>
-            <a:pPr indent="0" marL="0">
+            <a:pPr marL="0" indent="0">
               <a:buNone/>
             </a:pPr>
             <a:r>
@@ -11893,7 +11319,7 @@
           <a:bodyPr wrap="square" lIns="0" tIns="0" rIns="0" bIns="0" rtlCol="0" anchor="ctr"/>
           <a:lstStyle/>
           <a:p>
-            <a:pPr algn="ctr" indent="0" marL="0">
+            <a:pPr marL="0" indent="0" algn="ctr">
               <a:buNone/>
             </a:pPr>
             <a:r>
@@ -11932,7 +11358,7 @@
           <a:bodyPr wrap="square" lIns="0" tIns="0" rIns="0" bIns="0" rtlCol="0" anchor="ctr"/>
           <a:lstStyle/>
           <a:p>
-            <a:pPr indent="0" marL="0">
+            <a:pPr marL="0" indent="0">
               <a:buNone/>
             </a:pPr>
             <a:r>
@@ -11998,11 +11424,11 @@
           <a:bodyPr wrap="square" lIns="0" tIns="0" rIns="0" bIns="0" rtlCol="0" anchor="ctr"/>
           <a:lstStyle/>
           <a:p>
-            <a:pPr algn="ctr" indent="0" marL="0">
-              <a:buNone/>
-            </a:pPr>
-            <a:r>
-              <a:rPr lang="en-US" sz="1050" b="1" spc="100" kern="0" dirty="0">
+            <a:pPr marL="0" indent="0" algn="ctr">
+              <a:buNone/>
+            </a:pPr>
+            <a:r>
+              <a:rPr lang="en-US" sz="1050" b="1" kern="0" spc="100" dirty="0">
                 <a:solidFill>
                   <a:srgbClr val="5B6B87"/>
                 </a:solidFill>
@@ -12037,7 +11463,7 @@
           <a:bodyPr wrap="square" lIns="0" tIns="0" rIns="0" bIns="0" rtlCol="0" anchor="ctr"/>
           <a:lstStyle/>
           <a:p>
-            <a:pPr algn="ctr" indent="0" marL="0">
+            <a:pPr marL="0" indent="0" algn="ctr">
               <a:buNone/>
             </a:pPr>
             <a:r>
@@ -12103,11 +11529,11 @@
           <a:bodyPr wrap="square" lIns="0" tIns="0" rIns="0" bIns="0" rtlCol="0" anchor="ctr"/>
           <a:lstStyle/>
           <a:p>
-            <a:pPr algn="ctr" indent="0" marL="0">
-              <a:buNone/>
-            </a:pPr>
-            <a:r>
-              <a:rPr lang="en-US" sz="1050" b="1" spc="100" kern="0" dirty="0">
+            <a:pPr marL="0" indent="0" algn="ctr">
+              <a:buNone/>
+            </a:pPr>
+            <a:r>
+              <a:rPr lang="en-US" sz="1050" b="1" kern="0" spc="100" dirty="0">
                 <a:solidFill>
                   <a:srgbClr val="5B6B87"/>
                 </a:solidFill>
@@ -12142,7 +11568,7 @@
           <a:bodyPr wrap="square" lIns="0" tIns="0" rIns="0" bIns="0" rtlCol="0" anchor="ctr"/>
           <a:lstStyle/>
           <a:p>
-            <a:pPr algn="ctr" indent="0" marL="0">
+            <a:pPr marL="0" indent="0" algn="ctr">
               <a:buNone/>
             </a:pPr>
             <a:r>
@@ -12208,7 +11634,7 @@
           <a:bodyPr wrap="square" lIns="0" tIns="0" rIns="0" bIns="0" rtlCol="0" anchor="ctr"/>
           <a:lstStyle/>
           <a:p>
-            <a:pPr indent="0" marL="0">
+            <a:pPr marL="0" indent="0">
               <a:buNone/>
             </a:pPr>
             <a:r>
@@ -12247,7 +11673,7 @@
           <a:bodyPr wrap="square" lIns="0" tIns="0" rIns="0" bIns="0" rtlCol="0" anchor="ctr"/>
           <a:lstStyle/>
           <a:p>
-            <a:pPr indent="0" marL="0">
+            <a:pPr marL="0" indent="0">
               <a:lnSpc>
                 <a:spcPts val="1550"/>
               </a:lnSpc>
@@ -12270,7 +11696,7 @@
       </p:sp>
       <p:graphicFrame>
         <p:nvGraphicFramePr>
-          <p:cNvPr id="19" name="Chart 0" descr=""/>
+          <p:cNvPr id="19" name="Chart 0"/>
           <p:cNvGraphicFramePr/>
           <p:nvPr/>
         </p:nvGraphicFramePr>
@@ -12278,9 +11704,9 @@
           <a:off x="5806440" y="1920240"/>
           <a:ext cx="5806440" cy="2834640"/>
         </p:xfrm>
-        <a:graphic xmlns:a="http://schemas.openxmlformats.org/drawingml/2006/main">
+        <a:graphic>
           <a:graphicData uri="http://schemas.openxmlformats.org/drawingml/2006/chart">
-            <c:chart xmlns:c="http://schemas.openxmlformats.org/drawingml/2006/chart" r:id="rId1"/>
+            <c:chart xmlns:c="http://schemas.openxmlformats.org/drawingml/2006/chart" xmlns:r="http://schemas.openxmlformats.org/officeDocument/2006/relationships" r:id="rId3"/>
           </a:graphicData>
         </a:graphic>
       </p:graphicFrame>
@@ -12359,14 +11785,14 @@
           <a:bodyPr wrap="square" lIns="0" tIns="0" rIns="0" bIns="0" rtlCol="0" anchor="ctr"/>
           <a:lstStyle/>
           <a:p>
-            <a:pPr indent="0" marL="0">
+            <a:pPr marL="0" indent="0">
               <a:lnSpc>
                 <a:spcPts val="1656"/>
               </a:lnSpc>
               <a:buNone/>
             </a:pPr>
             <a:r>
-              <a:rPr lang="en-US" sz="1000" b="1" spc="130" kern="0" dirty="0">
+              <a:rPr lang="en-US" sz="1000" b="1" kern="0" spc="130" dirty="0">
                 <a:solidFill>
                   <a:srgbClr val="E6115E"/>
                 </a:solidFill>
@@ -12376,12 +11802,6 @@
               </a:rPr>
               <a:t>ANALOGÍA   </a:t>
             </a:r>
-            <a:pPr indent="0" marL="0">
-              <a:lnSpc>
-                <a:spcPts val="1656"/>
-              </a:lnSpc>
-              <a:buNone/>
-            </a:pPr>
             <a:r>
               <a:rPr lang="en-US" sz="1200" dirty="0">
                 <a:solidFill>
@@ -12418,7 +11838,7 @@
           <a:bodyPr wrap="square" lIns="0" tIns="0" rIns="0" bIns="0" rtlCol="0" anchor="ctr"/>
           <a:lstStyle/>
           <a:p>
-            <a:pPr indent="0" marL="0">
+            <a:pPr marL="0" indent="0">
               <a:buNone/>
             </a:pPr>
             <a:r>
@@ -12457,7 +11877,7 @@
           <a:bodyPr wrap="square" lIns="0" tIns="0" rIns="0" bIns="0" rtlCol="0" anchor="ctr"/>
           <a:lstStyle/>
           <a:p>
-            <a:pPr algn="r" indent="0" marL="0">
+            <a:pPr marL="0" indent="0" algn="r">
               <a:buNone/>
             </a:pPr>
             <a:r>
@@ -12491,6 +11911,7 @@
         <a:solidFill>
           <a:srgbClr val="F5F7FB"/>
         </a:solidFill>
+        <a:effectLst/>
       </p:bgPr>
     </p:bg>
     <p:spTree>
@@ -12555,11 +11976,11 @@
           <a:bodyPr wrap="square" lIns="0" tIns="0" rIns="0" bIns="0" rtlCol="0" anchor="ctr"/>
           <a:lstStyle/>
           <a:p>
-            <a:pPr algn="ctr" indent="0" marL="0">
-              <a:buNone/>
-            </a:pPr>
-            <a:r>
-              <a:rPr lang="en-US" sz="1150" b="1" spc="120" kern="0" dirty="0">
+            <a:pPr marL="0" indent="0" algn="ctr">
+              <a:buNone/>
+            </a:pPr>
+            <a:r>
+              <a:rPr lang="en-US" sz="1150" b="1" kern="0" spc="120" dirty="0">
                 <a:solidFill>
                   <a:srgbClr val="FFFFFF"/>
                 </a:solidFill>
@@ -12581,7 +12002,7 @@
         </p:nvSpPr>
         <p:spPr>
           <a:xfrm>
-            <a:off x="548640" y="384048"/>
+            <a:off x="499545" y="502920"/>
             <a:ext cx="11064240" cy="822960"/>
           </a:xfrm>
           <a:prstGeom prst="rect">
@@ -12594,7 +12015,7 @@
           <a:bodyPr wrap="square" lIns="0" tIns="0" rIns="0" bIns="0" rtlCol="0" anchor="ctr"/>
           <a:lstStyle/>
           <a:p>
-            <a:pPr indent="0" marL="0">
+            <a:pPr marL="0" indent="0">
               <a:buNone/>
             </a:pPr>
             <a:r>
@@ -12633,7 +12054,7 @@
           <a:bodyPr wrap="square" lIns="0" tIns="0" rIns="0" bIns="0" rtlCol="0" anchor="ctr"/>
           <a:lstStyle/>
           <a:p>
-            <a:pPr indent="0" marL="0">
+            <a:pPr marL="0" indent="0">
               <a:buNone/>
             </a:pPr>
             <a:r>
@@ -12653,7 +12074,7 @@
       </p:sp>
       <p:graphicFrame>
         <p:nvGraphicFramePr>
-          <p:cNvPr id="6" name="Chart 0" descr=""/>
+          <p:cNvPr id="6" name="Chart 0"/>
           <p:cNvGraphicFramePr/>
           <p:nvPr/>
         </p:nvGraphicFramePr>
@@ -12661,9 +12082,9 @@
           <a:off x="548640" y="1828800"/>
           <a:ext cx="6492240" cy="2926080"/>
         </p:xfrm>
-        <a:graphic xmlns:a="http://schemas.openxmlformats.org/drawingml/2006/main">
+        <a:graphic>
           <a:graphicData uri="http://schemas.openxmlformats.org/drawingml/2006/chart">
-            <c:chart xmlns:c="http://schemas.openxmlformats.org/drawingml/2006/chart" r:id="rId1"/>
+            <c:chart xmlns:c="http://schemas.openxmlformats.org/drawingml/2006/chart" xmlns:r="http://schemas.openxmlformats.org/officeDocument/2006/relationships" r:id="rId3"/>
           </a:graphicData>
         </a:graphic>
       </p:graphicFrame>
@@ -12715,7 +12136,7 @@
           <a:bodyPr wrap="square" lIns="0" tIns="0" rIns="0" bIns="0" rtlCol="0" anchor="ctr"/>
           <a:lstStyle/>
           <a:p>
-            <a:pPr algn="ctr" indent="0" marL="0">
+            <a:pPr marL="0" indent="0" algn="ctr">
               <a:buNone/>
             </a:pPr>
             <a:r>
@@ -12754,7 +12175,7 @@
           <a:bodyPr wrap="square" lIns="0" tIns="0" rIns="0" bIns="0" rtlCol="0" anchor="t"/>
           <a:lstStyle/>
           <a:p>
-            <a:pPr algn="ctr" indent="0" marL="0">
+            <a:pPr marL="0" indent="0" algn="ctr">
               <a:lnSpc>
                 <a:spcPts val="1300"/>
               </a:lnSpc>
@@ -12774,7 +12195,7 @@
             <a:endParaRPr lang="en-US" sz="1050" dirty="0"/>
           </a:p>
           <a:p>
-            <a:pPr algn="ctr" indent="0" marL="0">
+            <a:pPr marL="0" indent="0" algn="ctr">
               <a:lnSpc>
                 <a:spcPts val="1300"/>
               </a:lnSpc>
@@ -12843,7 +12264,7 @@
           <a:bodyPr wrap="square" lIns="0" tIns="0" rIns="0" bIns="0" rtlCol="0" anchor="ctr"/>
           <a:lstStyle/>
           <a:p>
-            <a:pPr algn="ctr" indent="0" marL="0">
+            <a:pPr marL="0" indent="0" algn="ctr">
               <a:buNone/>
             </a:pPr>
             <a:r>
@@ -12882,7 +12303,7 @@
           <a:bodyPr wrap="square" lIns="0" tIns="0" rIns="0" bIns="0" rtlCol="0" anchor="t"/>
           <a:lstStyle/>
           <a:p>
-            <a:pPr algn="ctr" indent="0" marL="0">
+            <a:pPr marL="0" indent="0" algn="ctr">
               <a:lnSpc>
                 <a:spcPts val="1300"/>
               </a:lnSpc>
@@ -12951,7 +12372,7 @@
           <a:bodyPr wrap="square" lIns="0" tIns="0" rIns="0" bIns="0" rtlCol="0" anchor="ctr"/>
           <a:lstStyle/>
           <a:p>
-            <a:pPr algn="ctr" indent="0" marL="0">
+            <a:pPr marL="0" indent="0" algn="ctr">
               <a:buNone/>
             </a:pPr>
             <a:r>
@@ -12990,7 +12411,7 @@
           <a:bodyPr wrap="square" lIns="0" tIns="0" rIns="0" bIns="0" rtlCol="0" anchor="t"/>
           <a:lstStyle/>
           <a:p>
-            <a:pPr algn="ctr" indent="0" marL="0">
+            <a:pPr marL="0" indent="0" algn="ctr">
               <a:lnSpc>
                 <a:spcPts val="1300"/>
               </a:lnSpc>
@@ -13059,7 +12480,7 @@
           <a:bodyPr wrap="square" lIns="0" tIns="0" rIns="0" bIns="0" rtlCol="0" anchor="ctr"/>
           <a:lstStyle/>
           <a:p>
-            <a:pPr algn="ctr" indent="0" marL="0">
+            <a:pPr marL="0" indent="0" algn="ctr">
               <a:buNone/>
             </a:pPr>
             <a:r>
@@ -13098,7 +12519,7 @@
           <a:bodyPr wrap="square" lIns="0" tIns="0" rIns="0" bIns="0" rtlCol="0" anchor="t"/>
           <a:lstStyle/>
           <a:p>
-            <a:pPr algn="ctr" indent="0" marL="0">
+            <a:pPr marL="0" indent="0" algn="ctr">
               <a:lnSpc>
                 <a:spcPts val="1300"/>
               </a:lnSpc>
@@ -13118,7 +12539,7 @@
             <a:endParaRPr lang="en-US" sz="1050" dirty="0"/>
           </a:p>
           <a:p>
-            <a:pPr algn="ctr" indent="0" marL="0">
+            <a:pPr marL="0" indent="0" algn="ctr">
               <a:lnSpc>
                 <a:spcPts val="1300"/>
               </a:lnSpc>
@@ -13187,7 +12608,7 @@
           <a:bodyPr wrap="square" lIns="0" tIns="0" rIns="0" bIns="0" rtlCol="0" anchor="ctr"/>
           <a:lstStyle/>
           <a:p>
-            <a:pPr indent="0" marL="0">
+            <a:pPr marL="0" indent="0">
               <a:buNone/>
             </a:pPr>
             <a:r>
@@ -13226,7 +12647,7 @@
           <a:bodyPr wrap="square" lIns="0" tIns="0" rIns="0" bIns="0" rtlCol="0" anchor="t"/>
           <a:lstStyle/>
           <a:p>
-            <a:pPr indent="0" marL="0">
+            <a:pPr marL="0" indent="0">
               <a:lnSpc>
                 <a:spcPts val="1450"/>
               </a:lnSpc>
@@ -13268,7 +12689,7 @@
           <a:bodyPr wrap="square" lIns="0" tIns="0" rIns="0" bIns="0" rtlCol="0" anchor="ctr"/>
           <a:lstStyle/>
           <a:p>
-            <a:pPr indent="0" marL="0">
+            <a:pPr marL="0" indent="0">
               <a:buNone/>
             </a:pPr>
             <a:r>
@@ -13307,7 +12728,7 @@
           <a:bodyPr wrap="square" lIns="0" tIns="0" rIns="0" bIns="0" rtlCol="0" anchor="ctr"/>
           <a:lstStyle/>
           <a:p>
-            <a:pPr indent="0" marL="0">
+            <a:pPr marL="0" indent="0">
               <a:buNone/>
             </a:pPr>
             <a:r>
@@ -13346,7 +12767,7 @@
           <a:bodyPr wrap="square" lIns="0" tIns="0" rIns="0" bIns="0" rtlCol="0" anchor="ctr"/>
           <a:lstStyle/>
           <a:p>
-            <a:pPr algn="r" indent="0" marL="0">
+            <a:pPr marL="0" indent="0" algn="r">
               <a:buNone/>
             </a:pPr>
             <a:r>
@@ -13380,6 +12801,7 @@
         <a:solidFill>
           <a:srgbClr val="F5F7FB"/>
         </a:solidFill>
+        <a:effectLst/>
       </p:bgPr>
     </p:bg>
     <p:spTree>
@@ -13417,7 +12839,7 @@
           <a:bodyPr wrap="square" lIns="0" tIns="0" rIns="0" bIns="0" rtlCol="0" anchor="ctr"/>
           <a:lstStyle/>
           <a:p>
-            <a:pPr indent="0" marL="0">
+            <a:pPr marL="0" indent="0">
               <a:buNone/>
             </a:pPr>
             <a:r>
@@ -13456,7 +12878,7 @@
           <a:bodyPr wrap="square" lIns="0" tIns="0" rIns="0" bIns="0" rtlCol="0" anchor="ctr"/>
           <a:lstStyle/>
           <a:p>
-            <a:pPr indent="0" marL="0">
+            <a:pPr marL="0" indent="0">
               <a:buNone/>
             </a:pPr>
             <a:r>
@@ -13549,7 +12971,7 @@
           <a:bodyPr wrap="square" lIns="0" tIns="0" rIns="0" bIns="0" rtlCol="0" anchor="ctr"/>
           <a:lstStyle/>
           <a:p>
-            <a:pPr indent="0" marL="0">
+            <a:pPr marL="0" indent="0">
               <a:buNone/>
             </a:pPr>
             <a:r>
@@ -13615,7 +13037,7 @@
           <a:bodyPr wrap="square" lIns="0" tIns="0" rIns="0" bIns="0" rtlCol="0" anchor="ctr"/>
           <a:lstStyle/>
           <a:p>
-            <a:pPr algn="ctr" indent="0" marL="0">
+            <a:pPr marL="0" indent="0" algn="ctr">
               <a:buNone/>
             </a:pPr>
             <a:r>
@@ -13654,7 +13076,7 @@
           <a:bodyPr wrap="square" lIns="0" tIns="0" rIns="0" bIns="0" rtlCol="0" anchor="ctr"/>
           <a:lstStyle/>
           <a:p>
-            <a:pPr indent="0" marL="0">
+            <a:pPr marL="0" indent="0">
               <a:buNone/>
             </a:pPr>
             <a:r>
@@ -13720,11 +13142,11 @@
           <a:bodyPr wrap="square" lIns="0" tIns="0" rIns="0" bIns="0" rtlCol="0" anchor="ctr"/>
           <a:lstStyle/>
           <a:p>
-            <a:pPr algn="ctr" indent="0" marL="0">
-              <a:buNone/>
-            </a:pPr>
-            <a:r>
-              <a:rPr lang="en-US" sz="1050" b="1" spc="100" kern="0" dirty="0">
+            <a:pPr marL="0" indent="0" algn="ctr">
+              <a:buNone/>
+            </a:pPr>
+            <a:r>
+              <a:rPr lang="en-US" sz="1050" b="1" kern="0" spc="100" dirty="0">
                 <a:solidFill>
                   <a:srgbClr val="5B6B87"/>
                 </a:solidFill>
@@ -13759,7 +13181,7 @@
           <a:bodyPr wrap="square" lIns="0" tIns="0" rIns="0" bIns="0" rtlCol="0" anchor="ctr"/>
           <a:lstStyle/>
           <a:p>
-            <a:pPr algn="ctr" indent="0" marL="0">
+            <a:pPr marL="0" indent="0" algn="ctr">
               <a:buNone/>
             </a:pPr>
             <a:r>
@@ -13825,11 +13247,11 @@
           <a:bodyPr wrap="square" lIns="0" tIns="0" rIns="0" bIns="0" rtlCol="0" anchor="ctr"/>
           <a:lstStyle/>
           <a:p>
-            <a:pPr algn="ctr" indent="0" marL="0">
-              <a:buNone/>
-            </a:pPr>
-            <a:r>
-              <a:rPr lang="en-US" sz="1050" b="1" spc="100" kern="0" dirty="0">
+            <a:pPr marL="0" indent="0" algn="ctr">
+              <a:buNone/>
+            </a:pPr>
+            <a:r>
+              <a:rPr lang="en-US" sz="1050" b="1" kern="0" spc="100" dirty="0">
                 <a:solidFill>
                   <a:srgbClr val="5B6B87"/>
                 </a:solidFill>
@@ -13864,7 +13286,7 @@
           <a:bodyPr wrap="square" lIns="0" tIns="0" rIns="0" bIns="0" rtlCol="0" anchor="ctr"/>
           <a:lstStyle/>
           <a:p>
-            <a:pPr algn="ctr" indent="0" marL="0">
+            <a:pPr marL="0" indent="0" algn="ctr">
               <a:buNone/>
             </a:pPr>
             <a:r>
@@ -13930,7 +13352,7 @@
           <a:bodyPr wrap="square" lIns="0" tIns="0" rIns="0" bIns="0" rtlCol="0" anchor="ctr"/>
           <a:lstStyle/>
           <a:p>
-            <a:pPr indent="0" marL="0">
+            <a:pPr marL="0" indent="0">
               <a:buNone/>
             </a:pPr>
             <a:r>
@@ -13969,7 +13391,7 @@
           <a:bodyPr wrap="square" lIns="0" tIns="0" rIns="0" bIns="0" rtlCol="0" anchor="ctr"/>
           <a:lstStyle/>
           <a:p>
-            <a:pPr indent="0" marL="0">
+            <a:pPr marL="0" indent="0">
               <a:lnSpc>
                 <a:spcPts val="1550"/>
               </a:lnSpc>
@@ -13992,7 +13414,7 @@
       </p:sp>
       <p:graphicFrame>
         <p:nvGraphicFramePr>
-          <p:cNvPr id="19" name="Chart 0" descr=""/>
+          <p:cNvPr id="19" name="Chart 0"/>
           <p:cNvGraphicFramePr/>
           <p:nvPr/>
         </p:nvGraphicFramePr>
@@ -14000,9 +13422,9 @@
           <a:off x="5806440" y="1920240"/>
           <a:ext cx="5806440" cy="2834640"/>
         </p:xfrm>
-        <a:graphic xmlns:a="http://schemas.openxmlformats.org/drawingml/2006/main">
+        <a:graphic>
           <a:graphicData uri="http://schemas.openxmlformats.org/drawingml/2006/chart">
-            <c:chart xmlns:c="http://schemas.openxmlformats.org/drawingml/2006/chart" r:id="rId1"/>
+            <c:chart xmlns:c="http://schemas.openxmlformats.org/drawingml/2006/chart" xmlns:r="http://schemas.openxmlformats.org/officeDocument/2006/relationships" r:id="rId3"/>
           </a:graphicData>
         </a:graphic>
       </p:graphicFrame>
@@ -14081,14 +13503,14 @@
           <a:bodyPr wrap="square" lIns="0" tIns="0" rIns="0" bIns="0" rtlCol="0" anchor="ctr"/>
           <a:lstStyle/>
           <a:p>
-            <a:pPr indent="0" marL="0">
+            <a:pPr marL="0" indent="0">
               <a:lnSpc>
                 <a:spcPts val="1656"/>
               </a:lnSpc>
               <a:buNone/>
             </a:pPr>
             <a:r>
-              <a:rPr lang="en-US" sz="1000" b="1" spc="130" kern="0" dirty="0">
+              <a:rPr lang="en-US" sz="1000" b="1" kern="0" spc="130" dirty="0">
                 <a:solidFill>
                   <a:srgbClr val="E6115E"/>
                 </a:solidFill>
@@ -14098,12 +13520,6 @@
               </a:rPr>
               <a:t>ANALOGÍA   </a:t>
             </a:r>
-            <a:pPr indent="0" marL="0">
-              <a:lnSpc>
-                <a:spcPts val="1656"/>
-              </a:lnSpc>
-              <a:buNone/>
-            </a:pPr>
             <a:r>
               <a:rPr lang="en-US" sz="1200" dirty="0">
                 <a:solidFill>
@@ -14140,7 +13556,7 @@
           <a:bodyPr wrap="square" lIns="0" tIns="0" rIns="0" bIns="0" rtlCol="0" anchor="ctr"/>
           <a:lstStyle/>
           <a:p>
-            <a:pPr indent="0" marL="0">
+            <a:pPr marL="0" indent="0">
               <a:buNone/>
             </a:pPr>
             <a:r>
@@ -14179,7 +13595,7 @@
           <a:bodyPr wrap="square" lIns="0" tIns="0" rIns="0" bIns="0" rtlCol="0" anchor="ctr"/>
           <a:lstStyle/>
           <a:p>
-            <a:pPr algn="r" indent="0" marL="0">
+            <a:pPr marL="0" indent="0" algn="r">
               <a:buNone/>
             </a:pPr>
             <a:r>
@@ -14213,6 +13629,7 @@
         <a:solidFill>
           <a:srgbClr val="F5F7FB"/>
         </a:solidFill>
+        <a:effectLst/>
       </p:bgPr>
     </p:bg>
     <p:spTree>
@@ -14277,11 +13694,11 @@
           <a:bodyPr wrap="square" lIns="0" tIns="0" rIns="0" bIns="0" rtlCol="0" anchor="ctr"/>
           <a:lstStyle/>
           <a:p>
-            <a:pPr algn="ctr" indent="0" marL="0">
-              <a:buNone/>
-            </a:pPr>
-            <a:r>
-              <a:rPr lang="en-US" sz="1150" b="1" spc="120" kern="0" dirty="0">
+            <a:pPr marL="0" indent="0" algn="ctr">
+              <a:buNone/>
+            </a:pPr>
+            <a:r>
+              <a:rPr lang="en-US" sz="1150" b="1" kern="0" spc="120" dirty="0">
                 <a:solidFill>
                   <a:srgbClr val="FFFFFF"/>
                 </a:solidFill>
@@ -14316,7 +13733,7 @@
           <a:bodyPr wrap="square" lIns="0" tIns="0" rIns="0" bIns="0" rtlCol="0" anchor="ctr"/>
           <a:lstStyle/>
           <a:p>
-            <a:pPr indent="0" marL="0">
+            <a:pPr marL="0" indent="0">
               <a:buNone/>
             </a:pPr>
             <a:r>
@@ -14355,7 +13772,7 @@
           <a:bodyPr wrap="square" lIns="0" tIns="0" rIns="0" bIns="0" rtlCol="0" anchor="ctr"/>
           <a:lstStyle/>
           <a:p>
-            <a:pPr indent="0" marL="0">
+            <a:pPr marL="0" indent="0">
               <a:buNone/>
             </a:pPr>
             <a:r>
@@ -14375,7 +13792,7 @@
       </p:sp>
       <p:graphicFrame>
         <p:nvGraphicFramePr>
-          <p:cNvPr id="6" name="Chart 0" descr=""/>
+          <p:cNvPr id="6" name="Chart 0"/>
           <p:cNvGraphicFramePr/>
           <p:nvPr/>
         </p:nvGraphicFramePr>
@@ -14383,9 +13800,9 @@
           <a:off x="548640" y="1828800"/>
           <a:ext cx="6492240" cy="2926080"/>
         </p:xfrm>
-        <a:graphic xmlns:a="http://schemas.openxmlformats.org/drawingml/2006/main">
+        <a:graphic>
           <a:graphicData uri="http://schemas.openxmlformats.org/drawingml/2006/chart">
-            <c:chart xmlns:c="http://schemas.openxmlformats.org/drawingml/2006/chart" r:id="rId1"/>
+            <c:chart xmlns:c="http://schemas.openxmlformats.org/drawingml/2006/chart" xmlns:r="http://schemas.openxmlformats.org/officeDocument/2006/relationships" r:id="rId3"/>
           </a:graphicData>
         </a:graphic>
       </p:graphicFrame>
@@ -14437,7 +13854,7 @@
           <a:bodyPr wrap="square" lIns="0" tIns="0" rIns="0" bIns="0" rtlCol="0" anchor="ctr"/>
           <a:lstStyle/>
           <a:p>
-            <a:pPr algn="ctr" indent="0" marL="0">
+            <a:pPr marL="0" indent="0" algn="ctr">
               <a:buNone/>
             </a:pPr>
             <a:r>
@@ -14476,7 +13893,7 @@
           <a:bodyPr wrap="square" lIns="0" tIns="0" rIns="0" bIns="0" rtlCol="0" anchor="t"/>
           <a:lstStyle/>
           <a:p>
-            <a:pPr algn="ctr" indent="0" marL="0">
+            <a:pPr marL="0" indent="0" algn="ctr">
               <a:lnSpc>
                 <a:spcPts val="1300"/>
               </a:lnSpc>
@@ -14545,7 +13962,7 @@
           <a:bodyPr wrap="square" lIns="0" tIns="0" rIns="0" bIns="0" rtlCol="0" anchor="ctr"/>
           <a:lstStyle/>
           <a:p>
-            <a:pPr algn="ctr" indent="0" marL="0">
+            <a:pPr marL="0" indent="0" algn="ctr">
               <a:buNone/>
             </a:pPr>
             <a:r>
@@ -14584,7 +14001,7 @@
           <a:bodyPr wrap="square" lIns="0" tIns="0" rIns="0" bIns="0" rtlCol="0" anchor="t"/>
           <a:lstStyle/>
           <a:p>
-            <a:pPr algn="ctr" indent="0" marL="0">
+            <a:pPr marL="0" indent="0" algn="ctr">
               <a:lnSpc>
                 <a:spcPts val="1300"/>
               </a:lnSpc>
@@ -14653,7 +14070,7 @@
           <a:bodyPr wrap="square" lIns="0" tIns="0" rIns="0" bIns="0" rtlCol="0" anchor="ctr"/>
           <a:lstStyle/>
           <a:p>
-            <a:pPr algn="ctr" indent="0" marL="0">
+            <a:pPr marL="0" indent="0" algn="ctr">
               <a:buNone/>
             </a:pPr>
             <a:r>
@@ -14692,7 +14109,7 @@
           <a:bodyPr wrap="square" lIns="0" tIns="0" rIns="0" bIns="0" rtlCol="0" anchor="t"/>
           <a:lstStyle/>
           <a:p>
-            <a:pPr algn="ctr" indent="0" marL="0">
+            <a:pPr marL="0" indent="0" algn="ctr">
               <a:lnSpc>
                 <a:spcPts val="1300"/>
               </a:lnSpc>
@@ -14761,7 +14178,7 @@
           <a:bodyPr wrap="square" lIns="0" tIns="0" rIns="0" bIns="0" rtlCol="0" anchor="ctr"/>
           <a:lstStyle/>
           <a:p>
-            <a:pPr algn="ctr" indent="0" marL="0">
+            <a:pPr marL="0" indent="0" algn="ctr">
               <a:buNone/>
             </a:pPr>
             <a:r>
@@ -14800,7 +14217,7 @@
           <a:bodyPr wrap="square" lIns="0" tIns="0" rIns="0" bIns="0" rtlCol="0" anchor="t"/>
           <a:lstStyle/>
           <a:p>
-            <a:pPr algn="ctr" indent="0" marL="0">
+            <a:pPr marL="0" indent="0" algn="ctr">
               <a:lnSpc>
                 <a:spcPts val="1300"/>
               </a:lnSpc>
@@ -14869,7 +14286,7 @@
           <a:bodyPr wrap="square" lIns="0" tIns="0" rIns="0" bIns="0" rtlCol="0" anchor="ctr"/>
           <a:lstStyle/>
           <a:p>
-            <a:pPr indent="0" marL="0">
+            <a:pPr marL="0" indent="0">
               <a:buNone/>
             </a:pPr>
             <a:r>
@@ -14908,7 +14325,7 @@
           <a:bodyPr wrap="square" lIns="0" tIns="0" rIns="0" bIns="0" rtlCol="0" anchor="t"/>
           <a:lstStyle/>
           <a:p>
-            <a:pPr indent="0" marL="0">
+            <a:pPr marL="0" indent="0">
               <a:lnSpc>
                 <a:spcPts val="1450"/>
               </a:lnSpc>
@@ -14950,7 +14367,7 @@
           <a:bodyPr wrap="square" lIns="0" tIns="0" rIns="0" bIns="0" rtlCol="0" anchor="ctr"/>
           <a:lstStyle/>
           <a:p>
-            <a:pPr indent="0" marL="0">
+            <a:pPr marL="0" indent="0">
               <a:buNone/>
             </a:pPr>
             <a:r>
@@ -14989,7 +14406,7 @@
           <a:bodyPr wrap="square" lIns="0" tIns="0" rIns="0" bIns="0" rtlCol="0" anchor="ctr"/>
           <a:lstStyle/>
           <a:p>
-            <a:pPr indent="0" marL="0">
+            <a:pPr marL="0" indent="0">
               <a:buNone/>
             </a:pPr>
             <a:r>
@@ -15028,7 +14445,7 @@
           <a:bodyPr wrap="square" lIns="0" tIns="0" rIns="0" bIns="0" rtlCol="0" anchor="ctr"/>
           <a:lstStyle/>
           <a:p>
-            <a:pPr algn="r" indent="0" marL="0">
+            <a:pPr marL="0" indent="0" algn="r">
               <a:buNone/>
             </a:pPr>
             <a:r>
@@ -15062,6 +14479,7 @@
         <a:solidFill>
           <a:srgbClr val="F5F7FB"/>
         </a:solidFill>
+        <a:effectLst/>
       </p:bgPr>
     </p:bg>
     <p:spTree>
@@ -15099,7 +14517,7 @@
           <a:bodyPr wrap="square" lIns="0" tIns="0" rIns="0" bIns="0" rtlCol="0" anchor="ctr"/>
           <a:lstStyle/>
           <a:p>
-            <a:pPr indent="0" marL="0">
+            <a:pPr marL="0" indent="0">
               <a:buNone/>
             </a:pPr>
             <a:r>
@@ -15138,7 +14556,7 @@
           <a:bodyPr wrap="square" lIns="0" tIns="0" rIns="0" bIns="0" rtlCol="0" anchor="ctr"/>
           <a:lstStyle/>
           <a:p>
-            <a:pPr indent="0" marL="0">
+            <a:pPr marL="0" indent="0">
               <a:buNone/>
             </a:pPr>
             <a:r>
@@ -15231,7 +14649,7 @@
           <a:bodyPr wrap="square" lIns="0" tIns="0" rIns="0" bIns="0" rtlCol="0" anchor="ctr"/>
           <a:lstStyle/>
           <a:p>
-            <a:pPr algn="ctr" indent="0" marL="0">
+            <a:pPr marL="0" indent="0" algn="ctr">
               <a:buNone/>
             </a:pPr>
             <a:r>
@@ -15297,7 +14715,7 @@
           <a:bodyPr wrap="square" lIns="0" tIns="0" rIns="0" bIns="0" rtlCol="0" anchor="ctr"/>
           <a:lstStyle/>
           <a:p>
-            <a:pPr indent="0" marL="0">
+            <a:pPr marL="0" indent="0">
               <a:buNone/>
             </a:pPr>
             <a:r>
@@ -15336,7 +14754,7 @@
           <a:bodyPr wrap="square" lIns="0" tIns="0" rIns="0" bIns="0" rtlCol="0" anchor="ctr"/>
           <a:lstStyle/>
           <a:p>
-            <a:pPr indent="0" marL="0">
+            <a:pPr marL="0" indent="0">
               <a:buNone/>
             </a:pPr>
             <a:r>
@@ -15523,7 +14941,7 @@
           <a:bodyPr wrap="square" lIns="0" tIns="0" rIns="0" bIns="0" rtlCol="0" anchor="ctr"/>
           <a:lstStyle/>
           <a:p>
-            <a:pPr algn="ctr" indent="0" marL="0">
+            <a:pPr marL="0" indent="0" algn="ctr">
               <a:buNone/>
             </a:pPr>
             <a:r>
@@ -15589,7 +15007,7 @@
           <a:bodyPr wrap="square" lIns="0" tIns="0" rIns="0" bIns="0" rtlCol="0" anchor="ctr"/>
           <a:lstStyle/>
           <a:p>
-            <a:pPr indent="0" marL="0">
+            <a:pPr marL="0" indent="0">
               <a:buNone/>
             </a:pPr>
             <a:r>
@@ -15628,7 +15046,7 @@
           <a:bodyPr wrap="square" lIns="0" tIns="0" rIns="0" bIns="0" rtlCol="0" anchor="ctr"/>
           <a:lstStyle/>
           <a:p>
-            <a:pPr indent="0" marL="0">
+            <a:pPr marL="0" indent="0">
               <a:buNone/>
             </a:pPr>
             <a:r>
@@ -15815,7 +15233,7 @@
           <a:bodyPr wrap="square" lIns="0" tIns="0" rIns="0" bIns="0" rtlCol="0" anchor="ctr"/>
           <a:lstStyle/>
           <a:p>
-            <a:pPr algn="ctr" indent="0" marL="0">
+            <a:pPr marL="0" indent="0" algn="ctr">
               <a:buNone/>
             </a:pPr>
             <a:r>
@@ -15881,7 +15299,7 @@
           <a:bodyPr wrap="square" lIns="0" tIns="0" rIns="0" bIns="0" rtlCol="0" anchor="ctr"/>
           <a:lstStyle/>
           <a:p>
-            <a:pPr indent="0" marL="0">
+            <a:pPr marL="0" indent="0">
               <a:buNone/>
             </a:pPr>
             <a:r>
@@ -15920,7 +15338,7 @@
           <a:bodyPr wrap="square" lIns="0" tIns="0" rIns="0" bIns="0" rtlCol="0" anchor="ctr"/>
           <a:lstStyle/>
           <a:p>
-            <a:pPr indent="0" marL="0">
+            <a:pPr marL="0" indent="0">
               <a:buNone/>
             </a:pPr>
             <a:r>
@@ -16107,14 +15525,14 @@
           <a:bodyPr wrap="square" lIns="0" tIns="0" rIns="0" bIns="0" rtlCol="0" anchor="ctr"/>
           <a:lstStyle/>
           <a:p>
-            <a:pPr indent="0" marL="0">
+            <a:pPr marL="0" indent="0">
               <a:lnSpc>
                 <a:spcPts val="1656"/>
               </a:lnSpc>
               <a:buNone/>
             </a:pPr>
             <a:r>
-              <a:rPr lang="en-US" sz="1000" b="1" spc="130" kern="0" dirty="0">
+              <a:rPr lang="en-US" sz="1000" b="1" kern="0" spc="130" dirty="0">
                 <a:solidFill>
                   <a:srgbClr val="E6115E"/>
                 </a:solidFill>
@@ -16124,12 +15542,6 @@
               </a:rPr>
               <a:t>ANALOGÍA   </a:t>
             </a:r>
-            <a:pPr indent="0" marL="0">
-              <a:lnSpc>
-                <a:spcPts val="1656"/>
-              </a:lnSpc>
-              <a:buNone/>
-            </a:pPr>
             <a:r>
               <a:rPr lang="en-US" sz="1200" dirty="0">
                 <a:solidFill>
@@ -16166,7 +15578,7 @@
           <a:bodyPr wrap="square" lIns="0" tIns="0" rIns="0" bIns="0" rtlCol="0" anchor="ctr"/>
           <a:lstStyle/>
           <a:p>
-            <a:pPr indent="0" marL="0">
+            <a:pPr marL="0" indent="0">
               <a:buNone/>
             </a:pPr>
             <a:r>
@@ -16205,7 +15617,7 @@
           <a:bodyPr wrap="square" lIns="0" tIns="0" rIns="0" bIns="0" rtlCol="0" anchor="ctr"/>
           <a:lstStyle/>
           <a:p>
-            <a:pPr algn="r" indent="0" marL="0">
+            <a:pPr marL="0" indent="0" algn="r">
               <a:buNone/>
             </a:pPr>
             <a:r>
@@ -16239,6 +15651,7 @@
         <a:solidFill>
           <a:srgbClr val="F5F7FB"/>
         </a:solidFill>
+        <a:effectLst/>
       </p:bgPr>
     </p:bg>
     <p:spTree>
@@ -16276,7 +15689,7 @@
           <a:bodyPr wrap="square" lIns="0" tIns="0" rIns="0" bIns="0" rtlCol="0" anchor="ctr"/>
           <a:lstStyle/>
           <a:p>
-            <a:pPr indent="0" marL="0">
+            <a:pPr marL="0" indent="0">
               <a:buNone/>
             </a:pPr>
             <a:r>
@@ -16315,7 +15728,7 @@
           <a:bodyPr wrap="square" lIns="0" tIns="0" rIns="0" bIns="0" rtlCol="0" anchor="ctr"/>
           <a:lstStyle/>
           <a:p>
-            <a:pPr indent="0" marL="0">
+            <a:pPr marL="0" indent="0">
               <a:buNone/>
             </a:pPr>
             <a:r>
@@ -16408,7 +15821,7 @@
           <a:bodyPr wrap="square" lIns="0" tIns="0" rIns="0" bIns="0" rtlCol="0" anchor="ctr"/>
           <a:lstStyle/>
           <a:p>
-            <a:pPr indent="0" marL="0">
+            <a:pPr marL="0" indent="0">
               <a:buNone/>
             </a:pPr>
             <a:r>
@@ -16474,7 +15887,7 @@
           <a:bodyPr wrap="square" lIns="0" tIns="0" rIns="0" bIns="0" rtlCol="0" anchor="ctr"/>
           <a:lstStyle/>
           <a:p>
-            <a:pPr algn="ctr" indent="0" marL="0">
+            <a:pPr marL="0" indent="0" algn="ctr">
               <a:buNone/>
             </a:pPr>
             <a:r>
@@ -16513,7 +15926,7 @@
           <a:bodyPr wrap="square" lIns="0" tIns="0" rIns="0" bIns="0" rtlCol="0" anchor="ctr"/>
           <a:lstStyle/>
           <a:p>
-            <a:pPr indent="0" marL="0">
+            <a:pPr marL="0" indent="0">
               <a:buNone/>
             </a:pPr>
             <a:r>
@@ -16579,11 +15992,11 @@
           <a:bodyPr wrap="square" lIns="0" tIns="0" rIns="0" bIns="0" rtlCol="0" anchor="ctr"/>
           <a:lstStyle/>
           <a:p>
-            <a:pPr algn="ctr" indent="0" marL="0">
-              <a:buNone/>
-            </a:pPr>
-            <a:r>
-              <a:rPr lang="en-US" sz="1050" b="1" spc="100" kern="0" dirty="0">
+            <a:pPr marL="0" indent="0" algn="ctr">
+              <a:buNone/>
+            </a:pPr>
+            <a:r>
+              <a:rPr lang="en-US" sz="1050" b="1" kern="0" spc="100" dirty="0">
                 <a:solidFill>
                   <a:srgbClr val="5B6B87"/>
                 </a:solidFill>
@@ -16618,7 +16031,7 @@
           <a:bodyPr wrap="square" lIns="0" tIns="0" rIns="0" bIns="0" rtlCol="0" anchor="ctr"/>
           <a:lstStyle/>
           <a:p>
-            <a:pPr algn="ctr" indent="0" marL="0">
+            <a:pPr marL="0" indent="0" algn="ctr">
               <a:buNone/>
             </a:pPr>
             <a:r>
@@ -16684,11 +16097,11 @@
           <a:bodyPr wrap="square" lIns="0" tIns="0" rIns="0" bIns="0" rtlCol="0" anchor="ctr"/>
           <a:lstStyle/>
           <a:p>
-            <a:pPr algn="ctr" indent="0" marL="0">
-              <a:buNone/>
-            </a:pPr>
-            <a:r>
-              <a:rPr lang="en-US" sz="1050" b="1" spc="100" kern="0" dirty="0">
+            <a:pPr marL="0" indent="0" algn="ctr">
+              <a:buNone/>
+            </a:pPr>
+            <a:r>
+              <a:rPr lang="en-US" sz="1050" b="1" kern="0" spc="100" dirty="0">
                 <a:solidFill>
                   <a:srgbClr val="5B6B87"/>
                 </a:solidFill>
@@ -16723,7 +16136,7 @@
           <a:bodyPr wrap="square" lIns="0" tIns="0" rIns="0" bIns="0" rtlCol="0" anchor="ctr"/>
           <a:lstStyle/>
           <a:p>
-            <a:pPr algn="ctr" indent="0" marL="0">
+            <a:pPr marL="0" indent="0" algn="ctr">
               <a:buNone/>
             </a:pPr>
             <a:r>
@@ -16789,7 +16202,7 @@
           <a:bodyPr wrap="square" lIns="0" tIns="0" rIns="0" bIns="0" rtlCol="0" anchor="ctr"/>
           <a:lstStyle/>
           <a:p>
-            <a:pPr indent="0" marL="0">
+            <a:pPr marL="0" indent="0">
               <a:buNone/>
             </a:pPr>
             <a:r>
@@ -16828,7 +16241,7 @@
           <a:bodyPr wrap="square" lIns="0" tIns="0" rIns="0" bIns="0" rtlCol="0" anchor="ctr"/>
           <a:lstStyle/>
           <a:p>
-            <a:pPr indent="0" marL="0">
+            <a:pPr marL="0" indent="0">
               <a:lnSpc>
                 <a:spcPts val="1550"/>
               </a:lnSpc>
@@ -16851,7 +16264,7 @@
       </p:sp>
       <p:graphicFrame>
         <p:nvGraphicFramePr>
-          <p:cNvPr id="19" name="Chart 0" descr=""/>
+          <p:cNvPr id="19" name="Chart 0"/>
           <p:cNvGraphicFramePr/>
           <p:nvPr/>
         </p:nvGraphicFramePr>
@@ -16859,9 +16272,9 @@
           <a:off x="5806440" y="1920240"/>
           <a:ext cx="5806440" cy="2834640"/>
         </p:xfrm>
-        <a:graphic xmlns:a="http://schemas.openxmlformats.org/drawingml/2006/main">
+        <a:graphic>
           <a:graphicData uri="http://schemas.openxmlformats.org/drawingml/2006/chart">
-            <c:chart xmlns:c="http://schemas.openxmlformats.org/drawingml/2006/chart" r:id="rId1"/>
+            <c:chart xmlns:c="http://schemas.openxmlformats.org/drawingml/2006/chart" xmlns:r="http://schemas.openxmlformats.org/officeDocument/2006/relationships" r:id="rId3"/>
           </a:graphicData>
         </a:graphic>
       </p:graphicFrame>
@@ -16940,14 +16353,14 @@
           <a:bodyPr wrap="square" lIns="0" tIns="0" rIns="0" bIns="0" rtlCol="0" anchor="ctr"/>
           <a:lstStyle/>
           <a:p>
-            <a:pPr indent="0" marL="0">
+            <a:pPr marL="0" indent="0">
               <a:lnSpc>
                 <a:spcPts val="1656"/>
               </a:lnSpc>
               <a:buNone/>
             </a:pPr>
             <a:r>
-              <a:rPr lang="en-US" sz="1000" b="1" spc="130" kern="0" dirty="0">
+              <a:rPr lang="en-US" sz="1000" b="1" kern="0" spc="130" dirty="0">
                 <a:solidFill>
                   <a:srgbClr val="E6115E"/>
                 </a:solidFill>
@@ -16957,12 +16370,6 @@
               </a:rPr>
               <a:t>ANALOGÍA   </a:t>
             </a:r>
-            <a:pPr indent="0" marL="0">
-              <a:lnSpc>
-                <a:spcPts val="1656"/>
-              </a:lnSpc>
-              <a:buNone/>
-            </a:pPr>
             <a:r>
               <a:rPr lang="en-US" sz="1200" dirty="0">
                 <a:solidFill>
@@ -16999,7 +16406,7 @@
           <a:bodyPr wrap="square" lIns="0" tIns="0" rIns="0" bIns="0" rtlCol="0" anchor="ctr"/>
           <a:lstStyle/>
           <a:p>
-            <a:pPr indent="0" marL="0">
+            <a:pPr marL="0" indent="0">
               <a:buNone/>
             </a:pPr>
             <a:r>
@@ -17038,7 +16445,7 @@
           <a:bodyPr wrap="square" lIns="0" tIns="0" rIns="0" bIns="0" rtlCol="0" anchor="ctr"/>
           <a:lstStyle/>
           <a:p>
-            <a:pPr algn="r" indent="0" marL="0">
+            <a:pPr marL="0" indent="0" algn="r">
               <a:buNone/>
             </a:pPr>
             <a:r>
@@ -17072,6 +16479,7 @@
         <a:solidFill>
           <a:srgbClr val="F5F7FB"/>
         </a:solidFill>
+        <a:effectLst/>
       </p:bgPr>
     </p:bg>
     <p:spTree>
@@ -17109,7 +16517,7 @@
           <a:bodyPr wrap="square" lIns="0" tIns="0" rIns="0" bIns="0" rtlCol="0" anchor="ctr"/>
           <a:lstStyle/>
           <a:p>
-            <a:pPr indent="0" marL="0">
+            <a:pPr marL="0" indent="0">
               <a:buNone/>
             </a:pPr>
             <a:r>
@@ -17148,7 +16556,7 @@
           <a:bodyPr wrap="square" lIns="0" tIns="0" rIns="0" bIns="0" rtlCol="0" anchor="ctr"/>
           <a:lstStyle/>
           <a:p>
-            <a:pPr indent="0" marL="0">
+            <a:pPr marL="0" indent="0">
               <a:buNone/>
             </a:pPr>
             <a:r>
@@ -17214,7 +16622,7 @@
           <a:bodyPr wrap="square" lIns="0" tIns="0" rIns="0" bIns="0" rtlCol="0" anchor="ctr"/>
           <a:lstStyle/>
           <a:p>
-            <a:pPr indent="0" marL="0">
+            <a:pPr marL="0" indent="0">
               <a:buNone/>
             </a:pPr>
             <a:r>
@@ -17253,7 +16661,7 @@
           <a:bodyPr wrap="square" lIns="0" tIns="0" rIns="0" bIns="0" rtlCol="0" anchor="ctr"/>
           <a:lstStyle/>
           <a:p>
-            <a:pPr indent="0" marL="0">
+            <a:pPr marL="0" indent="0">
               <a:buNone/>
             </a:pPr>
             <a:r>
@@ -17292,7 +16700,7 @@
           <a:bodyPr wrap="square" lIns="0" tIns="0" rIns="0" bIns="0" rtlCol="0" anchor="ctr"/>
           <a:lstStyle/>
           <a:p>
-            <a:pPr indent="0" marL="0">
+            <a:pPr marL="0" indent="0">
               <a:buNone/>
             </a:pPr>
             <a:r>
@@ -17331,7 +16739,7 @@
           <a:bodyPr wrap="square" lIns="0" tIns="0" rIns="0" bIns="0" rtlCol="0" anchor="ctr"/>
           <a:lstStyle/>
           <a:p>
-            <a:pPr indent="0" marL="0">
+            <a:pPr marL="0" indent="0">
               <a:buNone/>
             </a:pPr>
             <a:r>
@@ -17370,7 +16778,7 @@
           <a:bodyPr wrap="square" lIns="0" tIns="0" rIns="0" bIns="0" rtlCol="0" anchor="ctr"/>
           <a:lstStyle/>
           <a:p>
-            <a:pPr indent="0" marL="0">
+            <a:pPr marL="0" indent="0">
               <a:buNone/>
             </a:pPr>
             <a:r>
@@ -17436,7 +16844,7 @@
           <a:bodyPr wrap="square" lIns="0" tIns="0" rIns="0" bIns="0" rtlCol="0" anchor="ctr"/>
           <a:lstStyle/>
           <a:p>
-            <a:pPr indent="0" marL="0">
+            <a:pPr marL="0" indent="0">
               <a:buNone/>
             </a:pPr>
             <a:r>
@@ -17475,7 +16883,7 @@
           <a:bodyPr wrap="square" lIns="0" tIns="0" rIns="0" bIns="0" rtlCol="0" anchor="ctr"/>
           <a:lstStyle/>
           <a:p>
-            <a:pPr indent="0" marL="0">
+            <a:pPr marL="0" indent="0">
               <a:buNone/>
             </a:pPr>
             <a:r>
@@ -17514,7 +16922,7 @@
           <a:bodyPr wrap="square" lIns="0" tIns="0" rIns="0" bIns="0" rtlCol="0" anchor="ctr"/>
           <a:lstStyle/>
           <a:p>
-            <a:pPr indent="0" marL="0">
+            <a:pPr marL="0" indent="0">
               <a:buNone/>
             </a:pPr>
             <a:r>
@@ -17553,7 +16961,7 @@
           <a:bodyPr wrap="square" lIns="0" tIns="0" rIns="0" bIns="0" rtlCol="0" anchor="ctr"/>
           <a:lstStyle/>
           <a:p>
-            <a:pPr indent="0" marL="0">
+            <a:pPr marL="0" indent="0">
               <a:buNone/>
             </a:pPr>
             <a:r>
@@ -17592,7 +17000,7 @@
           <a:bodyPr wrap="square" lIns="0" tIns="0" rIns="0" bIns="0" rtlCol="0" anchor="ctr"/>
           <a:lstStyle/>
           <a:p>
-            <a:pPr indent="0" marL="0">
+            <a:pPr marL="0" indent="0">
               <a:buNone/>
             </a:pPr>
             <a:r>
@@ -17631,7 +17039,7 @@
           <a:bodyPr wrap="square" lIns="0" tIns="0" rIns="0" bIns="0" rtlCol="0" anchor="ctr"/>
           <a:lstStyle/>
           <a:p>
-            <a:pPr indent="0" marL="0">
+            <a:pPr marL="0" indent="0">
               <a:buNone/>
             </a:pPr>
             <a:r>
@@ -17670,7 +17078,7 @@
           <a:bodyPr wrap="square" lIns="0" tIns="0" rIns="0" bIns="0" rtlCol="0" anchor="ctr"/>
           <a:lstStyle/>
           <a:p>
-            <a:pPr indent="0" marL="0">
+            <a:pPr marL="0" indent="0">
               <a:buNone/>
             </a:pPr>
             <a:r>
@@ -17709,7 +17117,7 @@
           <a:bodyPr wrap="square" lIns="0" tIns="0" rIns="0" bIns="0" rtlCol="0" anchor="ctr"/>
           <a:lstStyle/>
           <a:p>
-            <a:pPr indent="0" marL="0">
+            <a:pPr marL="0" indent="0">
               <a:buNone/>
             </a:pPr>
             <a:r>
@@ -17748,7 +17156,7 @@
           <a:bodyPr wrap="square" lIns="0" tIns="0" rIns="0" bIns="0" rtlCol="0" anchor="ctr"/>
           <a:lstStyle/>
           <a:p>
-            <a:pPr indent="0" marL="0">
+            <a:pPr marL="0" indent="0">
               <a:buNone/>
             </a:pPr>
             <a:r>
@@ -17787,7 +17195,7 @@
           <a:bodyPr wrap="square" lIns="0" tIns="0" rIns="0" bIns="0" rtlCol="0" anchor="ctr"/>
           <a:lstStyle/>
           <a:p>
-            <a:pPr indent="0" marL="0">
+            <a:pPr marL="0" indent="0">
               <a:buNone/>
             </a:pPr>
             <a:r>
@@ -17853,7 +17261,7 @@
           <a:bodyPr wrap="square" lIns="0" tIns="0" rIns="0" bIns="0" rtlCol="0" anchor="ctr"/>
           <a:lstStyle/>
           <a:p>
-            <a:pPr indent="0" marL="0">
+            <a:pPr marL="0" indent="0">
               <a:buNone/>
             </a:pPr>
             <a:r>
@@ -17892,7 +17300,7 @@
           <a:bodyPr wrap="square" lIns="0" tIns="0" rIns="0" bIns="0" rtlCol="0" anchor="ctr"/>
           <a:lstStyle/>
           <a:p>
-            <a:pPr indent="0" marL="0">
+            <a:pPr marL="0" indent="0">
               <a:buNone/>
             </a:pPr>
             <a:r>
@@ -17931,7 +17339,7 @@
           <a:bodyPr wrap="square" lIns="0" tIns="0" rIns="0" bIns="0" rtlCol="0" anchor="ctr"/>
           <a:lstStyle/>
           <a:p>
-            <a:pPr indent="0" marL="0">
+            <a:pPr marL="0" indent="0">
               <a:buNone/>
             </a:pPr>
             <a:r>
@@ -17970,7 +17378,7 @@
           <a:bodyPr wrap="square" lIns="0" tIns="0" rIns="0" bIns="0" rtlCol="0" anchor="ctr"/>
           <a:lstStyle/>
           <a:p>
-            <a:pPr indent="0" marL="0">
+            <a:pPr marL="0" indent="0">
               <a:buNone/>
             </a:pPr>
             <a:r>
@@ -18009,7 +17417,7 @@
           <a:bodyPr wrap="square" lIns="0" tIns="0" rIns="0" bIns="0" rtlCol="0" anchor="ctr"/>
           <a:lstStyle/>
           <a:p>
-            <a:pPr indent="0" marL="0">
+            <a:pPr marL="0" indent="0">
               <a:buNone/>
             </a:pPr>
             <a:r>
@@ -18048,7 +17456,7 @@
           <a:bodyPr wrap="square" lIns="0" tIns="0" rIns="0" bIns="0" rtlCol="0" anchor="ctr"/>
           <a:lstStyle/>
           <a:p>
-            <a:pPr indent="0" marL="0">
+            <a:pPr marL="0" indent="0">
               <a:buNone/>
             </a:pPr>
             <a:r>
@@ -18087,7 +17495,7 @@
           <a:bodyPr wrap="square" lIns="0" tIns="0" rIns="0" bIns="0" rtlCol="0" anchor="ctr"/>
           <a:lstStyle/>
           <a:p>
-            <a:pPr indent="0" marL="0">
+            <a:pPr marL="0" indent="0">
               <a:buNone/>
             </a:pPr>
             <a:r>
@@ -18126,7 +17534,7 @@
           <a:bodyPr wrap="square" lIns="0" tIns="0" rIns="0" bIns="0" rtlCol="0" anchor="ctr"/>
           <a:lstStyle/>
           <a:p>
-            <a:pPr indent="0" marL="0">
+            <a:pPr marL="0" indent="0">
               <a:buNone/>
             </a:pPr>
             <a:r>
@@ -18165,7 +17573,7 @@
           <a:bodyPr wrap="square" lIns="0" tIns="0" rIns="0" bIns="0" rtlCol="0" anchor="ctr"/>
           <a:lstStyle/>
           <a:p>
-            <a:pPr indent="0" marL="0">
+            <a:pPr marL="0" indent="0">
               <a:buNone/>
             </a:pPr>
             <a:r>
@@ -18204,7 +17612,7 @@
           <a:bodyPr wrap="square" lIns="0" tIns="0" rIns="0" bIns="0" rtlCol="0" anchor="ctr"/>
           <a:lstStyle/>
           <a:p>
-            <a:pPr indent="0" marL="0">
+            <a:pPr marL="0" indent="0">
               <a:buNone/>
             </a:pPr>
             <a:r>
@@ -18270,7 +17678,7 @@
           <a:bodyPr wrap="square" lIns="0" tIns="0" rIns="0" bIns="0" rtlCol="0" anchor="ctr"/>
           <a:lstStyle/>
           <a:p>
-            <a:pPr indent="0" marL="0">
+            <a:pPr marL="0" indent="0">
               <a:buNone/>
             </a:pPr>
             <a:r>
@@ -18309,7 +17717,7 @@
           <a:bodyPr wrap="square" lIns="0" tIns="0" rIns="0" bIns="0" rtlCol="0" anchor="ctr"/>
           <a:lstStyle/>
           <a:p>
-            <a:pPr indent="0" marL="0">
+            <a:pPr marL="0" indent="0">
               <a:buNone/>
             </a:pPr>
             <a:r>
@@ -18348,7 +17756,7 @@
           <a:bodyPr wrap="square" lIns="0" tIns="0" rIns="0" bIns="0" rtlCol="0" anchor="ctr"/>
           <a:lstStyle/>
           <a:p>
-            <a:pPr indent="0" marL="0">
+            <a:pPr marL="0" indent="0">
               <a:buNone/>
             </a:pPr>
             <a:r>
@@ -18387,7 +17795,7 @@
           <a:bodyPr wrap="square" lIns="0" tIns="0" rIns="0" bIns="0" rtlCol="0" anchor="ctr"/>
           <a:lstStyle/>
           <a:p>
-            <a:pPr algn="r" indent="0" marL="0">
+            <a:pPr marL="0" indent="0" algn="r">
               <a:buNone/>
             </a:pPr>
             <a:r>
@@ -18421,6 +17829,7 @@
         <a:solidFill>
           <a:srgbClr val="F5F7FB"/>
         </a:solidFill>
+        <a:effectLst/>
       </p:bgPr>
     </p:bg>
     <p:spTree>
@@ -18458,7 +17867,7 @@
           <a:bodyPr wrap="square" lIns="0" tIns="0" rIns="0" bIns="0" rtlCol="0" anchor="ctr"/>
           <a:lstStyle/>
           <a:p>
-            <a:pPr indent="0" marL="0">
+            <a:pPr marL="0" indent="0">
               <a:buNone/>
             </a:pPr>
             <a:r>
@@ -18497,7 +17906,7 @@
           <a:bodyPr wrap="square" lIns="0" tIns="0" rIns="0" bIns="0" rtlCol="0" anchor="ctr"/>
           <a:lstStyle/>
           <a:p>
-            <a:pPr indent="0" marL="0">
+            <a:pPr marL="0" indent="0">
               <a:buNone/>
             </a:pPr>
             <a:r>
@@ -18590,7 +17999,7 @@
           <a:bodyPr wrap="square" lIns="0" tIns="0" rIns="0" bIns="0" rtlCol="0" anchor="ctr"/>
           <a:lstStyle/>
           <a:p>
-            <a:pPr algn="ctr" indent="0" marL="0">
+            <a:pPr marL="0" indent="0" algn="ctr">
               <a:buNone/>
             </a:pPr>
             <a:r>
@@ -18629,7 +18038,7 @@
           <a:bodyPr wrap="square" lIns="0" tIns="0" rIns="0" bIns="0" rtlCol="0" anchor="ctr"/>
           <a:lstStyle/>
           <a:p>
-            <a:pPr indent="0" marL="0">
+            <a:pPr marL="0" indent="0">
               <a:lnSpc>
                 <a:spcPts val="1700"/>
               </a:lnSpc>
@@ -18694,7 +18103,7 @@
           <a:bodyPr wrap="square" lIns="0" tIns="0" rIns="0" bIns="0" rtlCol="0" anchor="ctr"/>
           <a:lstStyle/>
           <a:p>
-            <a:pPr indent="0" marL="0">
+            <a:pPr marL="0" indent="0">
               <a:lnSpc>
                 <a:spcPts val="1600"/>
               </a:lnSpc>
@@ -18736,7 +18145,7 @@
           <a:bodyPr wrap="square" lIns="0" tIns="0" rIns="0" bIns="0" rtlCol="0" anchor="ctr"/>
           <a:lstStyle/>
           <a:p>
-            <a:pPr indent="0" marL="0">
+            <a:pPr marL="0" indent="0">
               <a:lnSpc>
                 <a:spcPts val="1500"/>
               </a:lnSpc>
@@ -18856,7 +18265,7 @@
           <a:bodyPr wrap="square" lIns="0" tIns="0" rIns="0" bIns="0" rtlCol="0" anchor="ctr"/>
           <a:lstStyle/>
           <a:p>
-            <a:pPr algn="ctr" indent="0" marL="0">
+            <a:pPr marL="0" indent="0" algn="ctr">
               <a:buNone/>
             </a:pPr>
             <a:r>
@@ -18895,7 +18304,7 @@
           <a:bodyPr wrap="square" lIns="0" tIns="0" rIns="0" bIns="0" rtlCol="0" anchor="ctr"/>
           <a:lstStyle/>
           <a:p>
-            <a:pPr indent="0" marL="0">
+            <a:pPr marL="0" indent="0">
               <a:lnSpc>
                 <a:spcPts val="1700"/>
               </a:lnSpc>
@@ -18960,7 +18369,7 @@
           <a:bodyPr wrap="square" lIns="0" tIns="0" rIns="0" bIns="0" rtlCol="0" anchor="ctr"/>
           <a:lstStyle/>
           <a:p>
-            <a:pPr indent="0" marL="0">
+            <a:pPr marL="0" indent="0">
               <a:lnSpc>
                 <a:spcPts val="1600"/>
               </a:lnSpc>
@@ -19002,7 +18411,7 @@
           <a:bodyPr wrap="square" lIns="0" tIns="0" rIns="0" bIns="0" rtlCol="0" anchor="ctr"/>
           <a:lstStyle/>
           <a:p>
-            <a:pPr indent="0" marL="0">
+            <a:pPr marL="0" indent="0">
               <a:lnSpc>
                 <a:spcPts val="1500"/>
               </a:lnSpc>
@@ -19122,7 +18531,7 @@
           <a:bodyPr wrap="square" lIns="0" tIns="0" rIns="0" bIns="0" rtlCol="0" anchor="ctr"/>
           <a:lstStyle/>
           <a:p>
-            <a:pPr algn="ctr" indent="0" marL="0">
+            <a:pPr marL="0" indent="0" algn="ctr">
               <a:buNone/>
             </a:pPr>
             <a:r>
@@ -19161,7 +18570,7 @@
           <a:bodyPr wrap="square" lIns="0" tIns="0" rIns="0" bIns="0" rtlCol="0" anchor="ctr"/>
           <a:lstStyle/>
           <a:p>
-            <a:pPr indent="0" marL="0">
+            <a:pPr marL="0" indent="0">
               <a:lnSpc>
                 <a:spcPts val="1700"/>
               </a:lnSpc>
@@ -19226,7 +18635,7 @@
           <a:bodyPr wrap="square" lIns="0" tIns="0" rIns="0" bIns="0" rtlCol="0" anchor="ctr"/>
           <a:lstStyle/>
           <a:p>
-            <a:pPr indent="0" marL="0">
+            <a:pPr marL="0" indent="0">
               <a:lnSpc>
                 <a:spcPts val="1600"/>
               </a:lnSpc>
@@ -19268,7 +18677,7 @@
           <a:bodyPr wrap="square" lIns="0" tIns="0" rIns="0" bIns="0" rtlCol="0" anchor="ctr"/>
           <a:lstStyle/>
           <a:p>
-            <a:pPr indent="0" marL="0">
+            <a:pPr marL="0" indent="0">
               <a:lnSpc>
                 <a:spcPts val="1500"/>
               </a:lnSpc>
@@ -19388,7 +18797,7 @@
           <a:bodyPr wrap="square" lIns="0" tIns="0" rIns="0" bIns="0" rtlCol="0" anchor="ctr"/>
           <a:lstStyle/>
           <a:p>
-            <a:pPr algn="ctr" indent="0" marL="0">
+            <a:pPr marL="0" indent="0" algn="ctr">
               <a:buNone/>
             </a:pPr>
             <a:r>
@@ -19427,7 +18836,7 @@
           <a:bodyPr wrap="square" lIns="0" tIns="0" rIns="0" bIns="0" rtlCol="0" anchor="ctr"/>
           <a:lstStyle/>
           <a:p>
-            <a:pPr indent="0" marL="0">
+            <a:pPr marL="0" indent="0">
               <a:lnSpc>
                 <a:spcPts val="1700"/>
               </a:lnSpc>
@@ -19492,7 +18901,7 @@
           <a:bodyPr wrap="square" lIns="0" tIns="0" rIns="0" bIns="0" rtlCol="0" anchor="ctr"/>
           <a:lstStyle/>
           <a:p>
-            <a:pPr indent="0" marL="0">
+            <a:pPr marL="0" indent="0">
               <a:lnSpc>
                 <a:spcPts val="1600"/>
               </a:lnSpc>
@@ -19534,7 +18943,7 @@
           <a:bodyPr wrap="square" lIns="0" tIns="0" rIns="0" bIns="0" rtlCol="0" anchor="ctr"/>
           <a:lstStyle/>
           <a:p>
-            <a:pPr indent="0" marL="0">
+            <a:pPr marL="0" indent="0">
               <a:lnSpc>
                 <a:spcPts val="1500"/>
               </a:lnSpc>
@@ -19603,7 +19012,7 @@
           <a:bodyPr wrap="square" lIns="0" tIns="0" rIns="0" bIns="0" rtlCol="0" anchor="ctr"/>
           <a:lstStyle/>
           <a:p>
-            <a:pPr indent="0" marL="0">
+            <a:pPr marL="0" indent="0">
               <a:buNone/>
             </a:pPr>
             <a:r>
@@ -19696,14 +19105,14 @@
           <a:bodyPr wrap="square" lIns="0" tIns="0" rIns="0" bIns="0" rtlCol="0" anchor="ctr"/>
           <a:lstStyle/>
           <a:p>
-            <a:pPr indent="0" marL="0">
+            <a:pPr marL="0" indent="0">
               <a:lnSpc>
                 <a:spcPts val="1656"/>
               </a:lnSpc>
               <a:buNone/>
             </a:pPr>
             <a:r>
-              <a:rPr lang="en-US" sz="1000" b="1" spc="130" kern="0" dirty="0">
+              <a:rPr lang="en-US" sz="1000" b="1" kern="0" spc="130" dirty="0">
                 <a:solidFill>
                   <a:srgbClr val="E6115E"/>
                 </a:solidFill>
@@ -19713,12 +19122,6 @@
               </a:rPr>
               <a:t>ANALOGÍA   </a:t>
             </a:r>
-            <a:pPr indent="0" marL="0">
-              <a:lnSpc>
-                <a:spcPts val="1656"/>
-              </a:lnSpc>
-              <a:buNone/>
-            </a:pPr>
             <a:r>
               <a:rPr lang="en-US" sz="1200" dirty="0">
                 <a:solidFill>
@@ -19755,7 +19158,7 @@
           <a:bodyPr wrap="square" lIns="0" tIns="0" rIns="0" bIns="0" rtlCol="0" anchor="ctr"/>
           <a:lstStyle/>
           <a:p>
-            <a:pPr indent="0" marL="0">
+            <a:pPr marL="0" indent="0">
               <a:buNone/>
             </a:pPr>
             <a:r>
@@ -19794,7 +19197,7 @@
           <a:bodyPr wrap="square" lIns="0" tIns="0" rIns="0" bIns="0" rtlCol="0" anchor="ctr"/>
           <a:lstStyle/>
           <a:p>
-            <a:pPr algn="r" indent="0" marL="0">
+            <a:pPr marL="0" indent="0" algn="r">
               <a:buNone/>
             </a:pPr>
             <a:r>
@@ -19828,6 +19231,7 @@
         <a:solidFill>
           <a:srgbClr val="F5F7FB"/>
         </a:solidFill>
+        <a:effectLst/>
       </p:bgPr>
     </p:bg>
     <p:spTree>
@@ -19892,11 +19296,11 @@
           <a:bodyPr wrap="square" lIns="0" tIns="0" rIns="0" bIns="0" rtlCol="0" anchor="ctr"/>
           <a:lstStyle/>
           <a:p>
-            <a:pPr algn="ctr" indent="0" marL="0">
-              <a:buNone/>
-            </a:pPr>
-            <a:r>
-              <a:rPr lang="en-US" sz="1150" b="1" spc="120" kern="0" dirty="0">
+            <a:pPr marL="0" indent="0" algn="ctr">
+              <a:buNone/>
+            </a:pPr>
+            <a:r>
+              <a:rPr lang="en-US" sz="1150" b="1" kern="0" spc="120" dirty="0">
                 <a:solidFill>
                   <a:srgbClr val="FFFFFF"/>
                 </a:solidFill>
@@ -19931,7 +19335,7 @@
           <a:bodyPr wrap="square" lIns="0" tIns="0" rIns="0" bIns="0" rtlCol="0" anchor="ctr"/>
           <a:lstStyle/>
           <a:p>
-            <a:pPr indent="0" marL="0">
+            <a:pPr marL="0" indent="0">
               <a:buNone/>
             </a:pPr>
             <a:r>
@@ -19970,7 +19374,7 @@
           <a:bodyPr wrap="square" lIns="0" tIns="0" rIns="0" bIns="0" rtlCol="0" anchor="ctr"/>
           <a:lstStyle/>
           <a:p>
-            <a:pPr indent="0" marL="0">
+            <a:pPr marL="0" indent="0">
               <a:buNone/>
             </a:pPr>
             <a:r>
@@ -20063,7 +19467,7 @@
           <a:bodyPr wrap="square" lIns="0" tIns="0" rIns="0" bIns="0" rtlCol="0" anchor="ctr"/>
           <a:lstStyle/>
           <a:p>
-            <a:pPr indent="0" marL="0">
+            <a:pPr marL="0" indent="0">
               <a:buNone/>
             </a:pPr>
             <a:r>
@@ -20247,7 +19651,7 @@
           <a:bodyPr wrap="square" lIns="0" tIns="0" rIns="0" bIns="0" rtlCol="0" anchor="ctr"/>
           <a:lstStyle/>
           <a:p>
-            <a:pPr algn="ctr" indent="0" marL="0">
+            <a:pPr marL="0" indent="0" algn="ctr">
               <a:buNone/>
             </a:pPr>
             <a:r>
@@ -20286,7 +19690,7 @@
           <a:bodyPr wrap="square" lIns="0" tIns="0" rIns="0" bIns="0" rtlCol="0" anchor="t"/>
           <a:lstStyle/>
           <a:p>
-            <a:pPr algn="ctr" indent="0" marL="0">
+            <a:pPr marL="0" indent="0" algn="ctr">
               <a:lnSpc>
                 <a:spcPts val="1300"/>
               </a:lnSpc>
@@ -20355,7 +19759,7 @@
           <a:bodyPr wrap="square" lIns="0" tIns="0" rIns="0" bIns="0" rtlCol="0" anchor="ctr"/>
           <a:lstStyle/>
           <a:p>
-            <a:pPr algn="ctr" indent="0" marL="0">
+            <a:pPr marL="0" indent="0" algn="ctr">
               <a:buNone/>
             </a:pPr>
             <a:r>
@@ -20394,7 +19798,7 @@
           <a:bodyPr wrap="square" lIns="0" tIns="0" rIns="0" bIns="0" rtlCol="0" anchor="t"/>
           <a:lstStyle/>
           <a:p>
-            <a:pPr algn="ctr" indent="0" marL="0">
+            <a:pPr marL="0" indent="0" algn="ctr">
               <a:lnSpc>
                 <a:spcPts val="1300"/>
               </a:lnSpc>
@@ -20463,7 +19867,7 @@
           <a:bodyPr wrap="square" lIns="0" tIns="0" rIns="0" bIns="0" rtlCol="0" anchor="ctr"/>
           <a:lstStyle/>
           <a:p>
-            <a:pPr algn="ctr" indent="0" marL="0">
+            <a:pPr marL="0" indent="0" algn="ctr">
               <a:buNone/>
             </a:pPr>
             <a:r>
@@ -20502,7 +19906,7 @@
           <a:bodyPr wrap="square" lIns="0" tIns="0" rIns="0" bIns="0" rtlCol="0" anchor="t"/>
           <a:lstStyle/>
           <a:p>
-            <a:pPr algn="ctr" indent="0" marL="0">
+            <a:pPr marL="0" indent="0" algn="ctr">
               <a:lnSpc>
                 <a:spcPts val="1300"/>
               </a:lnSpc>
@@ -20571,7 +19975,7 @@
           <a:bodyPr wrap="square" lIns="0" tIns="0" rIns="0" bIns="0" rtlCol="0" anchor="ctr"/>
           <a:lstStyle/>
           <a:p>
-            <a:pPr algn="ctr" indent="0" marL="0">
+            <a:pPr marL="0" indent="0" algn="ctr">
               <a:buNone/>
             </a:pPr>
             <a:r>
@@ -20610,7 +20014,7 @@
           <a:bodyPr wrap="square" lIns="0" tIns="0" rIns="0" bIns="0" rtlCol="0" anchor="t"/>
           <a:lstStyle/>
           <a:p>
-            <a:pPr algn="ctr" indent="0" marL="0">
+            <a:pPr marL="0" indent="0" algn="ctr">
               <a:lnSpc>
                 <a:spcPts val="1300"/>
               </a:lnSpc>
@@ -20679,7 +20083,7 @@
           <a:bodyPr wrap="square" lIns="0" tIns="0" rIns="0" bIns="0" rtlCol="0" anchor="ctr"/>
           <a:lstStyle/>
           <a:p>
-            <a:pPr indent="0" marL="0">
+            <a:pPr marL="0" indent="0">
               <a:buNone/>
             </a:pPr>
             <a:r>
@@ -20718,7 +20122,7 @@
           <a:bodyPr wrap="square" lIns="0" tIns="0" rIns="0" bIns="0" rtlCol="0" anchor="t"/>
           <a:lstStyle/>
           <a:p>
-            <a:pPr indent="0" marL="0">
+            <a:pPr marL="0" indent="0">
               <a:lnSpc>
                 <a:spcPts val="1450"/>
               </a:lnSpc>
@@ -20760,7 +20164,7 @@
           <a:bodyPr wrap="square" lIns="0" tIns="0" rIns="0" bIns="0" rtlCol="0" anchor="ctr"/>
           <a:lstStyle/>
           <a:p>
-            <a:pPr indent="0" marL="0">
+            <a:pPr marL="0" indent="0">
               <a:buNone/>
             </a:pPr>
             <a:r>
@@ -20799,7 +20203,7 @@
           <a:bodyPr wrap="square" lIns="0" tIns="0" rIns="0" bIns="0" rtlCol="0" anchor="ctr"/>
           <a:lstStyle/>
           <a:p>
-            <a:pPr indent="0" marL="0">
+            <a:pPr marL="0" indent="0">
               <a:buNone/>
             </a:pPr>
             <a:r>
@@ -20838,7 +20242,7 @@
           <a:bodyPr wrap="square" lIns="0" tIns="0" rIns="0" bIns="0" rtlCol="0" anchor="ctr"/>
           <a:lstStyle/>
           <a:p>
-            <a:pPr algn="r" indent="0" marL="0">
+            <a:pPr marL="0" indent="0" algn="r">
               <a:buNone/>
             </a:pPr>
             <a:r>
@@ -20872,6 +20276,7 @@
         <a:solidFill>
           <a:srgbClr val="F5F7FB"/>
         </a:solidFill>
+        <a:effectLst/>
       </p:bgPr>
     </p:bg>
     <p:spTree>
@@ -20909,7 +20314,7 @@
           <a:bodyPr wrap="square" lIns="0" tIns="0" rIns="0" bIns="0" rtlCol="0" anchor="ctr"/>
           <a:lstStyle/>
           <a:p>
-            <a:pPr indent="0" marL="0">
+            <a:pPr marL="0" indent="0">
               <a:buNone/>
             </a:pPr>
             <a:r>
@@ -20948,7 +20353,7 @@
           <a:bodyPr wrap="square" lIns="0" tIns="0" rIns="0" bIns="0" rtlCol="0" anchor="ctr"/>
           <a:lstStyle/>
           <a:p>
-            <a:pPr indent="0" marL="0">
+            <a:pPr marL="0" indent="0">
               <a:buNone/>
             </a:pPr>
             <a:r>
@@ -21014,7 +20419,7 @@
           <a:bodyPr wrap="square" lIns="0" tIns="0" rIns="0" bIns="0" rtlCol="0" anchor="ctr"/>
           <a:lstStyle/>
           <a:p>
-            <a:pPr algn="ctr" indent="0" marL="0">
+            <a:pPr marL="0" indent="0" algn="ctr">
               <a:buNone/>
             </a:pPr>
             <a:r>
@@ -21053,7 +20458,7 @@
           <a:bodyPr wrap="square" lIns="0" tIns="0" rIns="0" bIns="0" rtlCol="0" anchor="ctr"/>
           <a:lstStyle/>
           <a:p>
-            <a:pPr indent="0" marL="0">
+            <a:pPr marL="0" indent="0">
               <a:buNone/>
             </a:pPr>
             <a:r>
@@ -21092,7 +20497,7 @@
           <a:bodyPr wrap="square" lIns="0" tIns="0" rIns="0" bIns="0" rtlCol="0" anchor="ctr"/>
           <a:lstStyle/>
           <a:p>
-            <a:pPr indent="0" marL="0">
+            <a:pPr marL="0" indent="0">
               <a:buNone/>
             </a:pPr>
             <a:r>
@@ -21181,7 +20586,7 @@
           <a:bodyPr wrap="square" lIns="0" tIns="0" rIns="0" bIns="0" rtlCol="0" anchor="ctr"/>
           <a:lstStyle/>
           <a:p>
-            <a:pPr algn="ctr" indent="0" marL="0">
+            <a:pPr marL="0" indent="0" algn="ctr">
               <a:buNone/>
             </a:pPr>
             <a:r>
@@ -21220,7 +20625,7 @@
           <a:bodyPr wrap="square" lIns="0" tIns="0" rIns="0" bIns="0" rtlCol="0" anchor="ctr"/>
           <a:lstStyle/>
           <a:p>
-            <a:pPr indent="0" marL="0">
+            <a:pPr marL="0" indent="0">
               <a:buNone/>
             </a:pPr>
             <a:r>
@@ -21259,7 +20664,7 @@
           <a:bodyPr wrap="square" lIns="0" tIns="0" rIns="0" bIns="0" rtlCol="0" anchor="ctr"/>
           <a:lstStyle/>
           <a:p>
-            <a:pPr indent="0" marL="0">
+            <a:pPr marL="0" indent="0">
               <a:buNone/>
             </a:pPr>
             <a:r>
@@ -21348,7 +20753,7 @@
           <a:bodyPr wrap="square" lIns="0" tIns="0" rIns="0" bIns="0" rtlCol="0" anchor="ctr"/>
           <a:lstStyle/>
           <a:p>
-            <a:pPr algn="ctr" indent="0" marL="0">
+            <a:pPr marL="0" indent="0" algn="ctr">
               <a:buNone/>
             </a:pPr>
             <a:r>
@@ -21387,7 +20792,7 @@
           <a:bodyPr wrap="square" lIns="0" tIns="0" rIns="0" bIns="0" rtlCol="0" anchor="ctr"/>
           <a:lstStyle/>
           <a:p>
-            <a:pPr indent="0" marL="0">
+            <a:pPr marL="0" indent="0">
               <a:buNone/>
             </a:pPr>
             <a:r>
@@ -21426,7 +20831,7 @@
           <a:bodyPr wrap="square" lIns="0" tIns="0" rIns="0" bIns="0" rtlCol="0" anchor="ctr"/>
           <a:lstStyle/>
           <a:p>
-            <a:pPr indent="0" marL="0">
+            <a:pPr marL="0" indent="0">
               <a:buNone/>
             </a:pPr>
             <a:r>
@@ -21515,7 +20920,7 @@
           <a:bodyPr wrap="square" lIns="0" tIns="0" rIns="0" bIns="0" rtlCol="0" anchor="ctr"/>
           <a:lstStyle/>
           <a:p>
-            <a:pPr algn="ctr" indent="0" marL="0">
+            <a:pPr marL="0" indent="0" algn="ctr">
               <a:buNone/>
             </a:pPr>
             <a:r>
@@ -21554,7 +20959,7 @@
           <a:bodyPr wrap="square" lIns="0" tIns="0" rIns="0" bIns="0" rtlCol="0" anchor="ctr"/>
           <a:lstStyle/>
           <a:p>
-            <a:pPr indent="0" marL="0">
+            <a:pPr marL="0" indent="0">
               <a:buNone/>
             </a:pPr>
             <a:r>
@@ -21593,7 +20998,7 @@
           <a:bodyPr wrap="square" lIns="0" tIns="0" rIns="0" bIns="0" rtlCol="0" anchor="ctr"/>
           <a:lstStyle/>
           <a:p>
-            <a:pPr indent="0" marL="0">
+            <a:pPr marL="0" indent="0">
               <a:buNone/>
             </a:pPr>
             <a:r>
@@ -21682,7 +21087,7 @@
           <a:bodyPr wrap="square" lIns="0" tIns="0" rIns="0" bIns="0" rtlCol="0" anchor="ctr"/>
           <a:lstStyle/>
           <a:p>
-            <a:pPr algn="ctr" indent="0" marL="0">
+            <a:pPr marL="0" indent="0" algn="ctr">
               <a:buNone/>
             </a:pPr>
             <a:r>
@@ -21721,7 +21126,7 @@
           <a:bodyPr wrap="square" lIns="0" tIns="0" rIns="0" bIns="0" rtlCol="0" anchor="ctr"/>
           <a:lstStyle/>
           <a:p>
-            <a:pPr indent="0" marL="0">
+            <a:pPr marL="0" indent="0">
               <a:buNone/>
             </a:pPr>
             <a:r>
@@ -21760,7 +21165,7 @@
           <a:bodyPr wrap="square" lIns="0" tIns="0" rIns="0" bIns="0" rtlCol="0" anchor="ctr"/>
           <a:lstStyle/>
           <a:p>
-            <a:pPr indent="0" marL="0">
+            <a:pPr marL="0" indent="0">
               <a:buNone/>
             </a:pPr>
             <a:r>
@@ -21849,7 +21254,7 @@
           <a:bodyPr wrap="square" lIns="0" tIns="0" rIns="0" bIns="0" rtlCol="0" anchor="ctr"/>
           <a:lstStyle/>
           <a:p>
-            <a:pPr algn="ctr" indent="0" marL="0">
+            <a:pPr marL="0" indent="0" algn="ctr">
               <a:buNone/>
             </a:pPr>
             <a:r>
@@ -21888,7 +21293,7 @@
           <a:bodyPr wrap="square" lIns="0" tIns="0" rIns="0" bIns="0" rtlCol="0" anchor="ctr"/>
           <a:lstStyle/>
           <a:p>
-            <a:pPr indent="0" marL="0">
+            <a:pPr marL="0" indent="0">
               <a:buNone/>
             </a:pPr>
             <a:r>
@@ -21927,7 +21332,7 @@
           <a:bodyPr wrap="square" lIns="0" tIns="0" rIns="0" bIns="0" rtlCol="0" anchor="ctr"/>
           <a:lstStyle/>
           <a:p>
-            <a:pPr indent="0" marL="0">
+            <a:pPr marL="0" indent="0">
               <a:buNone/>
             </a:pPr>
             <a:r>
@@ -22016,7 +21421,7 @@
           <a:bodyPr wrap="square" lIns="0" tIns="0" rIns="0" bIns="0" rtlCol="0" anchor="ctr"/>
           <a:lstStyle/>
           <a:p>
-            <a:pPr algn="ctr" indent="0" marL="0">
+            <a:pPr marL="0" indent="0" algn="ctr">
               <a:buNone/>
             </a:pPr>
             <a:r>
@@ -22055,7 +21460,7 @@
           <a:bodyPr wrap="square" lIns="0" tIns="0" rIns="0" bIns="0" rtlCol="0" anchor="ctr"/>
           <a:lstStyle/>
           <a:p>
-            <a:pPr indent="0" marL="0">
+            <a:pPr marL="0" indent="0">
               <a:buNone/>
             </a:pPr>
             <a:r>
@@ -22094,7 +21499,7 @@
           <a:bodyPr wrap="square" lIns="0" tIns="0" rIns="0" bIns="0" rtlCol="0" anchor="ctr"/>
           <a:lstStyle/>
           <a:p>
-            <a:pPr indent="0" marL="0">
+            <a:pPr marL="0" indent="0">
               <a:buNone/>
             </a:pPr>
             <a:r>
@@ -22120,7 +21525,7 @@
         </p:nvSpPr>
         <p:spPr>
           <a:xfrm>
-            <a:off x="548640" y="5596128"/>
+            <a:off x="548640" y="5920741"/>
             <a:ext cx="11064240" cy="685800"/>
           </a:xfrm>
           <a:prstGeom prst="roundRect">
@@ -22187,14 +21592,14 @@
           <a:bodyPr wrap="square" lIns="0" tIns="0" rIns="0" bIns="0" rtlCol="0" anchor="ctr"/>
           <a:lstStyle/>
           <a:p>
-            <a:pPr indent="0" marL="0">
+            <a:pPr marL="0" indent="0">
               <a:lnSpc>
                 <a:spcPts val="1656"/>
               </a:lnSpc>
               <a:buNone/>
             </a:pPr>
             <a:r>
-              <a:rPr lang="en-US" sz="1000" b="1" spc="130" kern="0" dirty="0">
+              <a:rPr lang="en-US" sz="1000" b="1" kern="0" spc="130" dirty="0">
                 <a:solidFill>
                   <a:srgbClr val="E6115E"/>
                 </a:solidFill>
@@ -22204,12 +21609,6 @@
               </a:rPr>
               <a:t>ANALOGÍA   </a:t>
             </a:r>
-            <a:pPr indent="0" marL="0">
-              <a:lnSpc>
-                <a:spcPts val="1656"/>
-              </a:lnSpc>
-              <a:buNone/>
-            </a:pPr>
             <a:r>
               <a:rPr lang="en-US" sz="1200" dirty="0">
                 <a:solidFill>
@@ -22246,7 +21645,7 @@
           <a:bodyPr wrap="square" lIns="0" tIns="0" rIns="0" bIns="0" rtlCol="0" anchor="ctr"/>
           <a:lstStyle/>
           <a:p>
-            <a:pPr indent="0" marL="0">
+            <a:pPr marL="0" indent="0">
               <a:buNone/>
             </a:pPr>
             <a:r>
@@ -22285,7 +21684,7 @@
           <a:bodyPr wrap="square" lIns="0" tIns="0" rIns="0" bIns="0" rtlCol="0" anchor="ctr"/>
           <a:lstStyle/>
           <a:p>
-            <a:pPr algn="r" indent="0" marL="0">
+            <a:pPr marL="0" indent="0" algn="r">
               <a:buNone/>
             </a:pPr>
             <a:r>
@@ -22319,6 +21718,7 @@
         <a:solidFill>
           <a:srgbClr val="F5F7FB"/>
         </a:solidFill>
+        <a:effectLst/>
       </p:bgPr>
     </p:bg>
     <p:spTree>
@@ -22356,7 +21756,7 @@
           <a:bodyPr wrap="square" lIns="0" tIns="0" rIns="0" bIns="0" rtlCol="0" anchor="ctr"/>
           <a:lstStyle/>
           <a:p>
-            <a:pPr indent="0" marL="0">
+            <a:pPr marL="0" indent="0">
               <a:buNone/>
             </a:pPr>
             <a:r>
@@ -22395,7 +21795,7 @@
           <a:bodyPr wrap="square" lIns="0" tIns="0" rIns="0" bIns="0" rtlCol="0" anchor="ctr"/>
           <a:lstStyle/>
           <a:p>
-            <a:pPr indent="0" marL="0">
+            <a:pPr marL="0" indent="0">
               <a:buNone/>
             </a:pPr>
             <a:r>
@@ -22461,7 +21861,7 @@
           <a:bodyPr wrap="square" lIns="0" tIns="0" rIns="0" bIns="0" rtlCol="0" anchor="ctr"/>
           <a:lstStyle/>
           <a:p>
-            <a:pPr indent="0" marL="0">
+            <a:pPr marL="0" indent="0">
               <a:buNone/>
             </a:pPr>
             <a:r>
@@ -22500,7 +21900,7 @@
           <a:bodyPr wrap="square" lIns="0" tIns="0" rIns="0" bIns="0" rtlCol="0" anchor="ctr"/>
           <a:lstStyle/>
           <a:p>
-            <a:pPr indent="0" marL="0">
+            <a:pPr marL="0" indent="0">
               <a:buNone/>
             </a:pPr>
             <a:r>
@@ -22539,7 +21939,7 @@
           <a:bodyPr wrap="square" lIns="0" tIns="0" rIns="0" bIns="0" rtlCol="0" anchor="ctr"/>
           <a:lstStyle/>
           <a:p>
-            <a:pPr indent="0" marL="0">
+            <a:pPr marL="0" indent="0">
               <a:buNone/>
             </a:pPr>
             <a:r>
@@ -22605,7 +22005,7 @@
           <a:bodyPr wrap="square" lIns="0" tIns="0" rIns="0" bIns="0" rtlCol="0" anchor="ctr"/>
           <a:lstStyle/>
           <a:p>
-            <a:pPr indent="0" marL="0">
+            <a:pPr marL="0" indent="0">
               <a:buNone/>
             </a:pPr>
             <a:r>
@@ -22644,7 +22044,7 @@
           <a:bodyPr wrap="square" lIns="0" tIns="0" rIns="0" bIns="0" rtlCol="0" anchor="ctr"/>
           <a:lstStyle/>
           <a:p>
-            <a:pPr indent="0" marL="0">
+            <a:pPr marL="0" indent="0">
               <a:buNone/>
             </a:pPr>
             <a:r>
@@ -22683,7 +22083,7 @@
           <a:bodyPr wrap="square" lIns="0" tIns="0" rIns="0" bIns="0" rtlCol="0" anchor="ctr"/>
           <a:lstStyle/>
           <a:p>
-            <a:pPr indent="0" marL="0">
+            <a:pPr marL="0" indent="0">
               <a:buNone/>
             </a:pPr>
             <a:r>
@@ -22722,7 +22122,7 @@
           <a:bodyPr wrap="square" lIns="0" tIns="0" rIns="0" bIns="0" rtlCol="0" anchor="ctr"/>
           <a:lstStyle/>
           <a:p>
-            <a:pPr indent="0" marL="0">
+            <a:pPr marL="0" indent="0">
               <a:buNone/>
             </a:pPr>
             <a:r>
@@ -22761,7 +22161,7 @@
           <a:bodyPr wrap="square" lIns="0" tIns="0" rIns="0" bIns="0" rtlCol="0" anchor="ctr"/>
           <a:lstStyle/>
           <a:p>
-            <a:pPr indent="0" marL="0">
+            <a:pPr marL="0" indent="0">
               <a:buNone/>
             </a:pPr>
             <a:r>
@@ -22800,7 +22200,7 @@
           <a:bodyPr wrap="square" lIns="0" tIns="0" rIns="0" bIns="0" rtlCol="0" anchor="ctr"/>
           <a:lstStyle/>
           <a:p>
-            <a:pPr indent="0" marL="0">
+            <a:pPr marL="0" indent="0">
               <a:buNone/>
             </a:pPr>
             <a:r>
@@ -22866,7 +22266,7 @@
           <a:bodyPr wrap="square" lIns="0" tIns="0" rIns="0" bIns="0" rtlCol="0" anchor="ctr"/>
           <a:lstStyle/>
           <a:p>
-            <a:pPr indent="0" marL="0">
+            <a:pPr marL="0" indent="0">
               <a:buNone/>
             </a:pPr>
             <a:r>
@@ -22905,7 +22305,7 @@
           <a:bodyPr wrap="square" lIns="0" tIns="0" rIns="0" bIns="0" rtlCol="0" anchor="ctr"/>
           <a:lstStyle/>
           <a:p>
-            <a:pPr indent="0" marL="0">
+            <a:pPr marL="0" indent="0">
               <a:buNone/>
             </a:pPr>
             <a:r>
@@ -22944,7 +22344,7 @@
           <a:bodyPr wrap="square" lIns="0" tIns="0" rIns="0" bIns="0" rtlCol="0" anchor="ctr"/>
           <a:lstStyle/>
           <a:p>
-            <a:pPr indent="0" marL="0">
+            <a:pPr marL="0" indent="0">
               <a:buNone/>
             </a:pPr>
             <a:r>
@@ -22983,7 +22383,7 @@
           <a:bodyPr wrap="square" lIns="0" tIns="0" rIns="0" bIns="0" rtlCol="0" anchor="ctr"/>
           <a:lstStyle/>
           <a:p>
-            <a:pPr indent="0" marL="0">
+            <a:pPr marL="0" indent="0">
               <a:buNone/>
             </a:pPr>
             <a:r>
@@ -23022,7 +22422,7 @@
           <a:bodyPr wrap="square" lIns="0" tIns="0" rIns="0" bIns="0" rtlCol="0" anchor="ctr"/>
           <a:lstStyle/>
           <a:p>
-            <a:pPr indent="0" marL="0">
+            <a:pPr marL="0" indent="0">
               <a:buNone/>
             </a:pPr>
             <a:r>
@@ -23061,7 +22461,7 @@
           <a:bodyPr wrap="square" lIns="0" tIns="0" rIns="0" bIns="0" rtlCol="0" anchor="ctr"/>
           <a:lstStyle/>
           <a:p>
-            <a:pPr indent="0" marL="0">
+            <a:pPr marL="0" indent="0">
               <a:buNone/>
             </a:pPr>
             <a:r>
@@ -23127,7 +22527,7 @@
           <a:bodyPr wrap="square" lIns="0" tIns="0" rIns="0" bIns="0" rtlCol="0" anchor="ctr"/>
           <a:lstStyle/>
           <a:p>
-            <a:pPr indent="0" marL="0">
+            <a:pPr marL="0" indent="0">
               <a:buNone/>
             </a:pPr>
             <a:r>
@@ -23166,7 +22566,7 @@
           <a:bodyPr wrap="square" lIns="0" tIns="0" rIns="0" bIns="0" rtlCol="0" anchor="ctr"/>
           <a:lstStyle/>
           <a:p>
-            <a:pPr indent="0" marL="0">
+            <a:pPr marL="0" indent="0">
               <a:buNone/>
             </a:pPr>
             <a:r>
@@ -23205,7 +22605,7 @@
           <a:bodyPr wrap="square" lIns="0" tIns="0" rIns="0" bIns="0" rtlCol="0" anchor="ctr"/>
           <a:lstStyle/>
           <a:p>
-            <a:pPr indent="0" marL="0">
+            <a:pPr marL="0" indent="0">
               <a:buNone/>
             </a:pPr>
             <a:r>
@@ -23244,7 +22644,7 @@
           <a:bodyPr wrap="square" lIns="0" tIns="0" rIns="0" bIns="0" rtlCol="0" anchor="ctr"/>
           <a:lstStyle/>
           <a:p>
-            <a:pPr indent="0" marL="0">
+            <a:pPr marL="0" indent="0">
               <a:buNone/>
             </a:pPr>
             <a:r>
@@ -23283,7 +22683,7 @@
           <a:bodyPr wrap="square" lIns="0" tIns="0" rIns="0" bIns="0" rtlCol="0" anchor="ctr"/>
           <a:lstStyle/>
           <a:p>
-            <a:pPr indent="0" marL="0">
+            <a:pPr marL="0" indent="0">
               <a:buNone/>
             </a:pPr>
             <a:r>
@@ -23322,7 +22722,7 @@
           <a:bodyPr wrap="square" lIns="0" tIns="0" rIns="0" bIns="0" rtlCol="0" anchor="ctr"/>
           <a:lstStyle/>
           <a:p>
-            <a:pPr indent="0" marL="0">
+            <a:pPr marL="0" indent="0">
               <a:buNone/>
             </a:pPr>
             <a:r>
@@ -23388,7 +22788,7 @@
           <a:bodyPr wrap="square" lIns="0" tIns="0" rIns="0" bIns="0" rtlCol="0" anchor="ctr"/>
           <a:lstStyle/>
           <a:p>
-            <a:pPr indent="0" marL="0">
+            <a:pPr marL="0" indent="0">
               <a:buNone/>
             </a:pPr>
             <a:r>
@@ -23427,7 +22827,7 @@
           <a:bodyPr wrap="square" lIns="0" tIns="0" rIns="0" bIns="0" rtlCol="0" anchor="ctr"/>
           <a:lstStyle/>
           <a:p>
-            <a:pPr indent="0" marL="0">
+            <a:pPr marL="0" indent="0">
               <a:buNone/>
             </a:pPr>
             <a:r>
@@ -23466,7 +22866,7 @@
           <a:bodyPr wrap="square" lIns="0" tIns="0" rIns="0" bIns="0" rtlCol="0" anchor="ctr"/>
           <a:lstStyle/>
           <a:p>
-            <a:pPr algn="r" indent="0" marL="0">
+            <a:pPr marL="0" indent="0" algn="r">
               <a:buNone/>
             </a:pPr>
             <a:r>
@@ -23500,6 +22900,7 @@
         <a:solidFill>
           <a:srgbClr val="0A2559"/>
         </a:solidFill>
+        <a:effectLst/>
       </p:bgPr>
     </p:bg>
     <p:spTree>
@@ -23593,11 +22994,11 @@
           <a:bodyPr wrap="square" lIns="0" tIns="0" rIns="0" bIns="0" rtlCol="0" anchor="ctr"/>
           <a:lstStyle/>
           <a:p>
-            <a:pPr algn="ctr" indent="0" marL="0">
-              <a:buNone/>
-            </a:pPr>
-            <a:r>
-              <a:rPr lang="en-US" sz="1150" b="1" spc="120" kern="0" dirty="0">
+            <a:pPr marL="0" indent="0" algn="ctr">
+              <a:buNone/>
+            </a:pPr>
+            <a:r>
+              <a:rPr lang="en-US" sz="1150" b="1" kern="0" spc="120" dirty="0">
                 <a:solidFill>
                   <a:srgbClr val="FFFFFF"/>
                 </a:solidFill>
@@ -23632,7 +23033,7 @@
           <a:bodyPr wrap="square" lIns="0" tIns="0" rIns="0" bIns="0" rtlCol="0" anchor="ctr"/>
           <a:lstStyle/>
           <a:p>
-            <a:pPr indent="0" marL="0">
+            <a:pPr marL="0" indent="0">
               <a:buNone/>
             </a:pPr>
             <a:r>
@@ -23696,7 +23097,7 @@
           <a:bodyPr wrap="square" lIns="0" tIns="0" rIns="0" bIns="0" rtlCol="0" anchor="ctr"/>
           <a:lstStyle/>
           <a:p>
-            <a:pPr algn="ctr" indent="0" marL="0">
+            <a:pPr marL="0" indent="0" algn="ctr">
               <a:buNone/>
             </a:pPr>
             <a:r>
@@ -23735,7 +23136,7 @@
           <a:bodyPr wrap="square" lIns="0" tIns="0" rIns="0" bIns="0" rtlCol="0" anchor="ctr"/>
           <a:lstStyle/>
           <a:p>
-            <a:pPr indent="0" marL="0">
+            <a:pPr marL="0" indent="0">
               <a:buNone/>
             </a:pPr>
             <a:r>
@@ -23774,7 +23175,7 @@
           <a:bodyPr wrap="square" lIns="0" tIns="0" rIns="0" bIns="0" rtlCol="0" anchor="t"/>
           <a:lstStyle/>
           <a:p>
-            <a:pPr indent="0" marL="0">
+            <a:pPr marL="0" indent="0">
               <a:lnSpc>
                 <a:spcPts val="1600"/>
               </a:lnSpc>
@@ -23841,7 +23242,7 @@
           <a:bodyPr wrap="square" lIns="0" tIns="0" rIns="0" bIns="0" rtlCol="0" anchor="ctr"/>
           <a:lstStyle/>
           <a:p>
-            <a:pPr algn="ctr" indent="0" marL="0">
+            <a:pPr marL="0" indent="0" algn="ctr">
               <a:buNone/>
             </a:pPr>
             <a:r>
@@ -23880,7 +23281,7 @@
           <a:bodyPr wrap="square" lIns="0" tIns="0" rIns="0" bIns="0" rtlCol="0" anchor="ctr"/>
           <a:lstStyle/>
           <a:p>
-            <a:pPr indent="0" marL="0">
+            <a:pPr marL="0" indent="0">
               <a:buNone/>
             </a:pPr>
             <a:r>
@@ -23919,7 +23320,7 @@
           <a:bodyPr wrap="square" lIns="0" tIns="0" rIns="0" bIns="0" rtlCol="0" anchor="t"/>
           <a:lstStyle/>
           <a:p>
-            <a:pPr indent="0" marL="0">
+            <a:pPr marL="0" indent="0">
               <a:lnSpc>
                 <a:spcPts val="1600"/>
               </a:lnSpc>
@@ -23986,7 +23387,7 @@
           <a:bodyPr wrap="square" lIns="0" tIns="0" rIns="0" bIns="0" rtlCol="0" anchor="ctr"/>
           <a:lstStyle/>
           <a:p>
-            <a:pPr algn="ctr" indent="0" marL="0">
+            <a:pPr marL="0" indent="0" algn="ctr">
               <a:buNone/>
             </a:pPr>
             <a:r>
@@ -24025,7 +23426,7 @@
           <a:bodyPr wrap="square" lIns="0" tIns="0" rIns="0" bIns="0" rtlCol="0" anchor="ctr"/>
           <a:lstStyle/>
           <a:p>
-            <a:pPr indent="0" marL="0">
+            <a:pPr marL="0" indent="0">
               <a:buNone/>
             </a:pPr>
             <a:r>
@@ -24064,7 +23465,7 @@
           <a:bodyPr wrap="square" lIns="0" tIns="0" rIns="0" bIns="0" rtlCol="0" anchor="t"/>
           <a:lstStyle/>
           <a:p>
-            <a:pPr indent="0" marL="0">
+            <a:pPr marL="0" indent="0">
               <a:lnSpc>
                 <a:spcPts val="1600"/>
               </a:lnSpc>
@@ -24133,7 +23534,7 @@
           <a:bodyPr wrap="square" lIns="0" tIns="0" rIns="0" bIns="0" rtlCol="0" anchor="ctr"/>
           <a:lstStyle/>
           <a:p>
-            <a:pPr indent="0" marL="0">
+            <a:pPr marL="0" indent="0">
               <a:buNone/>
             </a:pPr>
             <a:r>
@@ -24172,7 +23573,7 @@
           <a:bodyPr wrap="square" lIns="0" tIns="0" rIns="0" bIns="0" rtlCol="0" anchor="t"/>
           <a:lstStyle/>
           <a:p>
-            <a:pPr indent="0" marL="0">
+            <a:pPr marL="0" indent="0">
               <a:lnSpc>
                 <a:spcPts val="1550"/>
               </a:lnSpc>
@@ -24241,7 +23642,7 @@
           <a:bodyPr wrap="square" lIns="0" tIns="0" rIns="0" bIns="0" rtlCol="0" anchor="ctr"/>
           <a:lstStyle/>
           <a:p>
-            <a:pPr indent="0" marL="0">
+            <a:pPr marL="0" indent="0">
               <a:buNone/>
             </a:pPr>
             <a:r>
@@ -24280,7 +23681,7 @@
           <a:bodyPr wrap="square" lIns="0" tIns="0" rIns="0" bIns="0" rtlCol="0" anchor="t"/>
           <a:lstStyle/>
           <a:p>
-            <a:pPr indent="0" marL="0">
+            <a:pPr marL="0" indent="0">
               <a:lnSpc>
                 <a:spcPts val="1550"/>
               </a:lnSpc>
@@ -24317,6 +23718,7 @@
         <a:solidFill>
           <a:srgbClr val="F5F7FB"/>
         </a:solidFill>
+        <a:effectLst/>
       </p:bgPr>
     </p:bg>
     <p:spTree>
@@ -24354,7 +23756,7 @@
           <a:bodyPr wrap="square" lIns="0" tIns="0" rIns="0" bIns="0" rtlCol="0" anchor="ctr"/>
           <a:lstStyle/>
           <a:p>
-            <a:pPr indent="0" marL="0">
+            <a:pPr marL="0" indent="0">
               <a:buNone/>
             </a:pPr>
             <a:r>
@@ -24393,7 +23795,7 @@
           <a:bodyPr wrap="square" lIns="0" tIns="0" rIns="0" bIns="0" rtlCol="0" anchor="ctr"/>
           <a:lstStyle/>
           <a:p>
-            <a:pPr indent="0" marL="0">
+            <a:pPr marL="0" indent="0">
               <a:buNone/>
             </a:pPr>
             <a:r>
@@ -24484,7 +23886,7 @@
           <a:bodyPr wrap="square" lIns="0" tIns="0" rIns="0" bIns="0" rtlCol="0" anchor="ctr"/>
           <a:lstStyle/>
           <a:p>
-            <a:pPr algn="ctr" indent="0" marL="0">
+            <a:pPr marL="0" indent="0" algn="ctr">
               <a:buNone/>
             </a:pPr>
             <a:r>
@@ -24523,7 +23925,7 @@
           <a:bodyPr wrap="square" lIns="0" tIns="0" rIns="0" bIns="0" rtlCol="0" anchor="ctr"/>
           <a:lstStyle/>
           <a:p>
-            <a:pPr indent="0" marL="0">
+            <a:pPr marL="0" indent="0">
               <a:buNone/>
             </a:pPr>
             <a:r>
@@ -24562,7 +23964,7 @@
           <a:bodyPr wrap="square" lIns="0" tIns="0" rIns="0" bIns="0" rtlCol="0" anchor="t"/>
           <a:lstStyle/>
           <a:p>
-            <a:pPr indent="0" marL="0">
+            <a:pPr marL="0" indent="0">
               <a:lnSpc>
                 <a:spcPts val="1500"/>
               </a:lnSpc>
@@ -24656,7 +24058,7 @@
           <a:bodyPr wrap="square" lIns="0" tIns="0" rIns="0" bIns="0" rtlCol="0" anchor="ctr"/>
           <a:lstStyle/>
           <a:p>
-            <a:pPr algn="ctr" indent="0" marL="0">
+            <a:pPr marL="0" indent="0" algn="ctr">
               <a:buNone/>
             </a:pPr>
             <a:r>
@@ -24695,7 +24097,7 @@
           <a:bodyPr wrap="square" lIns="0" tIns="0" rIns="0" bIns="0" rtlCol="0" anchor="ctr"/>
           <a:lstStyle/>
           <a:p>
-            <a:pPr indent="0" marL="0">
+            <a:pPr marL="0" indent="0">
               <a:buNone/>
             </a:pPr>
             <a:r>
@@ -24734,7 +24136,7 @@
           <a:bodyPr wrap="square" lIns="0" tIns="0" rIns="0" bIns="0" rtlCol="0" anchor="t"/>
           <a:lstStyle/>
           <a:p>
-            <a:pPr indent="0" marL="0">
+            <a:pPr marL="0" indent="0">
               <a:lnSpc>
                 <a:spcPts val="1500"/>
               </a:lnSpc>
@@ -24828,7 +24230,7 @@
           <a:bodyPr wrap="square" lIns="0" tIns="0" rIns="0" bIns="0" rtlCol="0" anchor="ctr"/>
           <a:lstStyle/>
           <a:p>
-            <a:pPr algn="ctr" indent="0" marL="0">
+            <a:pPr marL="0" indent="0" algn="ctr">
               <a:buNone/>
             </a:pPr>
             <a:r>
@@ -24867,7 +24269,7 @@
           <a:bodyPr wrap="square" lIns="0" tIns="0" rIns="0" bIns="0" rtlCol="0" anchor="ctr"/>
           <a:lstStyle/>
           <a:p>
-            <a:pPr indent="0" marL="0">
+            <a:pPr marL="0" indent="0">
               <a:buNone/>
             </a:pPr>
             <a:r>
@@ -24906,7 +24308,7 @@
           <a:bodyPr wrap="square" lIns="0" tIns="0" rIns="0" bIns="0" rtlCol="0" anchor="t"/>
           <a:lstStyle/>
           <a:p>
-            <a:pPr indent="0" marL="0">
+            <a:pPr marL="0" indent="0">
               <a:lnSpc>
                 <a:spcPts val="1500"/>
               </a:lnSpc>
@@ -25000,7 +24402,7 @@
           <a:bodyPr wrap="square" lIns="0" tIns="0" rIns="0" bIns="0" rtlCol="0" anchor="ctr"/>
           <a:lstStyle/>
           <a:p>
-            <a:pPr algn="ctr" indent="0" marL="0">
+            <a:pPr marL="0" indent="0" algn="ctr">
               <a:buNone/>
             </a:pPr>
             <a:r>
@@ -25039,7 +24441,7 @@
           <a:bodyPr wrap="square" lIns="0" tIns="0" rIns="0" bIns="0" rtlCol="0" anchor="ctr"/>
           <a:lstStyle/>
           <a:p>
-            <a:pPr indent="0" marL="0">
+            <a:pPr marL="0" indent="0">
               <a:buNone/>
             </a:pPr>
             <a:r>
@@ -25078,7 +24480,7 @@
           <a:bodyPr wrap="square" lIns="0" tIns="0" rIns="0" bIns="0" rtlCol="0" anchor="t"/>
           <a:lstStyle/>
           <a:p>
-            <a:pPr indent="0" marL="0">
+            <a:pPr marL="0" indent="0">
               <a:lnSpc>
                 <a:spcPts val="1500"/>
               </a:lnSpc>
@@ -25174,14 +24576,14 @@
           <a:bodyPr wrap="square" lIns="0" tIns="0" rIns="0" bIns="0" rtlCol="0" anchor="ctr"/>
           <a:lstStyle/>
           <a:p>
-            <a:pPr indent="0" marL="0">
+            <a:pPr marL="0" indent="0">
               <a:lnSpc>
                 <a:spcPts val="1656"/>
               </a:lnSpc>
               <a:buNone/>
             </a:pPr>
             <a:r>
-              <a:rPr lang="en-US" sz="1000" b="1" spc="130" kern="0" dirty="0">
+              <a:rPr lang="en-US" sz="1000" b="1" kern="0" spc="130" dirty="0">
                 <a:solidFill>
                   <a:srgbClr val="E6115E"/>
                 </a:solidFill>
@@ -25191,12 +24593,6 @@
               </a:rPr>
               <a:t>ANALOGÍA   </a:t>
             </a:r>
-            <a:pPr indent="0" marL="0">
-              <a:lnSpc>
-                <a:spcPts val="1656"/>
-              </a:lnSpc>
-              <a:buNone/>
-            </a:pPr>
             <a:r>
               <a:rPr lang="en-US" sz="1200" dirty="0">
                 <a:solidFill>
@@ -25233,7 +24629,7 @@
           <a:bodyPr wrap="square" lIns="0" tIns="0" rIns="0" bIns="0" rtlCol="0" anchor="ctr"/>
           <a:lstStyle/>
           <a:p>
-            <a:pPr indent="0" marL="0">
+            <a:pPr marL="0" indent="0">
               <a:buNone/>
             </a:pPr>
             <a:r>
@@ -25272,7 +24668,7 @@
           <a:bodyPr wrap="square" lIns="0" tIns="0" rIns="0" bIns="0" rtlCol="0" anchor="ctr"/>
           <a:lstStyle/>
           <a:p>
-            <a:pPr algn="r" indent="0" marL="0">
+            <a:pPr marL="0" indent="0" algn="r">
               <a:buNone/>
             </a:pPr>
             <a:r>
@@ -25306,6 +24702,7 @@
         <a:solidFill>
           <a:srgbClr val="F5F7FB"/>
         </a:solidFill>
+        <a:effectLst/>
       </p:bgPr>
     </p:bg>
     <p:spTree>
@@ -25343,7 +24740,7 @@
           <a:bodyPr wrap="square" lIns="0" tIns="0" rIns="0" bIns="0" rtlCol="0" anchor="ctr"/>
           <a:lstStyle/>
           <a:p>
-            <a:pPr indent="0" marL="0">
+            <a:pPr marL="0" indent="0">
               <a:buNone/>
             </a:pPr>
             <a:r>
@@ -25382,7 +24779,7 @@
           <a:bodyPr wrap="square" lIns="0" tIns="0" rIns="0" bIns="0" rtlCol="0" anchor="ctr"/>
           <a:lstStyle/>
           <a:p>
-            <a:pPr indent="0" marL="0">
+            <a:pPr marL="0" indent="0">
               <a:buNone/>
             </a:pPr>
             <a:r>
@@ -25448,7 +24845,7 @@
           <a:bodyPr wrap="square" lIns="0" tIns="0" rIns="0" bIns="0" rtlCol="0" anchor="ctr"/>
           <a:lstStyle/>
           <a:p>
-            <a:pPr indent="0" marL="0">
+            <a:pPr marL="0" indent="0">
               <a:buNone/>
             </a:pPr>
             <a:r>
@@ -25487,7 +24884,7 @@
           <a:bodyPr wrap="square" lIns="0" tIns="0" rIns="0" bIns="0" rtlCol="0" anchor="ctr"/>
           <a:lstStyle/>
           <a:p>
-            <a:pPr indent="0" marL="0">
+            <a:pPr marL="0" indent="0">
               <a:buNone/>
             </a:pPr>
             <a:r>
@@ -25526,7 +24923,7 @@
           <a:bodyPr wrap="square" lIns="0" tIns="0" rIns="0" bIns="0" rtlCol="0" anchor="ctr"/>
           <a:lstStyle/>
           <a:p>
-            <a:pPr indent="0" marL="0">
+            <a:pPr marL="0" indent="0">
               <a:lnSpc>
                 <a:spcPts val="1400"/>
               </a:lnSpc>
@@ -25595,7 +24992,7 @@
           <a:bodyPr wrap="square" lIns="0" tIns="0" rIns="0" bIns="0" rtlCol="0" anchor="ctr"/>
           <a:lstStyle/>
           <a:p>
-            <a:pPr algn="ctr" indent="0" marL="0">
+            <a:pPr marL="0" indent="0" algn="ctr">
               <a:buNone/>
             </a:pPr>
             <a:r>
@@ -25661,7 +25058,7 @@
           <a:bodyPr wrap="square" lIns="0" tIns="0" rIns="0" bIns="0" rtlCol="0" anchor="ctr"/>
           <a:lstStyle/>
           <a:p>
-            <a:pPr indent="0" marL="0">
+            <a:pPr marL="0" indent="0">
               <a:buNone/>
             </a:pPr>
             <a:r>
@@ -25700,7 +25097,7 @@
           <a:bodyPr wrap="square" lIns="0" tIns="0" rIns="0" bIns="0" rtlCol="0" anchor="ctr"/>
           <a:lstStyle/>
           <a:p>
-            <a:pPr indent="0" marL="0">
+            <a:pPr marL="0" indent="0">
               <a:buNone/>
             </a:pPr>
             <a:r>
@@ -25739,7 +25136,7 @@
           <a:bodyPr wrap="square" lIns="0" tIns="0" rIns="0" bIns="0" rtlCol="0" anchor="ctr"/>
           <a:lstStyle/>
           <a:p>
-            <a:pPr indent="0" marL="0">
+            <a:pPr marL="0" indent="0">
               <a:lnSpc>
                 <a:spcPts val="1400"/>
               </a:lnSpc>
@@ -25808,7 +25205,7 @@
           <a:bodyPr wrap="square" lIns="0" tIns="0" rIns="0" bIns="0" rtlCol="0" anchor="ctr"/>
           <a:lstStyle/>
           <a:p>
-            <a:pPr algn="ctr" indent="0" marL="0">
+            <a:pPr marL="0" indent="0" algn="ctr">
               <a:buNone/>
             </a:pPr>
             <a:r>
@@ -25874,7 +25271,7 @@
           <a:bodyPr wrap="square" lIns="0" tIns="0" rIns="0" bIns="0" rtlCol="0" anchor="ctr"/>
           <a:lstStyle/>
           <a:p>
-            <a:pPr indent="0" marL="0">
+            <a:pPr marL="0" indent="0">
               <a:buNone/>
             </a:pPr>
             <a:r>
@@ -25913,7 +25310,7 @@
           <a:bodyPr wrap="square" lIns="0" tIns="0" rIns="0" bIns="0" rtlCol="0" anchor="ctr"/>
           <a:lstStyle/>
           <a:p>
-            <a:pPr indent="0" marL="0">
+            <a:pPr marL="0" indent="0">
               <a:buNone/>
             </a:pPr>
             <a:r>
@@ -25952,7 +25349,7 @@
           <a:bodyPr wrap="square" lIns="0" tIns="0" rIns="0" bIns="0" rtlCol="0" anchor="ctr"/>
           <a:lstStyle/>
           <a:p>
-            <a:pPr indent="0" marL="0">
+            <a:pPr marL="0" indent="0">
               <a:lnSpc>
                 <a:spcPts val="1400"/>
               </a:lnSpc>
@@ -26021,7 +25418,7 @@
           <a:bodyPr wrap="square" lIns="0" tIns="0" rIns="0" bIns="0" rtlCol="0" anchor="ctr"/>
           <a:lstStyle/>
           <a:p>
-            <a:pPr algn="ctr" indent="0" marL="0">
+            <a:pPr marL="0" indent="0" algn="ctr">
               <a:buNone/>
             </a:pPr>
             <a:r>
@@ -26087,7 +25484,7 @@
           <a:bodyPr wrap="square" lIns="0" tIns="0" rIns="0" bIns="0" rtlCol="0" anchor="ctr"/>
           <a:lstStyle/>
           <a:p>
-            <a:pPr indent="0" marL="0">
+            <a:pPr marL="0" indent="0">
               <a:buNone/>
             </a:pPr>
             <a:r>
@@ -26126,7 +25523,7 @@
           <a:bodyPr wrap="square" lIns="0" tIns="0" rIns="0" bIns="0" rtlCol="0" anchor="ctr"/>
           <a:lstStyle/>
           <a:p>
-            <a:pPr indent="0" marL="0">
+            <a:pPr marL="0" indent="0">
               <a:buNone/>
             </a:pPr>
             <a:r>
@@ -26165,7 +25562,7 @@
           <a:bodyPr wrap="square" lIns="0" tIns="0" rIns="0" bIns="0" rtlCol="0" anchor="ctr"/>
           <a:lstStyle/>
           <a:p>
-            <a:pPr indent="0" marL="0">
+            <a:pPr marL="0" indent="0">
               <a:lnSpc>
                 <a:spcPts val="1400"/>
               </a:lnSpc>
@@ -26234,7 +25631,7 @@
           <a:bodyPr wrap="square" lIns="0" tIns="0" rIns="0" bIns="0" rtlCol="0" anchor="ctr"/>
           <a:lstStyle/>
           <a:p>
-            <a:pPr algn="ctr" indent="0" marL="0">
+            <a:pPr marL="0" indent="0" algn="ctr">
               <a:buNone/>
             </a:pPr>
             <a:r>
@@ -26300,7 +25697,7 @@
           <a:bodyPr wrap="square" lIns="0" tIns="0" rIns="0" bIns="0" rtlCol="0" anchor="ctr"/>
           <a:lstStyle/>
           <a:p>
-            <a:pPr indent="0" marL="0">
+            <a:pPr marL="0" indent="0">
               <a:buNone/>
             </a:pPr>
             <a:r>
@@ -26339,7 +25736,7 @@
           <a:bodyPr wrap="square" lIns="0" tIns="0" rIns="0" bIns="0" rtlCol="0" anchor="ctr"/>
           <a:lstStyle/>
           <a:p>
-            <a:pPr indent="0" marL="0">
+            <a:pPr marL="0" indent="0">
               <a:buNone/>
             </a:pPr>
             <a:r>
@@ -26378,7 +25775,7 @@
           <a:bodyPr wrap="square" lIns="0" tIns="0" rIns="0" bIns="0" rtlCol="0" anchor="ctr"/>
           <a:lstStyle/>
           <a:p>
-            <a:pPr indent="0" marL="0">
+            <a:pPr marL="0" indent="0">
               <a:lnSpc>
                 <a:spcPts val="1400"/>
               </a:lnSpc>
@@ -26447,7 +25844,7 @@
           <a:bodyPr wrap="square" lIns="0" tIns="0" rIns="0" bIns="0" rtlCol="0" anchor="ctr"/>
           <a:lstStyle/>
           <a:p>
-            <a:pPr algn="ctr" indent="0" marL="0">
+            <a:pPr marL="0" indent="0" algn="ctr">
               <a:buNone/>
             </a:pPr>
             <a:r>
@@ -26486,7 +25883,7 @@
           <a:bodyPr wrap="square" lIns="0" tIns="0" rIns="0" bIns="0" rtlCol="0" anchor="ctr"/>
           <a:lstStyle/>
           <a:p>
-            <a:pPr indent="0" marL="0">
+            <a:pPr marL="0" indent="0">
               <a:buNone/>
             </a:pPr>
             <a:r>
@@ -26520,6 +25917,7 @@
         <a:solidFill>
           <a:srgbClr val="F5F7FB"/>
         </a:solidFill>
+        <a:effectLst/>
       </p:bgPr>
     </p:bg>
     <p:spTree>
@@ -26557,7 +25955,7 @@
           <a:bodyPr wrap="square" lIns="0" tIns="0" rIns="0" bIns="0" rtlCol="0" anchor="ctr"/>
           <a:lstStyle/>
           <a:p>
-            <a:pPr indent="0" marL="0">
+            <a:pPr marL="0" indent="0">
               <a:buNone/>
             </a:pPr>
             <a:r>
@@ -26596,7 +25994,7 @@
           <a:bodyPr wrap="square" lIns="0" tIns="0" rIns="0" bIns="0" rtlCol="0" anchor="ctr"/>
           <a:lstStyle/>
           <a:p>
-            <a:pPr indent="0" marL="0">
+            <a:pPr marL="0" indent="0">
               <a:buNone/>
             </a:pPr>
             <a:r>
@@ -26662,7 +26060,7 @@
           <a:bodyPr wrap="square" lIns="0" tIns="0" rIns="0" bIns="0" rtlCol="0" anchor="ctr"/>
           <a:lstStyle/>
           <a:p>
-            <a:pPr algn="ctr" indent="0" marL="0">
+            <a:pPr marL="0" indent="0" algn="ctr">
               <a:buNone/>
             </a:pPr>
             <a:r>
@@ -26701,7 +26099,7 @@
           <a:bodyPr wrap="square" lIns="0" tIns="0" rIns="0" bIns="0" rtlCol="0" anchor="ctr"/>
           <a:lstStyle/>
           <a:p>
-            <a:pPr indent="0" marL="0">
+            <a:pPr marL="0" indent="0">
               <a:buNone/>
             </a:pPr>
             <a:r>
@@ -26740,7 +26138,7 @@
           <a:bodyPr wrap="square" lIns="0" tIns="0" rIns="0" bIns="0" rtlCol="0" anchor="ctr"/>
           <a:lstStyle/>
           <a:p>
-            <a:pPr indent="0" marL="0">
+            <a:pPr marL="0" indent="0">
               <a:buNone/>
             </a:pPr>
             <a:r>
@@ -26829,7 +26227,7 @@
           <a:bodyPr wrap="square" lIns="0" tIns="0" rIns="0" bIns="0" rtlCol="0" anchor="ctr"/>
           <a:lstStyle/>
           <a:p>
-            <a:pPr algn="ctr" indent="0" marL="0">
+            <a:pPr marL="0" indent="0" algn="ctr">
               <a:buNone/>
             </a:pPr>
             <a:r>
@@ -26868,7 +26266,7 @@
           <a:bodyPr wrap="square" lIns="0" tIns="0" rIns="0" bIns="0" rtlCol="0" anchor="ctr"/>
           <a:lstStyle/>
           <a:p>
-            <a:pPr indent="0" marL="0">
+            <a:pPr marL="0" indent="0">
               <a:buNone/>
             </a:pPr>
             <a:r>
@@ -26907,7 +26305,7 @@
           <a:bodyPr wrap="square" lIns="0" tIns="0" rIns="0" bIns="0" rtlCol="0" anchor="ctr"/>
           <a:lstStyle/>
           <a:p>
-            <a:pPr indent="0" marL="0">
+            <a:pPr marL="0" indent="0">
               <a:buNone/>
             </a:pPr>
             <a:r>
@@ -26996,7 +26394,7 @@
           <a:bodyPr wrap="square" lIns="0" tIns="0" rIns="0" bIns="0" rtlCol="0" anchor="ctr"/>
           <a:lstStyle/>
           <a:p>
-            <a:pPr algn="ctr" indent="0" marL="0">
+            <a:pPr marL="0" indent="0" algn="ctr">
               <a:buNone/>
             </a:pPr>
             <a:r>
@@ -27035,7 +26433,7 @@
           <a:bodyPr wrap="square" lIns="0" tIns="0" rIns="0" bIns="0" rtlCol="0" anchor="ctr"/>
           <a:lstStyle/>
           <a:p>
-            <a:pPr indent="0" marL="0">
+            <a:pPr marL="0" indent="0">
               <a:buNone/>
             </a:pPr>
             <a:r>
@@ -27074,7 +26472,7 @@
           <a:bodyPr wrap="square" lIns="0" tIns="0" rIns="0" bIns="0" rtlCol="0" anchor="ctr"/>
           <a:lstStyle/>
           <a:p>
-            <a:pPr indent="0" marL="0">
+            <a:pPr marL="0" indent="0">
               <a:buNone/>
             </a:pPr>
             <a:r>
@@ -27163,7 +26561,7 @@
           <a:bodyPr wrap="square" lIns="0" tIns="0" rIns="0" bIns="0" rtlCol="0" anchor="ctr"/>
           <a:lstStyle/>
           <a:p>
-            <a:pPr algn="ctr" indent="0" marL="0">
+            <a:pPr marL="0" indent="0" algn="ctr">
               <a:buNone/>
             </a:pPr>
             <a:r>
@@ -27202,7 +26600,7 @@
           <a:bodyPr wrap="square" lIns="0" tIns="0" rIns="0" bIns="0" rtlCol="0" anchor="ctr"/>
           <a:lstStyle/>
           <a:p>
-            <a:pPr indent="0" marL="0">
+            <a:pPr marL="0" indent="0">
               <a:buNone/>
             </a:pPr>
             <a:r>
@@ -27241,7 +26639,7 @@
           <a:bodyPr wrap="square" lIns="0" tIns="0" rIns="0" bIns="0" rtlCol="0" anchor="ctr"/>
           <a:lstStyle/>
           <a:p>
-            <a:pPr indent="0" marL="0">
+            <a:pPr marL="0" indent="0">
               <a:buNone/>
             </a:pPr>
             <a:r>
@@ -27330,7 +26728,7 @@
           <a:bodyPr wrap="square" lIns="0" tIns="0" rIns="0" bIns="0" rtlCol="0" anchor="ctr"/>
           <a:lstStyle/>
           <a:p>
-            <a:pPr algn="ctr" indent="0" marL="0">
+            <a:pPr marL="0" indent="0" algn="ctr">
               <a:buNone/>
             </a:pPr>
             <a:r>
@@ -27369,7 +26767,7 @@
           <a:bodyPr wrap="square" lIns="0" tIns="0" rIns="0" bIns="0" rtlCol="0" anchor="ctr"/>
           <a:lstStyle/>
           <a:p>
-            <a:pPr indent="0" marL="0">
+            <a:pPr marL="0" indent="0">
               <a:buNone/>
             </a:pPr>
             <a:r>
@@ -27408,7 +26806,7 @@
           <a:bodyPr wrap="square" lIns="0" tIns="0" rIns="0" bIns="0" rtlCol="0" anchor="ctr"/>
           <a:lstStyle/>
           <a:p>
-            <a:pPr indent="0" marL="0">
+            <a:pPr marL="0" indent="0">
               <a:buNone/>
             </a:pPr>
             <a:r>
@@ -27497,7 +26895,7 @@
           <a:bodyPr wrap="square" lIns="0" tIns="0" rIns="0" bIns="0" rtlCol="0" anchor="ctr"/>
           <a:lstStyle/>
           <a:p>
-            <a:pPr algn="ctr" indent="0" marL="0">
+            <a:pPr marL="0" indent="0" algn="ctr">
               <a:buNone/>
             </a:pPr>
             <a:r>
@@ -27536,7 +26934,7 @@
           <a:bodyPr wrap="square" lIns="0" tIns="0" rIns="0" bIns="0" rtlCol="0" anchor="ctr"/>
           <a:lstStyle/>
           <a:p>
-            <a:pPr indent="0" marL="0">
+            <a:pPr marL="0" indent="0">
               <a:buNone/>
             </a:pPr>
             <a:r>
@@ -27575,7 +26973,7 @@
           <a:bodyPr wrap="square" lIns="0" tIns="0" rIns="0" bIns="0" rtlCol="0" anchor="ctr"/>
           <a:lstStyle/>
           <a:p>
-            <a:pPr indent="0" marL="0">
+            <a:pPr marL="0" indent="0">
               <a:buNone/>
             </a:pPr>
             <a:r>
@@ -27614,7 +27012,7 @@
           <a:bodyPr wrap="square" lIns="0" tIns="0" rIns="0" bIns="0" rtlCol="0" anchor="ctr"/>
           <a:lstStyle/>
           <a:p>
-            <a:pPr indent="0" marL="0">
+            <a:pPr marL="0" indent="0">
               <a:buNone/>
             </a:pPr>
             <a:r>
@@ -27653,7 +27051,7 @@
           <a:bodyPr wrap="square" lIns="0" tIns="0" rIns="0" bIns="0" rtlCol="0" anchor="ctr"/>
           <a:lstStyle/>
           <a:p>
-            <a:pPr algn="r" indent="0" marL="0">
+            <a:pPr marL="0" indent="0" algn="r">
               <a:buNone/>
             </a:pPr>
             <a:r>
@@ -27687,6 +27085,7 @@
         <a:solidFill>
           <a:srgbClr val="0A2559"/>
         </a:solidFill>
+        <a:effectLst/>
       </p:bgPr>
     </p:bg>
     <p:spTree>
@@ -27780,11 +27179,11 @@
           <a:bodyPr wrap="square" lIns="0" tIns="0" rIns="0" bIns="0" rtlCol="0" anchor="ctr"/>
           <a:lstStyle/>
           <a:p>
-            <a:pPr algn="ctr" indent="0" marL="0">
-              <a:buNone/>
-            </a:pPr>
-            <a:r>
-              <a:rPr lang="en-US" sz="1150" b="1" spc="120" kern="0" dirty="0">
+            <a:pPr marL="0" indent="0" algn="ctr">
+              <a:buNone/>
+            </a:pPr>
+            <a:r>
+              <a:rPr lang="en-US" sz="1150" b="1" kern="0" spc="120" dirty="0">
                 <a:solidFill>
                   <a:srgbClr val="FFFFFF"/>
                 </a:solidFill>
@@ -27819,7 +27218,7 @@
           <a:bodyPr wrap="square" lIns="0" tIns="0" rIns="0" bIns="0" rtlCol="0" anchor="ctr"/>
           <a:lstStyle/>
           <a:p>
-            <a:pPr indent="0" marL="0">
+            <a:pPr marL="0" indent="0">
               <a:buNone/>
             </a:pPr>
             <a:r>
@@ -27858,7 +27257,7 @@
           <a:bodyPr wrap="square" lIns="0" tIns="0" rIns="0" bIns="0" rtlCol="0" anchor="ctr"/>
           <a:lstStyle/>
           <a:p>
-            <a:pPr indent="0" marL="0">
+            <a:pPr marL="0" indent="0">
               <a:lnSpc>
                 <a:spcPts val="4200"/>
               </a:lnSpc>
@@ -27878,7 +27277,7 @@
             <a:endParaRPr lang="en-US" sz="3200" dirty="0"/>
           </a:p>
           <a:p>
-            <a:pPr indent="0" marL="0">
+            <a:pPr marL="0" indent="0">
               <a:lnSpc>
                 <a:spcPts val="4200"/>
               </a:lnSpc>
@@ -27920,7 +27319,7 @@
           <a:bodyPr wrap="square" lIns="0" tIns="0" rIns="0" bIns="0" rtlCol="0" anchor="ctr"/>
           <a:lstStyle/>
           <a:p>
-            <a:pPr indent="0" marL="0">
+            <a:pPr marL="0" indent="0">
               <a:buNone/>
             </a:pPr>
             <a:r>
@@ -28013,14 +27412,14 @@
           <a:bodyPr wrap="square" lIns="0" tIns="0" rIns="0" bIns="0" rtlCol="0" anchor="ctr"/>
           <a:lstStyle/>
           <a:p>
-            <a:pPr indent="0" marL="0">
+            <a:pPr marL="0" indent="0">
               <a:lnSpc>
                 <a:spcPts val="1794"/>
               </a:lnSpc>
               <a:buNone/>
             </a:pPr>
             <a:r>
-              <a:rPr lang="en-US" sz="1000" b="1" spc="130" kern="0" dirty="0">
+              <a:rPr lang="en-US" sz="1000" b="1" kern="0" spc="130" dirty="0">
                 <a:solidFill>
                   <a:srgbClr val="E6115E"/>
                 </a:solidFill>
@@ -28030,12 +27429,6 @@
               </a:rPr>
               <a:t>ANALOGÍA   </a:t>
             </a:r>
-            <a:pPr indent="0" marL="0">
-              <a:lnSpc>
-                <a:spcPts val="1794"/>
-              </a:lnSpc>
-              <a:buNone/>
-            </a:pPr>
             <a:r>
               <a:rPr lang="en-US" sz="1300" dirty="0">
                 <a:solidFill>
@@ -28072,7 +27465,7 @@
           <a:bodyPr wrap="square" lIns="0" tIns="0" rIns="0" bIns="0" rtlCol="0" anchor="ctr"/>
           <a:lstStyle/>
           <a:p>
-            <a:pPr indent="0" marL="0">
+            <a:pPr marL="0" indent="0">
               <a:buNone/>
             </a:pPr>
             <a:r>
@@ -28111,7 +27504,7 @@
           <a:bodyPr wrap="square" lIns="0" tIns="0" rIns="0" bIns="0" rtlCol="0" anchor="ctr"/>
           <a:lstStyle/>
           <a:p>
-            <a:pPr algn="r" indent="0" marL="0">
+            <a:pPr marL="0" indent="0" algn="r">
               <a:buNone/>
             </a:pPr>
             <a:r>
@@ -28145,6 +27538,7 @@
         <a:solidFill>
           <a:srgbClr val="F5F7FB"/>
         </a:solidFill>
+        <a:effectLst/>
       </p:bgPr>
     </p:bg>
     <p:spTree>
@@ -28182,7 +27576,7 @@
           <a:bodyPr wrap="square" lIns="0" tIns="0" rIns="0" bIns="0" rtlCol="0" anchor="ctr"/>
           <a:lstStyle/>
           <a:p>
-            <a:pPr indent="0" marL="0">
+            <a:pPr marL="0" indent="0">
               <a:buNone/>
             </a:pPr>
             <a:r>
@@ -28221,7 +27615,7 @@
           <a:bodyPr wrap="square" lIns="0" tIns="0" rIns="0" bIns="0" rtlCol="0" anchor="ctr"/>
           <a:lstStyle/>
           <a:p>
-            <a:pPr indent="0" marL="0">
+            <a:pPr marL="0" indent="0">
               <a:buNone/>
             </a:pPr>
             <a:r>
@@ -28285,11 +27679,11 @@
           <a:bodyPr wrap="square" lIns="0" tIns="0" rIns="0" bIns="0" rtlCol="0" anchor="ctr"/>
           <a:lstStyle/>
           <a:p>
-            <a:pPr algn="ctr" indent="0" marL="0">
-              <a:buNone/>
-            </a:pPr>
-            <a:r>
-              <a:rPr lang="en-US" sz="1150" b="1" spc="130" kern="0" dirty="0">
+            <a:pPr marL="0" indent="0" algn="ctr">
+              <a:buNone/>
+            </a:pPr>
+            <a:r>
+              <a:rPr lang="en-US" sz="1150" b="1" kern="0" spc="130" dirty="0">
                 <a:solidFill>
                   <a:srgbClr val="1A56E8"/>
                 </a:solidFill>
@@ -28324,7 +27718,7 @@
           <a:bodyPr wrap="square" lIns="0" tIns="0" rIns="0" bIns="0" rtlCol="0" anchor="ctr"/>
           <a:lstStyle/>
           <a:p>
-            <a:pPr algn="ctr" indent="0" marL="0">
+            <a:pPr marL="0" indent="0" algn="ctr">
               <a:lnSpc>
                 <a:spcPts val="1500"/>
               </a:lnSpc>
@@ -28344,7 +27738,7 @@
             <a:endParaRPr lang="en-US" sz="1150" dirty="0"/>
           </a:p>
           <a:p>
-            <a:pPr algn="ctr" indent="0" marL="0">
+            <a:pPr marL="0" indent="0" algn="ctr">
               <a:lnSpc>
                 <a:spcPts val="1500"/>
               </a:lnSpc>
@@ -28386,7 +27780,7 @@
           <a:bodyPr wrap="square" lIns="0" tIns="0" rIns="0" bIns="0" rtlCol="0" anchor="ctr"/>
           <a:lstStyle/>
           <a:p>
-            <a:pPr algn="ctr" indent="0" marL="0">
+            <a:pPr marL="0" indent="0" algn="ctr">
               <a:buNone/>
             </a:pPr>
             <a:r>
@@ -28425,7 +27819,7 @@
           <a:bodyPr wrap="square" lIns="0" tIns="0" rIns="0" bIns="0" rtlCol="0" anchor="ctr"/>
           <a:lstStyle/>
           <a:p>
-            <a:pPr algn="ctr" indent="0" marL="0">
+            <a:pPr marL="0" indent="0" algn="ctr">
               <a:buNone/>
             </a:pPr>
             <a:r>
@@ -28488,11 +27882,11 @@
           <a:bodyPr wrap="square" lIns="0" tIns="0" rIns="0" bIns="0" rtlCol="0" anchor="ctr"/>
           <a:lstStyle/>
           <a:p>
-            <a:pPr algn="ctr" indent="0" marL="0">
-              <a:buNone/>
-            </a:pPr>
-            <a:r>
-              <a:rPr lang="en-US" sz="1050" b="1" spc="100" kern="0" dirty="0">
+            <a:pPr marL="0" indent="0" algn="ctr">
+              <a:buNone/>
+            </a:pPr>
+            <a:r>
+              <a:rPr lang="en-US" sz="1050" b="1" kern="0" spc="100" dirty="0">
                 <a:solidFill>
                   <a:srgbClr val="1A56E8"/>
                 </a:solidFill>
@@ -28551,11 +27945,11 @@
           <a:bodyPr wrap="square" lIns="0" tIns="0" rIns="0" bIns="0" rtlCol="0" anchor="ctr"/>
           <a:lstStyle/>
           <a:p>
-            <a:pPr algn="ctr" indent="0" marL="0">
-              <a:buNone/>
-            </a:pPr>
-            <a:r>
-              <a:rPr lang="en-US" sz="1050" b="1" spc="100" kern="0" dirty="0">
+            <a:pPr marL="0" indent="0" algn="ctr">
+              <a:buNone/>
+            </a:pPr>
+            <a:r>
+              <a:rPr lang="en-US" sz="1050" b="1" kern="0" spc="100" dirty="0">
                 <a:solidFill>
                   <a:srgbClr val="E6115E"/>
                 </a:solidFill>
@@ -28615,11 +28009,11 @@
           <a:bodyPr wrap="square" lIns="0" tIns="0" rIns="0" bIns="0" rtlCol="0" anchor="ctr"/>
           <a:lstStyle/>
           <a:p>
-            <a:pPr algn="ctr" indent="0" marL="0">
-              <a:buNone/>
-            </a:pPr>
-            <a:r>
-              <a:rPr lang="en-US" sz="1000" b="1" spc="100" kern="0" dirty="0">
+            <a:pPr marL="0" indent="0" algn="ctr">
+              <a:buNone/>
+            </a:pPr>
+            <a:r>
+              <a:rPr lang="en-US" sz="1000" b="1" kern="0" spc="100" dirty="0">
                 <a:solidFill>
                   <a:srgbClr val="E6115E"/>
                 </a:solidFill>
@@ -28654,7 +28048,7 @@
           <a:bodyPr wrap="square" lIns="0" tIns="0" rIns="0" bIns="0" rtlCol="0" anchor="ctr"/>
           <a:lstStyle/>
           <a:p>
-            <a:pPr algn="ctr" indent="0" marL="0">
+            <a:pPr marL="0" indent="0" algn="ctr">
               <a:buNone/>
             </a:pPr>
             <a:r>
@@ -28693,7 +28087,7 @@
           <a:bodyPr wrap="square" lIns="0" tIns="0" rIns="0" bIns="0" rtlCol="0" anchor="ctr"/>
           <a:lstStyle/>
           <a:p>
-            <a:pPr algn="ctr" indent="0" marL="0">
+            <a:pPr marL="0" indent="0" algn="ctr">
               <a:buNone/>
             </a:pPr>
             <a:r>
@@ -28759,7 +28153,7 @@
           <a:bodyPr wrap="square" lIns="0" tIns="0" rIns="0" bIns="0" rtlCol="0" anchor="ctr"/>
           <a:lstStyle/>
           <a:p>
-            <a:pPr algn="ctr" indent="0" marL="0">
+            <a:pPr marL="0" indent="0" algn="ctr">
               <a:lnSpc>
                 <a:spcPts val="2400"/>
               </a:lnSpc>
@@ -28779,7 +28173,7 @@
             <a:endParaRPr lang="en-US" sz="1700" dirty="0"/>
           </a:p>
           <a:p>
-            <a:pPr algn="ctr" indent="0" marL="0">
+            <a:pPr marL="0" indent="0" algn="ctr">
               <a:lnSpc>
                 <a:spcPts val="2400"/>
               </a:lnSpc>
@@ -28821,7 +28215,7 @@
           <a:bodyPr wrap="square" lIns="0" tIns="0" rIns="0" bIns="0" rtlCol="0" anchor="ctr"/>
           <a:lstStyle/>
           <a:p>
-            <a:pPr algn="ctr" indent="0" marL="0">
+            <a:pPr marL="0" indent="0" algn="ctr">
               <a:lnSpc>
                 <a:spcPts val="1600"/>
               </a:lnSpc>
@@ -28917,14 +28311,14 @@
           <a:bodyPr wrap="square" lIns="0" tIns="0" rIns="0" bIns="0" rtlCol="0" anchor="ctr"/>
           <a:lstStyle/>
           <a:p>
-            <a:pPr indent="0" marL="0">
+            <a:pPr marL="0" indent="0">
               <a:lnSpc>
                 <a:spcPts val="1725"/>
               </a:lnSpc>
               <a:buNone/>
             </a:pPr>
             <a:r>
-              <a:rPr lang="en-US" sz="1000" b="1" spc="130" kern="0" dirty="0">
+              <a:rPr lang="en-US" sz="1000" b="1" kern="0" spc="130" dirty="0">
                 <a:solidFill>
                   <a:srgbClr val="E6115E"/>
                 </a:solidFill>
@@ -28934,12 +28328,6 @@
               </a:rPr>
               <a:t>ANALOGÍA   </a:t>
             </a:r>
-            <a:pPr indent="0" marL="0">
-              <a:lnSpc>
-                <a:spcPts val="1725"/>
-              </a:lnSpc>
-              <a:buNone/>
-            </a:pPr>
             <a:r>
               <a:rPr lang="en-US" sz="1250" dirty="0">
                 <a:solidFill>
@@ -28976,7 +28364,7 @@
           <a:bodyPr wrap="square" lIns="0" tIns="0" rIns="0" bIns="0" rtlCol="0" anchor="ctr"/>
           <a:lstStyle/>
           <a:p>
-            <a:pPr indent="0" marL="0">
+            <a:pPr marL="0" indent="0">
               <a:buNone/>
             </a:pPr>
             <a:r>
@@ -29015,7 +28403,7 @@
           <a:bodyPr wrap="square" lIns="0" tIns="0" rIns="0" bIns="0" rtlCol="0" anchor="ctr"/>
           <a:lstStyle/>
           <a:p>
-            <a:pPr algn="r" indent="0" marL="0">
+            <a:pPr marL="0" indent="0" algn="r">
               <a:buNone/>
             </a:pPr>
             <a:r>
@@ -29049,6 +28437,7 @@
         <a:solidFill>
           <a:srgbClr val="F5F7FB"/>
         </a:solidFill>
+        <a:effectLst/>
       </p:bgPr>
     </p:bg>
     <p:spTree>
@@ -29086,7 +28475,7 @@
           <a:bodyPr wrap="square" lIns="0" tIns="0" rIns="0" bIns="0" rtlCol="0" anchor="ctr"/>
           <a:lstStyle/>
           <a:p>
-            <a:pPr indent="0" marL="0">
+            <a:pPr marL="0" indent="0">
               <a:buNone/>
             </a:pPr>
             <a:r>
@@ -29125,7 +28514,7 @@
           <a:bodyPr wrap="square" lIns="0" tIns="0" rIns="0" bIns="0" rtlCol="0" anchor="ctr"/>
           <a:lstStyle/>
           <a:p>
-            <a:pPr indent="0" marL="0">
+            <a:pPr marL="0" indent="0">
               <a:buNone/>
             </a:pPr>
             <a:r>
@@ -29191,7 +28580,7 @@
           <a:bodyPr wrap="square" lIns="0" tIns="0" rIns="0" bIns="0" rtlCol="0" anchor="ctr"/>
           <a:lstStyle/>
           <a:p>
-            <a:pPr indent="0" marL="0">
+            <a:pPr marL="0" indent="0">
               <a:buNone/>
             </a:pPr>
             <a:r>
@@ -29230,7 +28619,7 @@
           <a:bodyPr wrap="square" lIns="0" tIns="0" rIns="0" bIns="0" rtlCol="0" anchor="ctr"/>
           <a:lstStyle/>
           <a:p>
-            <a:pPr indent="0" marL="0">
+            <a:pPr marL="0" indent="0">
               <a:buNone/>
             </a:pPr>
             <a:r>
@@ -29269,7 +28658,7 @@
           <a:bodyPr wrap="square" lIns="0" tIns="0" rIns="0" bIns="0" rtlCol="0" anchor="ctr"/>
           <a:lstStyle/>
           <a:p>
-            <a:pPr indent="0" marL="0">
+            <a:pPr marL="0" indent="0">
               <a:buNone/>
             </a:pPr>
             <a:r>
@@ -29308,7 +28697,7 @@
           <a:bodyPr wrap="square" lIns="0" tIns="0" rIns="0" bIns="0" rtlCol="0" anchor="ctr"/>
           <a:lstStyle/>
           <a:p>
-            <a:pPr indent="0" marL="0">
+            <a:pPr marL="0" indent="0">
               <a:buNone/>
             </a:pPr>
             <a:r>
@@ -29374,7 +28763,7 @@
           <a:bodyPr wrap="square" lIns="0" tIns="0" rIns="0" bIns="0" rtlCol="0" anchor="ctr"/>
           <a:lstStyle/>
           <a:p>
-            <a:pPr indent="0" marL="0">
+            <a:pPr marL="0" indent="0">
               <a:buNone/>
             </a:pPr>
             <a:r>
@@ -29413,7 +28802,7 @@
           <a:bodyPr wrap="square" lIns="0" tIns="0" rIns="0" bIns="0" rtlCol="0" anchor="ctr"/>
           <a:lstStyle/>
           <a:p>
-            <a:pPr indent="0" marL="0">
+            <a:pPr marL="0" indent="0">
               <a:buNone/>
             </a:pPr>
             <a:r>
@@ -29452,7 +28841,7 @@
           <a:bodyPr wrap="square" lIns="0" tIns="0" rIns="0" bIns="0" rtlCol="0" anchor="ctr"/>
           <a:lstStyle/>
           <a:p>
-            <a:pPr indent="0" marL="0">
+            <a:pPr marL="0" indent="0">
               <a:buNone/>
             </a:pPr>
             <a:r>
@@ -29491,7 +28880,7 @@
           <a:bodyPr wrap="square" lIns="0" tIns="0" rIns="0" bIns="0" rtlCol="0" anchor="ctr"/>
           <a:lstStyle/>
           <a:p>
-            <a:pPr indent="0" marL="0">
+            <a:pPr marL="0" indent="0">
               <a:buNone/>
             </a:pPr>
             <a:r>
@@ -29530,7 +28919,7 @@
           <a:bodyPr wrap="square" lIns="0" tIns="0" rIns="0" bIns="0" rtlCol="0" anchor="ctr"/>
           <a:lstStyle/>
           <a:p>
-            <a:pPr indent="0" marL="0">
+            <a:pPr marL="0" indent="0">
               <a:buNone/>
             </a:pPr>
             <a:r>
@@ -29569,7 +28958,7 @@
           <a:bodyPr wrap="square" lIns="0" tIns="0" rIns="0" bIns="0" rtlCol="0" anchor="ctr"/>
           <a:lstStyle/>
           <a:p>
-            <a:pPr indent="0" marL="0">
+            <a:pPr marL="0" indent="0">
               <a:buNone/>
             </a:pPr>
             <a:r>
@@ -29608,7 +28997,7 @@
           <a:bodyPr wrap="square" lIns="0" tIns="0" rIns="0" bIns="0" rtlCol="0" anchor="ctr"/>
           <a:lstStyle/>
           <a:p>
-            <a:pPr indent="0" marL="0">
+            <a:pPr marL="0" indent="0">
               <a:buNone/>
             </a:pPr>
             <a:r>
@@ -29647,7 +29036,7 @@
           <a:bodyPr wrap="square" lIns="0" tIns="0" rIns="0" bIns="0" rtlCol="0" anchor="ctr"/>
           <a:lstStyle/>
           <a:p>
-            <a:pPr indent="0" marL="0">
+            <a:pPr marL="0" indent="0">
               <a:buNone/>
             </a:pPr>
             <a:r>
@@ -29713,7 +29102,7 @@
           <a:bodyPr wrap="square" lIns="0" tIns="0" rIns="0" bIns="0" rtlCol="0" anchor="ctr"/>
           <a:lstStyle/>
           <a:p>
-            <a:pPr indent="0" marL="0">
+            <a:pPr marL="0" indent="0">
               <a:buNone/>
             </a:pPr>
             <a:r>
@@ -29752,7 +29141,7 @@
           <a:bodyPr wrap="square" lIns="0" tIns="0" rIns="0" bIns="0" rtlCol="0" anchor="ctr"/>
           <a:lstStyle/>
           <a:p>
-            <a:pPr indent="0" marL="0">
+            <a:pPr marL="0" indent="0">
               <a:buNone/>
             </a:pPr>
             <a:r>
@@ -29791,7 +29180,7 @@
           <a:bodyPr wrap="square" lIns="0" tIns="0" rIns="0" bIns="0" rtlCol="0" anchor="ctr"/>
           <a:lstStyle/>
           <a:p>
-            <a:pPr indent="0" marL="0">
+            <a:pPr marL="0" indent="0">
               <a:buNone/>
             </a:pPr>
             <a:r>
@@ -29830,7 +29219,7 @@
           <a:bodyPr wrap="square" lIns="0" tIns="0" rIns="0" bIns="0" rtlCol="0" anchor="ctr"/>
           <a:lstStyle/>
           <a:p>
-            <a:pPr indent="0" marL="0">
+            <a:pPr marL="0" indent="0">
               <a:buNone/>
             </a:pPr>
             <a:r>
@@ -29869,7 +29258,7 @@
           <a:bodyPr wrap="square" lIns="0" tIns="0" rIns="0" bIns="0" rtlCol="0" anchor="ctr"/>
           <a:lstStyle/>
           <a:p>
-            <a:pPr indent="0" marL="0">
+            <a:pPr marL="0" indent="0">
               <a:buNone/>
             </a:pPr>
             <a:r>
@@ -29908,7 +29297,7 @@
           <a:bodyPr wrap="square" lIns="0" tIns="0" rIns="0" bIns="0" rtlCol="0" anchor="ctr"/>
           <a:lstStyle/>
           <a:p>
-            <a:pPr indent="0" marL="0">
+            <a:pPr marL="0" indent="0">
               <a:buNone/>
             </a:pPr>
             <a:r>
@@ -29947,7 +29336,7 @@
           <a:bodyPr wrap="square" lIns="0" tIns="0" rIns="0" bIns="0" rtlCol="0" anchor="ctr"/>
           <a:lstStyle/>
           <a:p>
-            <a:pPr indent="0" marL="0">
+            <a:pPr marL="0" indent="0">
               <a:buNone/>
             </a:pPr>
             <a:r>
@@ -29986,7 +29375,7 @@
           <a:bodyPr wrap="square" lIns="0" tIns="0" rIns="0" bIns="0" rtlCol="0" anchor="ctr"/>
           <a:lstStyle/>
           <a:p>
-            <a:pPr indent="0" marL="0">
+            <a:pPr marL="0" indent="0">
               <a:buNone/>
             </a:pPr>
             <a:r>
@@ -30052,7 +29441,7 @@
           <a:bodyPr wrap="square" lIns="0" tIns="0" rIns="0" bIns="0" rtlCol="0" anchor="ctr"/>
           <a:lstStyle/>
           <a:p>
-            <a:pPr indent="0" marL="0">
+            <a:pPr marL="0" indent="0">
               <a:buNone/>
             </a:pPr>
             <a:r>
@@ -30091,7 +29480,7 @@
           <a:bodyPr wrap="square" lIns="0" tIns="0" rIns="0" bIns="0" rtlCol="0" anchor="ctr"/>
           <a:lstStyle/>
           <a:p>
-            <a:pPr indent="0" marL="0">
+            <a:pPr marL="0" indent="0">
               <a:buNone/>
             </a:pPr>
             <a:r>
@@ -30130,7 +29519,7 @@
           <a:bodyPr wrap="square" lIns="0" tIns="0" rIns="0" bIns="0" rtlCol="0" anchor="ctr"/>
           <a:lstStyle/>
           <a:p>
-            <a:pPr indent="0" marL="0">
+            <a:pPr marL="0" indent="0">
               <a:buNone/>
             </a:pPr>
             <a:r>
@@ -30169,7 +29558,7 @@
           <a:bodyPr wrap="square" lIns="0" tIns="0" rIns="0" bIns="0" rtlCol="0" anchor="ctr"/>
           <a:lstStyle/>
           <a:p>
-            <a:pPr indent="0" marL="0">
+            <a:pPr marL="0" indent="0">
               <a:buNone/>
             </a:pPr>
             <a:r>
@@ -30262,14 +29651,14 @@
           <a:bodyPr wrap="square" lIns="0" tIns="0" rIns="0" bIns="0" rtlCol="0" anchor="ctr"/>
           <a:lstStyle/>
           <a:p>
-            <a:pPr indent="0" marL="0">
+            <a:pPr marL="0" indent="0">
               <a:lnSpc>
                 <a:spcPts val="1725"/>
               </a:lnSpc>
               <a:buNone/>
             </a:pPr>
             <a:r>
-              <a:rPr lang="en-US" sz="1000" b="1" spc="130" kern="0" dirty="0">
+              <a:rPr lang="en-US" sz="1000" b="1" kern="0" spc="130" dirty="0">
                 <a:solidFill>
                   <a:srgbClr val="E6115E"/>
                 </a:solidFill>
@@ -30279,12 +29668,6 @@
               </a:rPr>
               <a:t>ANALOGÍA   </a:t>
             </a:r>
-            <a:pPr indent="0" marL="0">
-              <a:lnSpc>
-                <a:spcPts val="1725"/>
-              </a:lnSpc>
-              <a:buNone/>
-            </a:pPr>
             <a:r>
               <a:rPr lang="en-US" sz="1250" dirty="0">
                 <a:solidFill>
@@ -30321,7 +29704,7 @@
           <a:bodyPr wrap="square" lIns="0" tIns="0" rIns="0" bIns="0" rtlCol="0" anchor="ctr"/>
           <a:lstStyle/>
           <a:p>
-            <a:pPr indent="0" marL="0">
+            <a:pPr marL="0" indent="0">
               <a:buNone/>
             </a:pPr>
             <a:r>
@@ -30360,7 +29743,7 @@
           <a:bodyPr wrap="square" lIns="0" tIns="0" rIns="0" bIns="0" rtlCol="0" anchor="ctr"/>
           <a:lstStyle/>
           <a:p>
-            <a:pPr algn="r" indent="0" marL="0">
+            <a:pPr marL="0" indent="0" algn="r">
               <a:buNone/>
             </a:pPr>
             <a:r>
@@ -30394,6 +29777,7 @@
         <a:solidFill>
           <a:srgbClr val="F5F7FB"/>
         </a:solidFill>
+        <a:effectLst/>
       </p:bgPr>
     </p:bg>
     <p:spTree>
@@ -30458,11 +29842,11 @@
           <a:bodyPr wrap="square" lIns="0" tIns="0" rIns="0" bIns="0" rtlCol="0" anchor="ctr"/>
           <a:lstStyle/>
           <a:p>
-            <a:pPr algn="ctr" indent="0" marL="0">
-              <a:buNone/>
-            </a:pPr>
-            <a:r>
-              <a:rPr lang="en-US" sz="1150" b="1" spc="120" kern="0" dirty="0">
+            <a:pPr marL="0" indent="0" algn="ctr">
+              <a:buNone/>
+            </a:pPr>
+            <a:r>
+              <a:rPr lang="en-US" sz="1150" b="1" kern="0" spc="120" dirty="0">
                 <a:solidFill>
                   <a:srgbClr val="FFFFFF"/>
                 </a:solidFill>
@@ -30497,7 +29881,7 @@
           <a:bodyPr wrap="square" lIns="0" tIns="0" rIns="0" bIns="0" rtlCol="0" anchor="ctr"/>
           <a:lstStyle/>
           <a:p>
-            <a:pPr indent="0" marL="0">
+            <a:pPr marL="0" indent="0">
               <a:buNone/>
             </a:pPr>
             <a:r>
@@ -30536,7 +29920,7 @@
           <a:bodyPr wrap="square" lIns="0" tIns="0" rIns="0" bIns="0" rtlCol="0" anchor="ctr"/>
           <a:lstStyle/>
           <a:p>
-            <a:pPr indent="0" marL="0">
+            <a:pPr marL="0" indent="0">
               <a:buNone/>
             </a:pPr>
             <a:r>
@@ -30629,7 +30013,7 @@
           <a:bodyPr wrap="square" lIns="0" tIns="0" rIns="0" bIns="0" rtlCol="0" anchor="ctr"/>
           <a:lstStyle/>
           <a:p>
-            <a:pPr indent="0" marL="0">
+            <a:pPr marL="0" indent="0">
               <a:buNone/>
             </a:pPr>
             <a:r>
@@ -30789,7 +30173,7 @@
           <a:bodyPr wrap="square" lIns="0" tIns="0" rIns="0" bIns="0" rtlCol="0" anchor="ctr"/>
           <a:lstStyle/>
           <a:p>
-            <a:pPr algn="ctr" indent="0" marL="0">
+            <a:pPr marL="0" indent="0" algn="ctr">
               <a:buNone/>
             </a:pPr>
             <a:r>
@@ -30828,7 +30212,7 @@
           <a:bodyPr wrap="square" lIns="0" tIns="0" rIns="0" bIns="0" rtlCol="0" anchor="t"/>
           <a:lstStyle/>
           <a:p>
-            <a:pPr algn="ctr" indent="0" marL="0">
+            <a:pPr marL="0" indent="0" algn="ctr">
               <a:lnSpc>
                 <a:spcPts val="1300"/>
               </a:lnSpc>
@@ -30897,7 +30281,7 @@
           <a:bodyPr wrap="square" lIns="0" tIns="0" rIns="0" bIns="0" rtlCol="0" anchor="ctr"/>
           <a:lstStyle/>
           <a:p>
-            <a:pPr algn="ctr" indent="0" marL="0">
+            <a:pPr marL="0" indent="0" algn="ctr">
               <a:buNone/>
             </a:pPr>
             <a:r>
@@ -30936,7 +30320,7 @@
           <a:bodyPr wrap="square" lIns="0" tIns="0" rIns="0" bIns="0" rtlCol="0" anchor="t"/>
           <a:lstStyle/>
           <a:p>
-            <a:pPr algn="ctr" indent="0" marL="0">
+            <a:pPr marL="0" indent="0" algn="ctr">
               <a:lnSpc>
                 <a:spcPts val="1300"/>
               </a:lnSpc>
@@ -31005,7 +30389,7 @@
           <a:bodyPr wrap="square" lIns="0" tIns="0" rIns="0" bIns="0" rtlCol="0" anchor="ctr"/>
           <a:lstStyle/>
           <a:p>
-            <a:pPr algn="ctr" indent="0" marL="0">
+            <a:pPr marL="0" indent="0" algn="ctr">
               <a:buNone/>
             </a:pPr>
             <a:r>
@@ -31044,7 +30428,7 @@
           <a:bodyPr wrap="square" lIns="0" tIns="0" rIns="0" bIns="0" rtlCol="0" anchor="t"/>
           <a:lstStyle/>
           <a:p>
-            <a:pPr algn="ctr" indent="0" marL="0">
+            <a:pPr marL="0" indent="0" algn="ctr">
               <a:lnSpc>
                 <a:spcPts val="1300"/>
               </a:lnSpc>
@@ -31113,7 +30497,7 @@
           <a:bodyPr wrap="square" lIns="0" tIns="0" rIns="0" bIns="0" rtlCol="0" anchor="ctr"/>
           <a:lstStyle/>
           <a:p>
-            <a:pPr algn="ctr" indent="0" marL="0">
+            <a:pPr marL="0" indent="0" algn="ctr">
               <a:buNone/>
             </a:pPr>
             <a:r>
@@ -31152,7 +30536,7 @@
           <a:bodyPr wrap="square" lIns="0" tIns="0" rIns="0" bIns="0" rtlCol="0" anchor="t"/>
           <a:lstStyle/>
           <a:p>
-            <a:pPr algn="ctr" indent="0" marL="0">
+            <a:pPr marL="0" indent="0" algn="ctr">
               <a:lnSpc>
                 <a:spcPts val="1300"/>
               </a:lnSpc>
@@ -31221,7 +30605,7 @@
           <a:bodyPr wrap="square" lIns="0" tIns="0" rIns="0" bIns="0" rtlCol="0" anchor="ctr"/>
           <a:lstStyle/>
           <a:p>
-            <a:pPr indent="0" marL="0">
+            <a:pPr marL="0" indent="0">
               <a:buNone/>
             </a:pPr>
             <a:r>
@@ -31260,7 +30644,7 @@
           <a:bodyPr wrap="square" lIns="0" tIns="0" rIns="0" bIns="0" rtlCol="0" anchor="t"/>
           <a:lstStyle/>
           <a:p>
-            <a:pPr indent="0" marL="0">
+            <a:pPr marL="0" indent="0">
               <a:lnSpc>
                 <a:spcPts val="1550"/>
               </a:lnSpc>
@@ -31302,7 +30686,7 @@
           <a:bodyPr wrap="square" lIns="0" tIns="0" rIns="0" bIns="0" rtlCol="0" anchor="ctr"/>
           <a:lstStyle/>
           <a:p>
-            <a:pPr indent="0" marL="0">
+            <a:pPr marL="0" indent="0">
               <a:buNone/>
             </a:pPr>
             <a:r>
@@ -31341,7 +30725,7 @@
           <a:bodyPr wrap="square" lIns="0" tIns="0" rIns="0" bIns="0" rtlCol="0" anchor="ctr"/>
           <a:lstStyle/>
           <a:p>
-            <a:pPr indent="0" marL="0">
+            <a:pPr marL="0" indent="0">
               <a:buNone/>
             </a:pPr>
             <a:r>
@@ -31380,7 +30764,7 @@
           <a:bodyPr wrap="square" lIns="0" tIns="0" rIns="0" bIns="0" rtlCol="0" anchor="ctr"/>
           <a:lstStyle/>
           <a:p>
-            <a:pPr algn="r" indent="0" marL="0">
+            <a:pPr marL="0" indent="0" algn="r">
               <a:buNone/>
             </a:pPr>
             <a:r>
@@ -31699,4 +31083,319 @@
     </a:ext>
   </a:extLst>
 </a:theme>
+</file>
+
+<file path=ppt/theme/theme2.xml><?xml version="1.0" encoding="utf-8"?>
+<a:theme xmlns:a="http://schemas.openxmlformats.org/drawingml/2006/main" name="Office Theme">
+  <a:themeElements>
+    <a:clrScheme name="Office">
+      <a:dk1>
+        <a:sysClr val="windowText" lastClr="000000"/>
+      </a:dk1>
+      <a:lt1>
+        <a:sysClr val="window" lastClr="FFFFFF"/>
+      </a:lt1>
+      <a:dk2>
+        <a:srgbClr val="0E2841"/>
+      </a:dk2>
+      <a:lt2>
+        <a:srgbClr val="E8E8E8"/>
+      </a:lt2>
+      <a:accent1>
+        <a:srgbClr val="156082"/>
+      </a:accent1>
+      <a:accent2>
+        <a:srgbClr val="E97132"/>
+      </a:accent2>
+      <a:accent3>
+        <a:srgbClr val="196B24"/>
+      </a:accent3>
+      <a:accent4>
+        <a:srgbClr val="0F9ED5"/>
+      </a:accent4>
+      <a:accent5>
+        <a:srgbClr val="A02B93"/>
+      </a:accent5>
+      <a:accent6>
+        <a:srgbClr val="4EA72E"/>
+      </a:accent6>
+      <a:hlink>
+        <a:srgbClr val="467886"/>
+      </a:hlink>
+      <a:folHlink>
+        <a:srgbClr val="96607D"/>
+      </a:folHlink>
+    </a:clrScheme>
+    <a:fontScheme name="Office">
+      <a:majorFont>
+        <a:latin typeface="Aptos Display" panose="02110004020202020204"/>
+        <a:ea typeface=""/>
+        <a:cs typeface=""/>
+        <a:font script="Jpan" typeface="游ゴシック Light"/>
+        <a:font script="Hang" typeface="맑은 고딕"/>
+        <a:font script="Hans" typeface="等线 Light"/>
+        <a:font script="Hant" typeface="新細明體"/>
+        <a:font script="Arab" typeface="Times New Roman"/>
+        <a:font script="Hebr" typeface="Times New Roman"/>
+        <a:font script="Thai" typeface="Angsana New"/>
+        <a:font script="Ethi" typeface="Nyala"/>
+        <a:font script="Beng" typeface="Vrinda"/>
+        <a:font script="Gujr" typeface="Shruti"/>
+        <a:font script="Khmr" typeface="MoolBoran"/>
+        <a:font script="Knda" typeface="Tunga"/>
+        <a:font script="Guru" typeface="Raavi"/>
+        <a:font script="Cans" typeface="Euphemia"/>
+        <a:font script="Cher" typeface="Plantagenet Cherokee"/>
+        <a:font script="Yiii" typeface="Microsoft Yi Baiti"/>
+        <a:font script="Tibt" typeface="Microsoft Himalaya"/>
+        <a:font script="Thaa" typeface="MV Boli"/>
+        <a:font script="Deva" typeface="Mangal"/>
+        <a:font script="Telu" typeface="Gautami"/>
+        <a:font script="Taml" typeface="Latha"/>
+        <a:font script="Syrc" typeface="Estrangelo Edessa"/>
+        <a:font script="Orya" typeface="Kalinga"/>
+        <a:font script="Mlym" typeface="Kartika"/>
+        <a:font script="Laoo" typeface="DokChampa"/>
+        <a:font script="Sinh" typeface="Iskoola Pota"/>
+        <a:font script="Mong" typeface="Mongolian Baiti"/>
+        <a:font script="Viet" typeface="Times New Roman"/>
+        <a:font script="Uigh" typeface="Microsoft Uighur"/>
+        <a:font script="Geor" typeface="Sylfaen"/>
+        <a:font script="Armn" typeface="Arial"/>
+        <a:font script="Bugi" typeface="Leelawadee UI"/>
+        <a:font script="Bopo" typeface="Microsoft JhengHei"/>
+        <a:font script="Java" typeface="Javanese Text"/>
+        <a:font script="Lisu" typeface="Segoe UI"/>
+        <a:font script="Mymr" typeface="Myanmar Text"/>
+        <a:font script="Nkoo" typeface="Ebrima"/>
+        <a:font script="Olck" typeface="Nirmala UI"/>
+        <a:font script="Osma" typeface="Ebrima"/>
+        <a:font script="Phag" typeface="Phagspa"/>
+        <a:font script="Syrn" typeface="Estrangelo Edessa"/>
+        <a:font script="Syrj" typeface="Estrangelo Edessa"/>
+        <a:font script="Syre" typeface="Estrangelo Edessa"/>
+        <a:font script="Sora" typeface="Nirmala UI"/>
+        <a:font script="Tale" typeface="Microsoft Tai Le"/>
+        <a:font script="Talu" typeface="Microsoft New Tai Lue"/>
+        <a:font script="Tfng" typeface="Ebrima"/>
+      </a:majorFont>
+      <a:minorFont>
+        <a:latin typeface="Aptos" panose="02110004020202020204"/>
+        <a:ea typeface=""/>
+        <a:cs typeface=""/>
+        <a:font script="Jpan" typeface="游ゴシック"/>
+        <a:font script="Hang" typeface="맑은 고딕"/>
+        <a:font script="Hans" typeface="等线"/>
+        <a:font script="Hant" typeface="新細明體"/>
+        <a:font script="Arab" typeface="Arial"/>
+        <a:font script="Hebr" typeface="Arial"/>
+        <a:font script="Thai" typeface="Cordia New"/>
+        <a:font script="Ethi" typeface="Nyala"/>
+        <a:font script="Beng" typeface="Vrinda"/>
+        <a:font script="Gujr" typeface="Shruti"/>
+        <a:font script="Khmr" typeface="DaunPenh"/>
+        <a:font script="Knda" typeface="Tunga"/>
+        <a:font script="Guru" typeface="Raavi"/>
+        <a:font script="Cans" typeface="Euphemia"/>
+        <a:font script="Cher" typeface="Plantagenet Cherokee"/>
+        <a:font script="Yiii" typeface="Microsoft Yi Baiti"/>
+        <a:font script="Tibt" typeface="Microsoft Himalaya"/>
+        <a:font script="Thaa" typeface="MV Boli"/>
+        <a:font script="Deva" typeface="Mangal"/>
+        <a:font script="Telu" typeface="Gautami"/>
+        <a:font script="Taml" typeface="Latha"/>
+        <a:font script="Syrc" typeface="Estrangelo Edessa"/>
+        <a:font script="Orya" typeface="Kalinga"/>
+        <a:font script="Mlym" typeface="Kartika"/>
+        <a:font script="Laoo" typeface="DokChampa"/>
+        <a:font script="Sinh" typeface="Iskoola Pota"/>
+        <a:font script="Mong" typeface="Mongolian Baiti"/>
+        <a:font script="Viet" typeface="Arial"/>
+        <a:font script="Uigh" typeface="Microsoft Uighur"/>
+        <a:font script="Geor" typeface="Sylfaen"/>
+        <a:font script="Armn" typeface="Arial"/>
+        <a:font script="Bugi" typeface="Leelawadee UI"/>
+        <a:font script="Bopo" typeface="Microsoft JhengHei"/>
+        <a:font script="Java" typeface="Javanese Text"/>
+        <a:font script="Lisu" typeface="Segoe UI"/>
+        <a:font script="Mymr" typeface="Myanmar Text"/>
+        <a:font script="Nkoo" typeface="Ebrima"/>
+        <a:font script="Olck" typeface="Nirmala UI"/>
+        <a:font script="Osma" typeface="Ebrima"/>
+        <a:font script="Phag" typeface="Phagspa"/>
+        <a:font script="Syrn" typeface="Estrangelo Edessa"/>
+        <a:font script="Syrj" typeface="Estrangelo Edessa"/>
+        <a:font script="Syre" typeface="Estrangelo Edessa"/>
+        <a:font script="Sora" typeface="Nirmala UI"/>
+        <a:font script="Tale" typeface="Microsoft Tai Le"/>
+        <a:font script="Talu" typeface="Microsoft New Tai Lue"/>
+        <a:font script="Tfng" typeface="Ebrima"/>
+      </a:minorFont>
+    </a:fontScheme>
+    <a:fmtScheme name="Office">
+      <a:fillStyleLst>
+        <a:solidFill>
+          <a:schemeClr val="phClr"/>
+        </a:solidFill>
+        <a:gradFill rotWithShape="1">
+          <a:gsLst>
+            <a:gs pos="0">
+              <a:schemeClr val="phClr">
+                <a:lumMod val="110000"/>
+                <a:satMod val="105000"/>
+                <a:tint val="67000"/>
+              </a:schemeClr>
+            </a:gs>
+            <a:gs pos="50000">
+              <a:schemeClr val="phClr">
+                <a:lumMod val="105000"/>
+                <a:satMod val="103000"/>
+                <a:tint val="73000"/>
+              </a:schemeClr>
+            </a:gs>
+            <a:gs pos="100000">
+              <a:schemeClr val="phClr">
+                <a:lumMod val="105000"/>
+                <a:satMod val="109000"/>
+                <a:tint val="81000"/>
+              </a:schemeClr>
+            </a:gs>
+          </a:gsLst>
+          <a:lin ang="5400000" scaled="0"/>
+        </a:gradFill>
+        <a:gradFill rotWithShape="1">
+          <a:gsLst>
+            <a:gs pos="0">
+              <a:schemeClr val="phClr">
+                <a:satMod val="103000"/>
+                <a:lumMod val="102000"/>
+                <a:tint val="94000"/>
+              </a:schemeClr>
+            </a:gs>
+            <a:gs pos="50000">
+              <a:schemeClr val="phClr">
+                <a:satMod val="110000"/>
+                <a:lumMod val="100000"/>
+                <a:shade val="100000"/>
+              </a:schemeClr>
+            </a:gs>
+            <a:gs pos="100000">
+              <a:schemeClr val="phClr">
+                <a:lumMod val="99000"/>
+                <a:satMod val="120000"/>
+                <a:shade val="78000"/>
+              </a:schemeClr>
+            </a:gs>
+          </a:gsLst>
+          <a:lin ang="5400000" scaled="0"/>
+        </a:gradFill>
+      </a:fillStyleLst>
+      <a:lnStyleLst>
+        <a:ln w="12700" cap="flat" cmpd="sng" algn="ctr">
+          <a:solidFill>
+            <a:schemeClr val="phClr"/>
+          </a:solidFill>
+          <a:prstDash val="solid"/>
+          <a:miter lim="800000"/>
+        </a:ln>
+        <a:ln w="19050" cap="flat" cmpd="sng" algn="ctr">
+          <a:solidFill>
+            <a:schemeClr val="phClr"/>
+          </a:solidFill>
+          <a:prstDash val="solid"/>
+          <a:miter lim="800000"/>
+        </a:ln>
+        <a:ln w="25400" cap="flat" cmpd="sng" algn="ctr">
+          <a:solidFill>
+            <a:schemeClr val="phClr"/>
+          </a:solidFill>
+          <a:prstDash val="solid"/>
+          <a:miter lim="800000"/>
+        </a:ln>
+      </a:lnStyleLst>
+      <a:effectStyleLst>
+        <a:effectStyle>
+          <a:effectLst/>
+        </a:effectStyle>
+        <a:effectStyle>
+          <a:effectLst/>
+        </a:effectStyle>
+        <a:effectStyle>
+          <a:effectLst>
+            <a:outerShdw blurRad="57150" dist="19050" dir="5400000" algn="ctr" rotWithShape="0">
+              <a:srgbClr val="000000">
+                <a:alpha val="63000"/>
+              </a:srgbClr>
+            </a:outerShdw>
+          </a:effectLst>
+        </a:effectStyle>
+      </a:effectStyleLst>
+      <a:bgFillStyleLst>
+        <a:solidFill>
+          <a:schemeClr val="phClr"/>
+        </a:solidFill>
+        <a:solidFill>
+          <a:schemeClr val="phClr">
+            <a:tint val="95000"/>
+            <a:satMod val="170000"/>
+          </a:schemeClr>
+        </a:solidFill>
+        <a:gradFill rotWithShape="1">
+          <a:gsLst>
+            <a:gs pos="0">
+              <a:schemeClr val="phClr">
+                <a:tint val="93000"/>
+                <a:satMod val="150000"/>
+                <a:shade val="98000"/>
+                <a:lumMod val="102000"/>
+              </a:schemeClr>
+            </a:gs>
+            <a:gs pos="50000">
+              <a:schemeClr val="phClr">
+                <a:tint val="98000"/>
+                <a:satMod val="130000"/>
+                <a:shade val="90000"/>
+                <a:lumMod val="103000"/>
+              </a:schemeClr>
+            </a:gs>
+            <a:gs pos="100000">
+              <a:schemeClr val="phClr">
+                <a:shade val="63000"/>
+                <a:satMod val="120000"/>
+              </a:schemeClr>
+            </a:gs>
+          </a:gsLst>
+          <a:lin ang="5400000" scaled="0"/>
+        </a:gradFill>
+      </a:bgFillStyleLst>
+    </a:fmtScheme>
+  </a:themeElements>
+  <a:objectDefaults>
+    <a:lnDef>
+      <a:spPr/>
+      <a:bodyPr/>
+      <a:lstStyle/>
+      <a:style>
+        <a:lnRef idx="2">
+          <a:schemeClr val="accent1"/>
+        </a:lnRef>
+        <a:fillRef idx="0">
+          <a:schemeClr val="accent1"/>
+        </a:fillRef>
+        <a:effectRef idx="1">
+          <a:schemeClr val="accent1"/>
+        </a:effectRef>
+        <a:fontRef idx="minor">
+          <a:schemeClr val="tx1"/>
+        </a:fontRef>
+      </a:style>
+    </a:lnDef>
+  </a:objectDefaults>
+  <a:extraClrSchemeLst/>
+  <a:extLst>
+    <a:ext uri="{05A4C25C-085E-4340-85A3-A5531E510DB2}">
+      <thm15:themeFamily xmlns:thm15="http://schemas.microsoft.com/office/thememl/2012/main" name="Office Theme" id="{2E142A2C-CD16-42D6-873A-C26D2A0506FA}" vid="{1BDDFF52-6CD6-40A5-AB3C-68EB2F1E4D0A}"/>
+    </a:ext>
+  </a:extLst>
+</a:theme>
 </file>